--- a/docs/shine-architecture-presentation.pptx
+++ b/docs/shine-architecture-presentation.pptx
@@ -28,9 +28,10 @@
     <p:sldId id="276" r:id="rId22"/>
     <p:sldId id="277" r:id="rId23"/>
     <p:sldId id="278" r:id="rId24"/>
+    <p:sldId id="279" r:id="rId25"/>
   </p:sldIdLst>
   <p:notesMasterIdLst>
-    <p:notesMasterId r:id="rId25"/>
+    <p:notesMasterId r:id="rId26"/>
   </p:notesMasterIdLst>
   <p:sldSz cx="12191695" cy="6858000"/>
   <p:notesSz cx="6858000" cy="12191695"/>
@@ -1868,6 +1869,94 @@
             <a:fld id="{F7021451-1387-4CA6-816F-3879F97B5CBC}" type="slidenum">
               <a:rPr lang="en-US"/>
               <a:t>23</a:t>
+            </a:fld>
+            <a:endParaRPr lang="en-US"/>
+          </a:p>
+        </p:txBody>
+      </p:sp>
+    </p:spTree>
+    <p:extLst>
+      <p:ext uri="{BB962C8B-B14F-4D97-AF65-F5344CB8AC3E}">
+        <p14:creationId xmlns:p14="http://schemas.microsoft.com/office/powerpoint/2010/main" val="1024086991"/>
+      </p:ext>
+    </p:extLst>
+  </p:cSld>
+  <p:clrMapOvr>
+    <a:masterClrMapping/>
+  </p:clrMapOvr>
+</p:notes>
+</file>
+
+<file path=ppt/notesSlides/notesSlide24.xml><?xml version="1.0" encoding="utf-8"?>
+<p:notes xmlns:a="http://schemas.openxmlformats.org/drawingml/2006/main" xmlns:r="http://schemas.openxmlformats.org/officeDocument/2006/relationships" xmlns:p="http://schemas.openxmlformats.org/presentationml/2006/main">
+  <p:cSld>
+    <p:spTree>
+      <p:nvGrpSpPr>
+        <p:cNvPr id="1" name=""/>
+        <p:cNvGrpSpPr/>
+        <p:nvPr/>
+      </p:nvGrpSpPr>
+      <p:grpSpPr>
+        <a:xfrm>
+          <a:off x="0" y="0"/>
+          <a:ext cx="0" cy="0"/>
+          <a:chOff x="0" y="0"/>
+          <a:chExt cx="0" cy="0"/>
+        </a:xfrm>
+      </p:grpSpPr>
+      <p:sp>
+        <p:nvSpPr>
+          <p:cNvPr id="2" name="Slide Image Placeholder 1"/>
+          <p:cNvSpPr>
+            <a:spLocks noGrp="1" noRot="1" noChangeAspect="1"/>
+          </p:cNvSpPr>
+          <p:nvPr>
+            <p:ph type="sldImg"/>
+          </p:nvPr>
+        </p:nvSpPr>
+        <p:spPr/>
+      </p:sp>
+      <p:sp>
+        <p:nvSpPr>
+          <p:cNvPr id="3" name="Notes Placeholder 2"/>
+          <p:cNvSpPr>
+            <a:spLocks noGrp="1"/>
+          </p:cNvSpPr>
+          <p:nvPr>
+            <p:ph type="body" idx="1"/>
+          </p:nvPr>
+        </p:nvSpPr>
+        <p:spPr/>
+        <p:txBody>
+          <a:bodyPr/>
+          <a:lstStyle/>
+          <a:p>
+            <a:r>
+              <a:rPr lang="en-US" dirty="0"/>
+              <a:t/>
+            </a:r>
+            <a:endParaRPr lang="en-US" dirty="0"/>
+          </a:p>
+        </p:txBody>
+      </p:sp>
+      <p:sp>
+        <p:nvSpPr>
+          <p:cNvPr id="4" name="Slide Number Placeholder 3"/>
+          <p:cNvSpPr>
+            <a:spLocks noGrp="1"/>
+          </p:cNvSpPr>
+          <p:nvPr>
+            <p:ph type="sldNum" sz="quarter" idx="10"/>
+          </p:nvPr>
+        </p:nvSpPr>
+        <p:spPr/>
+        <p:txBody>
+          <a:bodyPr/>
+          <a:lstStyle/>
+          <a:p>
+            <a:fld id="{F7021451-1387-4CA6-816F-3879F97B5CBC}" type="slidenum">
+              <a:rPr lang="en-US"/>
+              <a:t>24</a:t>
             </a:fld>
             <a:endParaRPr lang="en-US"/>
           </a:p>
@@ -3012,7 +3101,7 @@
                 <a:ea typeface="Courier New" pitchFamily="34" charset="-122"/>
                 <a:cs typeface="Courier New" pitchFamily="34" charset="-120"/>
               </a:rPr>
-              <a:t>01 / 23</a:t>
+              <a:t>01 / 24</a:t>
             </a:r>
             <a:endParaRPr lang="en-US" sz="1100" dirty="0"/>
           </a:p>
@@ -3785,7 +3874,7 @@
                 <a:ea typeface="Courier New" pitchFamily="34" charset="-122"/>
                 <a:cs typeface="Courier New" pitchFamily="34" charset="-120"/>
               </a:rPr>
-              <a:t>10 / 23</a:t>
+              <a:t>10 / 24</a:t>
             </a:r>
             <a:endParaRPr lang="en-US" sz="1100" dirty="0"/>
           </a:p>
@@ -3849,7 +3938,7 @@
                 <a:ea typeface="Courier New" pitchFamily="34" charset="-122"/>
                 <a:cs typeface="Courier New" pitchFamily="34" charset="-120"/>
               </a:rPr>
-              <a:t>LAYER 4: CLOUD WORKERS (ACTIVE CORE)</a:t>
+              <a:t>LAYER 3: LOCALIZATION (ACTIVE CORE)</a:t>
             </a:r>
             <a:endParaRPr lang="en-US" sz="1100" dirty="0"/>
           </a:p>
@@ -3888,7 +3977,7 @@
                 <a:ea typeface="Segoe UI" pitchFamily="34" charset="-122"/>
                 <a:cs typeface="Segoe UI" pitchFamily="34" charset="-120"/>
               </a:rPr>
-              <a:t>Serverless Cloud Run Video Render Worker</a:t>
+              <a:t>Decoupled Audio-Visual Dubbing Engine</a:t>
             </a:r>
             <a:endParaRPr lang="en-US" sz="2600" dirty="0"/>
           </a:p>
@@ -3954,7 +4043,7 @@
                 <a:ea typeface="Segoe UI" pitchFamily="34" charset="-122"/>
                 <a:cs typeface="Segoe UI" pitchFamily="34" charset="-120"/>
               </a:rPr>
-              <a:t>1. Asynchronous Jobs &amp; Headless Playwright
+              <a:t>Track 1: Pure Visual Motion (VIDEO 1)
 </a:t>
             </a:r>
             <a:pPr indent="0" marL="0">
@@ -3972,44 +4061,28 @@
                 <a:ea typeface="Segoe UI" pitchFamily="34" charset="-122"/>
                 <a:cs typeface="Segoe UI" pitchFamily="34" charset="-120"/>
               </a:rPr>
-              <a:t>Episode render tasks are dispatched asynchronously (/render-job), tracking progress from 0% to 100% via API polling or SSE stream.
+              <a:t>Generated as silent video clips via Google Veo 3.1 (veo-3.1-generate-001). Immutable during multi-language dubbing operations.
 </a:t>
             </a:r>
             <a:pPr indent="0" marL="0">
-              <a:lnSpc>
-                <a:spcPct val="120000"/>
-              </a:lnSpc>
-              <a:buNone/>
-            </a:pPr>
-            <a:r>
-              <a:rPr lang="en-US" sz="1200" dirty="0">
-                <a:solidFill>
-                  <a:srgbClr val="334155"/>
-                </a:solidFill>
-                <a:latin typeface="Segoe UI" pitchFamily="34" charset="0"/>
-                <a:ea typeface="Segoe UI" pitchFamily="34" charset="-122"/>
-                <a:cs typeface="Segoe UI" pitchFamily="34" charset="-120"/>
-              </a:rPr>
-              <a:t>• shine-render-worker container launches headless Chromium WebCodecs compositors.
-</a:t>
-            </a:r>
-            <a:pPr indent="0" marL="0">
-              <a:lnSpc>
-                <a:spcPct val="120000"/>
-              </a:lnSpc>
-              <a:buNone/>
-            </a:pPr>
-            <a:r>
-              <a:rPr lang="en-US" sz="1200" dirty="0">
-                <a:solidFill>
-                  <a:srgbClr val="334155"/>
-                </a:solidFill>
-                <a:latin typeface="Segoe UI" pitchFamily="34" charset="0"/>
-                <a:ea typeface="Segoe UI" pitchFamily="34" charset="-122"/>
-                <a:cs typeface="Segoe UI" pitchFamily="34" charset="-120"/>
-              </a:rPr>
-              <a:t>• Renders master-quality 1080p/4K video frames on Cloud Run.
-</a:t>
+              <a:buNone/>
+            </a:pPr>
+            <a:endParaRPr lang="en-US" sz="1500" dirty="0"/>
+          </a:p>
+          <a:p>
+            <a:pPr indent="0" marL="0">
+              <a:buNone/>
+            </a:pPr>
+            <a:r>
+              <a:rPr lang="en-US" sz="1100" dirty="0">
+                <a:solidFill>
+                  <a:srgbClr val="0F172A"/>
+                </a:solidFill>
+                <a:latin typeface="Courier New" pitchFamily="34" charset="0"/>
+                <a:ea typeface="Courier New" pitchFamily="34" charset="-122"/>
+                <a:cs typeface="Courier New" pitchFamily="34" charset="-120"/>
+              </a:rPr>
+              <a:t>[Scene 01: 6.00s] ── [Scene 02: 5.50s] (Fixed Visuals)</a:t>
             </a:r>
             <a:endParaRPr lang="en-US" sz="1500" dirty="0"/>
           </a:p>
@@ -4075,7 +4148,7 @@
                 <a:ea typeface="Segoe UI" pitchFamily="34" charset="-122"/>
                 <a:cs typeface="Segoe UI" pitchFamily="34" charset="-120"/>
               </a:rPr>
-              <a:t>2. Scale-to-Zero &amp; Parity Audit
+              <a:t>Track 2: Neural TTS Dialogue (AUDIO 1)
 </a:t>
             </a:r>
             <a:pPr indent="0" marL="0">
@@ -4093,46 +4166,113 @@
                 <a:ea typeface="Segoe UI" pitchFamily="34" charset="-122"/>
                 <a:cs typeface="Segoe UI" pitchFamily="34" charset="-120"/>
               </a:rPr>
-              <a:t>Container lifecycle engineered for extreme cost efficiency:
+              <a:t>Synthesized per language track via gemini-3.1-flash-tts-preview (30 distinct voices) with word-level phonetic timestamps.
 </a:t>
             </a:r>
             <a:pPr indent="0" marL="0">
-              <a:lnSpc>
-                <a:spcPct val="120000"/>
-              </a:lnSpc>
-              <a:buNone/>
-            </a:pPr>
-            <a:r>
-              <a:rPr lang="en-US" sz="1200" dirty="0">
-                <a:solidFill>
-                  <a:srgbClr val="334155"/>
-                </a:solidFill>
-                <a:latin typeface="Segoe UI" pitchFamily="34" charset="0"/>
-                <a:ea typeface="Segoe UI" pitchFamily="34" charset="-122"/>
-                <a:cs typeface="Segoe UI" pitchFamily="34" charset="-120"/>
-              </a:rPr>
-              <a:t>• Scale-to-Zero ($0 Idle): Scales to 0 instances when idle, eliminating static server bills.
-</a:t>
-            </a:r>
-            <a:pPr indent="0" marL="0">
-              <a:lnSpc>
-                <a:spcPct val="120000"/>
-              </a:lnSpc>
-              <a:buNone/>
-            </a:pPr>
-            <a:r>
-              <a:rPr lang="en-US" sz="1200" dirty="0">
-                <a:solidFill>
-                  <a:srgbClr val="334155"/>
-                </a:solidFill>
-                <a:latin typeface="Segoe UI" pitchFamily="34" charset="0"/>
-                <a:ea typeface="Segoe UI" pitchFamily="34" charset="-122"/>
-                <a:cs typeface="Segoe UI" pitchFamily="34" charset="-120"/>
-              </a:rPr>
-              <a:t>• Automated SSIM diff tool ensures the final cloud video matches editor preview with SSIM &gt; 0.999 parity.
-</a:t>
-            </a:r>
+              <a:buNone/>
+            </a:pPr>
             <a:endParaRPr lang="en-US" sz="1500" dirty="0"/>
+          </a:p>
+          <a:p>
+            <a:pPr indent="0" marL="0">
+              <a:buNone/>
+            </a:pPr>
+            <a:r>
+              <a:rPr lang="en-US" sz="1100" dirty="0">
+                <a:solidFill>
+                  <a:srgbClr val="0F172A"/>
+                </a:solidFill>
+                <a:latin typeface="Courier New" pitchFamily="34" charset="0"/>
+                <a:ea typeface="Courier New" pitchFamily="34" charset="-122"/>
+                <a:cs typeface="Courier New" pitchFamily="34" charset="-120"/>
+              </a:rPr>
+              <a:t>EN: "Where are you?" (2.1s)</a:t>
+            </a:r>
+            <a:endParaRPr lang="en-US" sz="1500" dirty="0"/>
+          </a:p>
+          <a:p>
+            <a:pPr indent="0" marL="0">
+              <a:buNone/>
+            </a:pPr>
+            <a:r>
+              <a:rPr lang="en-US" sz="1100" dirty="0">
+                <a:solidFill>
+                  <a:srgbClr val="0F172A"/>
+                </a:solidFill>
+                <a:latin typeface="Courier New" pitchFamily="34" charset="0"/>
+                <a:ea typeface="Courier New" pitchFamily="34" charset="-122"/>
+                <a:cs typeface="Courier New" pitchFamily="34" charset="-120"/>
+              </a:rPr>
+              <a:t>VI: "Anh đang ở đâu?" (2.6s, Δt)</a:t>
+            </a:r>
+            <a:endParaRPr lang="en-US" sz="1500" dirty="0"/>
+          </a:p>
+        </p:txBody>
+      </p:sp>
+      <p:sp>
+        <p:nvSpPr>
+          <p:cNvPr id="14" name="Shape 12"/>
+          <p:cNvSpPr/>
+          <p:nvPr/>
+        </p:nvSpPr>
+        <p:spPr>
+          <a:xfrm>
+            <a:off x="731520" y="5852160"/>
+            <a:ext cx="10698480" cy="502920"/>
+          </a:xfrm>
+          <a:prstGeom prst="roundRect">
+            <a:avLst>
+              <a:gd name="adj" fmla="val 14545"/>
+            </a:avLst>
+          </a:prstGeom>
+          <a:solidFill>
+            <a:srgbClr val="F8FAFC"/>
+          </a:solidFill>
+          <a:ln w="12700">
+            <a:solidFill>
+              <a:srgbClr val="E2E8F0"/>
+            </a:solidFill>
+            <a:prstDash val="solid"/>
+          </a:ln>
+        </p:spPr>
+      </p:sp>
+      <p:sp>
+        <p:nvSpPr>
+          <p:cNvPr id="15" name="Text 13"/>
+          <p:cNvSpPr/>
+          <p:nvPr/>
+        </p:nvSpPr>
+        <p:spPr>
+          <a:xfrm>
+            <a:off x="914400" y="5852160"/>
+            <a:ext cx="10332720" cy="502920"/>
+          </a:xfrm>
+          <a:prstGeom prst="rect">
+            <a:avLst/>
+          </a:prstGeom>
+          <a:noFill/>
+          <a:ln/>
+        </p:spPr>
+        <p:txBody>
+          <a:bodyPr wrap="square" rtlCol="0" anchor="ctr"/>
+          <a:lstStyle/>
+          <a:p>
+            <a:pPr indent="0" marL="0">
+              <a:buNone/>
+            </a:pPr>
+            <a:r>
+              <a:rPr lang="en-US" sz="1100" b="1" dirty="0">
+                <a:solidFill>
+                  <a:srgbClr val="475569"/>
+                </a:solidFill>
+                <a:latin typeface="Segoe UI" pitchFamily="34" charset="0"/>
+                <a:ea typeface="Segoe UI" pitchFamily="34" charset="-122"/>
+                <a:cs typeface="Segoe UI" pitchFamily="34" charset="-120"/>
+              </a:rPr>
+              <a:t>💡 Unfair Cost Advantage: To distribute in 5 languages, Shine only swaps the voice track and recalculates timeline timings (Δt). You never re-render expensive video AI clips!</a:t>
+            </a:r>
+            <a:endParaRPr lang="en-US" sz="1100" dirty="0"/>
           </a:p>
         </p:txBody>
       </p:sp>
@@ -4347,7 +4487,7 @@
                 <a:ea typeface="Courier New" pitchFamily="34" charset="-122"/>
                 <a:cs typeface="Courier New" pitchFamily="34" charset="-120"/>
               </a:rPr>
-              <a:t>11 / 23</a:t>
+              <a:t>11 / 24</a:t>
             </a:r>
             <a:endParaRPr lang="en-US" sz="1100" dirty="0"/>
           </a:p>
@@ -4411,7 +4551,7 @@
                 <a:ea typeface="Courier New" pitchFamily="34" charset="-122"/>
                 <a:cs typeface="Courier New" pitchFamily="34" charset="-120"/>
               </a:rPr>
-              <a:t>LAYER 4: AUDIO AI (ACTIVE CORE)</a:t>
+              <a:t>LAYER 4: CLOUD WORKERS (ACTIVE CORE)</a:t>
             </a:r>
             <a:endParaRPr lang="en-US" sz="1100" dirty="0"/>
           </a:p>
@@ -4450,7 +4590,7 @@
                 <a:ea typeface="Segoe UI" pitchFamily="34" charset="-122"/>
                 <a:cs typeface="Segoe UI" pitchFamily="34" charset="-120"/>
               </a:rPr>
-              <a:t>Meta Demucs v4 AI Stem Separation &amp; 3D Audio</a:t>
+              <a:t>Serverless Cloud Run Video Render Worker</a:t>
             </a:r>
             <a:endParaRPr lang="en-US" sz="2600" dirty="0"/>
           </a:p>
@@ -4516,7 +4656,7 @@
                 <a:ea typeface="Segoe UI" pitchFamily="34" charset="-122"/>
                 <a:cs typeface="Segoe UI" pitchFamily="34" charset="-120"/>
               </a:rPr>
-              <a:t>FastAPI Demucs v4 AI Microservice
+              <a:t>1. Asynchronous Jobs &amp; Headless Playwright
 </a:t>
             </a:r>
             <a:pPr indent="0" marL="0">
@@ -4534,7 +4674,7 @@
                 <a:ea typeface="Segoe UI" pitchFamily="34" charset="-122"/>
                 <a:cs typeface="Segoe UI" pitchFamily="34" charset="-120"/>
               </a:rPr>
-              <a:t>Dedicated FastAPI Python microservice on Cloud Run (services/demucs-worker) separates mixed audio into isolated stems:
+              <a:t>Episode render tasks are dispatched asynchronously (/render-job), tracking progress from 0% to 100% via API polling or SSE stream.
 </a:t>
             </a:r>
             <a:pPr indent="0" marL="0">
@@ -4552,7 +4692,7 @@
                 <a:ea typeface="Segoe UI" pitchFamily="34" charset="-122"/>
                 <a:cs typeface="Segoe UI" pitchFamily="34" charset="-120"/>
               </a:rPr>
-              <a:t>• Vocal Isolation: Separates character dialogue from background ambient noise.
+              <a:t>• shine-render-worker container launches headless Chromium WebCodecs compositors.
 </a:t>
             </a:r>
             <a:pPr indent="0" marL="0">
@@ -4570,25 +4710,7 @@
                 <a:ea typeface="Segoe UI" pitchFamily="34" charset="-122"/>
                 <a:cs typeface="Segoe UI" pitchFamily="34" charset="-120"/>
               </a:rPr>
-              <a:t>• Music Extraction: Strips vocal tracks to create clean instrumental soundtracks.
-</a:t>
-            </a:r>
-            <a:pPr indent="0" marL="0">
-              <a:lnSpc>
-                <a:spcPct val="120000"/>
-              </a:lnSpc>
-              <a:buNone/>
-            </a:pPr>
-            <a:r>
-              <a:rPr lang="en-US" sz="1200" dirty="0">
-                <a:solidFill>
-                  <a:srgbClr val="334155"/>
-                </a:solidFill>
-                <a:latin typeface="Segoe UI" pitchFamily="34" charset="0"/>
-                <a:ea typeface="Segoe UI" pitchFamily="34" charset="-122"/>
-                <a:cs typeface="Segoe UI" pitchFamily="34" charset="-120"/>
-              </a:rPr>
-              <a:t>• Parametric Auto-Ducking: Attenuates BGM by 80% with 250ms attack during dialogue intervals.
+              <a:t>• Renders master-quality 1080p/4K video frames on Cloud Run.
 </a:t>
             </a:r>
             <a:endParaRPr lang="en-US" sz="1500" dirty="0"/>
@@ -4655,7 +4777,7 @@
                 <a:ea typeface="Segoe UI" pitchFamily="34" charset="-122"/>
                 <a:cs typeface="Segoe UI" pitchFamily="34" charset="-120"/>
               </a:rPr>
-              <a:t>3D Binaural Spatial Audio Engine
+              <a:t>2. Scale-to-Zero &amp; Parity Audit
 </a:t>
             </a:r>
             <a:pPr indent="0" marL="0">
@@ -4673,7 +4795,7 @@
                 <a:ea typeface="Segoe UI" pitchFamily="34" charset="-122"/>
                 <a:cs typeface="Segoe UI" pitchFamily="34" charset="-120"/>
               </a:rPr>
-              <a:t>Calculates real acoustic physics based on where characters stand on the phone screen:
+              <a:t>Container lifecycle engineered for extreme cost efficiency:
 </a:t>
             </a:r>
             <a:pPr indent="0" marL="0">
@@ -4691,7 +4813,7 @@
                 <a:ea typeface="Segoe UI" pitchFamily="34" charset="-122"/>
                 <a:cs typeface="Segoe UI" pitchFamily="34" charset="-120"/>
               </a:rPr>
-              <a:t>• Sabine RT60 Decay: Simulates realistic room reverb (hallway, bedroom, street).
+              <a:t>• Scale-to-Zero ($0 Idle): Scales to 0 instances when idle, eliminating static server bills.
 </a:t>
             </a:r>
             <a:pPr indent="0" marL="0">
@@ -4709,7 +4831,7 @@
                 <a:ea typeface="Segoe UI" pitchFamily="34" charset="-122"/>
                 <a:cs typeface="Segoe UI" pitchFamily="34" charset="-120"/>
               </a:rPr>
-              <a:t>• Woodworth Head Model: Computes Interaural Time Differences (ITD) between ears.
+              <a:t>• Automated SSIM diff tool ensures the final cloud video matches editor preview with SSIM &gt; 0.999 parity.
 </a:t>
             </a:r>
             <a:endParaRPr lang="en-US" sz="1500" dirty="0"/>
@@ -4927,7 +5049,7 @@
                 <a:ea typeface="Courier New" pitchFamily="34" charset="-122"/>
                 <a:cs typeface="Courier New" pitchFamily="34" charset="-120"/>
               </a:rPr>
-              <a:t>12 / 23</a:t>
+              <a:t>12 / 24</a:t>
             </a:r>
             <a:endParaRPr lang="en-US" sz="1100" dirty="0"/>
           </a:p>
@@ -4991,7 +5113,7 @@
                 <a:ea typeface="Courier New" pitchFamily="34" charset="-122"/>
                 <a:cs typeface="Courier New" pitchFamily="34" charset="-120"/>
               </a:rPr>
-              <a:t>LAYER 5: STORAGE &amp; TRUST (ACTIVE CORE)</a:t>
+              <a:t>LAYER 4: AUDIO AI (ACTIVE CORE)</a:t>
             </a:r>
             <a:endParaRPr lang="en-US" sz="1100" dirty="0"/>
           </a:p>
@@ -5030,7 +5152,7 @@
                 <a:ea typeface="Segoe UI" pitchFamily="34" charset="-122"/>
                 <a:cs typeface="Segoe UI" pitchFamily="34" charset="-120"/>
               </a:rPr>
-              <a:t>Pluggable Persistence, SynthID &amp; C2PA Provenance</a:t>
+              <a:t>Meta Demucs v4 AI Stem Separation &amp; 3D Audio</a:t>
             </a:r>
             <a:endParaRPr lang="en-US" sz="2600" dirty="0"/>
           </a:p>
@@ -5096,7 +5218,7 @@
                 <a:ea typeface="Segoe UI" pitchFamily="34" charset="-122"/>
                 <a:cs typeface="Segoe UI" pitchFamily="34" charset="-120"/>
               </a:rPr>
-              <a:t>Pluggable Database Architecture (IDatabaseProvider)
+              <a:t>FastAPI Demucs v4 AI Microservice
 </a:t>
             </a:r>
             <a:pPr indent="0" marL="0">
@@ -5114,7 +5236,7 @@
                 <a:ea typeface="Segoe UI" pitchFamily="34" charset="-122"/>
                 <a:cs typeface="Segoe UI" pitchFamily="34" charset="-120"/>
               </a:rPr>
-              <a:t>Enforces strict repository interfaces, enabling database switching via environment variables:
+              <a:t>Dedicated FastAPI Python microservice on Cloud Run (services/demucs-worker) separates mixed audio into isolated stems:
 </a:t>
             </a:r>
             <a:pPr indent="0" marL="0">
@@ -5132,7 +5254,7 @@
                 <a:ea typeface="Segoe UI" pitchFamily="34" charset="-122"/>
                 <a:cs typeface="Segoe UI" pitchFamily="34" charset="-120"/>
               </a:rPr>
-              <a:t>• Firestore Native (shine-db) — Primary Cloud NoSQL
+              <a:t>• Vocal Isolation: Separates character dialogue from background ambient noise.
 </a:t>
             </a:r>
             <a:pPr indent="0" marL="0">
@@ -5150,7 +5272,7 @@
                 <a:ea typeface="Segoe UI" pitchFamily="34" charset="-122"/>
                 <a:cs typeface="Segoe UI" pitchFamily="34" charset="-120"/>
               </a:rPr>
-              <a:t>• MongoDB Atlas — Document Database
+              <a:t>• Music Extraction: Strips vocal tracks to create clean instrumental soundtracks.
 </a:t>
             </a:r>
             <a:pPr indent="0" marL="0">
@@ -5168,7 +5290,7 @@
                 <a:ea typeface="Segoe UI" pitchFamily="34" charset="-122"/>
                 <a:cs typeface="Segoe UI" pitchFamily="34" charset="-120"/>
               </a:rPr>
-              <a:t>• SQLite (shine.db) — Local Development
+              <a:t>• Parametric Auto-Ducking: Attenuates BGM by 80% with 250ms attack during dialogue intervals.
 </a:t>
             </a:r>
             <a:endParaRPr lang="en-US" sz="1500" dirty="0"/>
@@ -5235,7 +5357,7 @@
                 <a:ea typeface="Segoe UI" pitchFamily="34" charset="-122"/>
                 <a:cs typeface="Segoe UI" pitchFamily="34" charset="-120"/>
               </a:rPr>
-              <a:t>Digital Watermarking &amp; Provenance
+              <a:t>3D Binaural Spatial Audio Engine
 </a:t>
             </a:r>
             <a:pPr indent="0" marL="0">
@@ -5253,7 +5375,7 @@
                 <a:ea typeface="Segoe UI" pitchFamily="34" charset="-122"/>
                 <a:cs typeface="Segoe UI" pitchFamily="34" charset="-120"/>
               </a:rPr>
-              <a:t>Enterprise trust and media integrity suite:
+              <a:t>Calculates real acoustic physics based on where characters stand on the phone screen:
 </a:t>
             </a:r>
             <a:pPr indent="0" marL="0">
@@ -5271,7 +5393,7 @@
                 <a:ea typeface="Segoe UI" pitchFamily="34" charset="-122"/>
                 <a:cs typeface="Segoe UI" pitchFamily="34" charset="-120"/>
               </a:rPr>
-              <a:t>• Google SynthID: Embeds imperceptible digital watermarks into audio &amp; video.
+              <a:t>• Sabine RT60 Decay: Simulates realistic room reverb (hallway, bedroom, street).
 </a:t>
             </a:r>
             <a:pPr indent="0" marL="0">
@@ -5289,25 +5411,7 @@
                 <a:ea typeface="Segoe UI" pitchFamily="34" charset="-122"/>
                 <a:cs typeface="Segoe UI" pitchFamily="34" charset="-120"/>
               </a:rPr>
-              <a:t>• C2PA Content Credentials: Cryptographically signs provenance manifests.
-</a:t>
-            </a:r>
-            <a:pPr indent="0" marL="0">
-              <a:lnSpc>
-                <a:spcPct val="120000"/>
-              </a:lnSpc>
-              <a:buNone/>
-            </a:pPr>
-            <a:r>
-              <a:rPr lang="en-US" sz="1200" dirty="0">
-                <a:solidFill>
-                  <a:srgbClr val="334155"/>
-                </a:solidFill>
-                <a:latin typeface="Segoe UI" pitchFamily="34" charset="0"/>
-                <a:ea typeface="Segoe UI" pitchFamily="34" charset="-122"/>
-                <a:cs typeface="Segoe UI" pitchFamily="34" charset="-120"/>
-              </a:rPr>
-              <a:t>• V4 Signed URLs: Generates temporary 30-minute GCS links for secure media streaming.
+              <a:t>• Woodworth Head Model: Computes Interaural Time Differences (ITD) between ears.
 </a:t>
             </a:r>
             <a:endParaRPr lang="en-US" sz="1500" dirty="0"/>
@@ -5525,7 +5629,7 @@
                 <a:ea typeface="Courier New" pitchFamily="34" charset="-122"/>
                 <a:cs typeface="Courier New" pitchFamily="34" charset="-120"/>
               </a:rPr>
-              <a:t>13 / 23</a:t>
+              <a:t>13 / 24</a:t>
             </a:r>
             <a:endParaRPr lang="en-US" sz="1100" dirty="0"/>
           </a:p>
@@ -5589,7 +5693,7 @@
                 <a:ea typeface="Courier New" pitchFamily="34" charset="-122"/>
                 <a:cs typeface="Courier New" pitchFamily="34" charset="-120"/>
               </a:rPr>
-              <a:t>INFRASTRUCTURE SYNERGY</a:t>
+              <a:t>LAYER 5: STORAGE &amp; TRUST (ACTIVE CORE)</a:t>
             </a:r>
             <a:endParaRPr lang="en-US" sz="1100" dirty="0"/>
           </a:p>
@@ -5628,7 +5732,7 @@
                 <a:ea typeface="Segoe UI" pitchFamily="34" charset="-122"/>
                 <a:cs typeface="Segoe UI" pitchFamily="34" charset="-120"/>
               </a:rPr>
-              <a:t>Google Cloud Unified Service Synergy</a:t>
+              <a:t>Pluggable Persistence, SynthID &amp; C2PA Provenance</a:t>
             </a:r>
             <a:endParaRPr lang="en-US" sz="2600" dirty="0"/>
           </a:p>
@@ -5643,11 +5747,11 @@
         <p:spPr>
           <a:xfrm>
             <a:off x="731520" y="2148840"/>
-            <a:ext cx="3383280" cy="3200400"/>
+            <a:ext cx="5212080" cy="3566160"/>
           </a:xfrm>
           <a:prstGeom prst="roundRect">
             <a:avLst>
-              <a:gd name="adj" fmla="val 2857"/>
+              <a:gd name="adj" fmla="val 2564"/>
             </a:avLst>
           </a:prstGeom>
           <a:solidFill>
@@ -5669,8 +5773,8 @@
         </p:nvSpPr>
         <p:spPr>
           <a:xfrm>
-            <a:off x="960120" y="2286000"/>
-            <a:ext cx="2926080" cy="2926080"/>
+            <a:off x="1005840" y="2331720"/>
+            <a:ext cx="4663440" cy="3200400"/>
           </a:xfrm>
           <a:prstGeom prst="rect">
             <a:avLst/>
@@ -5686,7 +5790,7 @@
               <a:buNone/>
             </a:pPr>
             <a:r>
-              <a:rPr lang="en-US" sz="1450" b="1" dirty="0">
+              <a:rPr lang="en-US" sz="1500" b="1" dirty="0">
                 <a:solidFill>
                   <a:srgbClr val="0F172A"/>
                 </a:solidFill>
@@ -5694,7 +5798,7 @@
                 <a:ea typeface="Segoe UI" pitchFamily="34" charset="-122"/>
                 <a:cs typeface="Segoe UI" pitchFamily="34" charset="-120"/>
               </a:rPr>
-              <a:t>Compute &amp; Scaling
+              <a:t>Pluggable Database Architecture (IDatabaseProvider)
 </a:t>
             </a:r>
             <a:pPr indent="0" marL="0">
@@ -5704,33 +5808,72 @@
               <a:buNone/>
             </a:pPr>
             <a:r>
+              <a:rPr lang="en-US" sz="1250" dirty="0">
+                <a:solidFill>
+                  <a:srgbClr val="64748B"/>
+                </a:solidFill>
+                <a:latin typeface="Segoe UI" pitchFamily="34" charset="0"/>
+                <a:ea typeface="Segoe UI" pitchFamily="34" charset="-122"/>
+                <a:cs typeface="Segoe UI" pitchFamily="34" charset="-120"/>
+              </a:rPr>
+              <a:t>Enforces strict repository interfaces, enabling database switching via environment variables:
+</a:t>
+            </a:r>
+            <a:pPr indent="0" marL="0">
+              <a:lnSpc>
+                <a:spcPct val="120000"/>
+              </a:lnSpc>
+              <a:buNone/>
+            </a:pPr>
+            <a:r>
               <a:rPr lang="en-US" sz="1200" dirty="0">
                 <a:solidFill>
-                  <a:srgbClr val="64748B"/>
-                </a:solidFill>
-                <a:latin typeface="Segoe UI" pitchFamily="34" charset="0"/>
-                <a:ea typeface="Segoe UI" pitchFamily="34" charset="-122"/>
-                <a:cs typeface="Segoe UI" pitchFamily="34" charset="-120"/>
-              </a:rPr>
-              <a:t>Cloud Run: Serverless execution with --min-instances 0 scaling to 0 when idle.
-Cloud Scheduler: Periodic cron (*/5 * * * *) token sync heartbeat.
+                  <a:srgbClr val="334155"/>
+                </a:solidFill>
+                <a:latin typeface="Segoe UI" pitchFamily="34" charset="0"/>
+                <a:ea typeface="Segoe UI" pitchFamily="34" charset="-122"/>
+                <a:cs typeface="Segoe UI" pitchFamily="34" charset="-120"/>
+              </a:rPr>
+              <a:t>• Firestore Native (shine-db) — Primary Cloud NoSQL
 </a:t>
             </a:r>
             <a:pPr indent="0" marL="0">
-              <a:buNone/>
-            </a:pPr>
-            <a:r>
-              <a:rPr lang="en-US" sz="1100" b="1" dirty="0">
-                <a:solidFill>
-                  <a:srgbClr val="0F172A"/>
-                </a:solidFill>
-                <a:latin typeface="Courier New" pitchFamily="34" charset="0"/>
-                <a:ea typeface="Courier New" pitchFamily="34" charset="-122"/>
-                <a:cs typeface="Courier New" pitchFamily="34" charset="-120"/>
-              </a:rPr>
-              <a:t>[$0 Idle Compute Cost]</a:t>
-            </a:r>
-            <a:endParaRPr lang="en-US" sz="1450" dirty="0"/>
+              <a:lnSpc>
+                <a:spcPct val="120000"/>
+              </a:lnSpc>
+              <a:buNone/>
+            </a:pPr>
+            <a:r>
+              <a:rPr lang="en-US" sz="1200" dirty="0">
+                <a:solidFill>
+                  <a:srgbClr val="334155"/>
+                </a:solidFill>
+                <a:latin typeface="Segoe UI" pitchFamily="34" charset="0"/>
+                <a:ea typeface="Segoe UI" pitchFamily="34" charset="-122"/>
+                <a:cs typeface="Segoe UI" pitchFamily="34" charset="-120"/>
+              </a:rPr>
+              <a:t>• MongoDB Atlas — Document Database
+</a:t>
+            </a:r>
+            <a:pPr indent="0" marL="0">
+              <a:lnSpc>
+                <a:spcPct val="120000"/>
+              </a:lnSpc>
+              <a:buNone/>
+            </a:pPr>
+            <a:r>
+              <a:rPr lang="en-US" sz="1200" dirty="0">
+                <a:solidFill>
+                  <a:srgbClr val="334155"/>
+                </a:solidFill>
+                <a:latin typeface="Segoe UI" pitchFamily="34" charset="0"/>
+                <a:ea typeface="Segoe UI" pitchFamily="34" charset="-122"/>
+                <a:cs typeface="Segoe UI" pitchFamily="34" charset="-120"/>
+              </a:rPr>
+              <a:t>• SQLite (shine.db) — Local Development
+</a:t>
+            </a:r>
+            <a:endParaRPr lang="en-US" sz="1500" dirty="0"/>
           </a:p>
         </p:txBody>
       </p:sp>
@@ -5742,12 +5885,12 @@
         </p:nvSpPr>
         <p:spPr>
           <a:xfrm>
-            <a:off x="4389120" y="2148840"/>
-            <a:ext cx="3383280" cy="3200400"/>
+            <a:off x="6217920" y="2148840"/>
+            <a:ext cx="5212080" cy="3566160"/>
           </a:xfrm>
           <a:prstGeom prst="roundRect">
             <a:avLst>
-              <a:gd name="adj" fmla="val 2857"/>
+              <a:gd name="adj" fmla="val 2564"/>
             </a:avLst>
           </a:prstGeom>
           <a:solidFill>
@@ -5769,8 +5912,8 @@
         </p:nvSpPr>
         <p:spPr>
           <a:xfrm>
-            <a:off x="4617720" y="2286000"/>
-            <a:ext cx="2926080" cy="2926080"/>
+            <a:off x="6492240" y="2331720"/>
+            <a:ext cx="4663440" cy="3200400"/>
           </a:xfrm>
           <a:prstGeom prst="rect">
             <a:avLst/>
@@ -5786,7 +5929,7 @@
               <a:buNone/>
             </a:pPr>
             <a:r>
-              <a:rPr lang="en-US" sz="1450" b="1" dirty="0">
+              <a:rPr lang="en-US" sz="1500" b="1" dirty="0">
                 <a:solidFill>
                   <a:srgbClr val="0F172A"/>
                 </a:solidFill>
@@ -5794,7 +5937,7 @@
                 <a:ea typeface="Segoe UI" pitchFamily="34" charset="-122"/>
                 <a:cs typeface="Segoe UI" pitchFamily="34" charset="-120"/>
               </a:rPr>
-              <a:t>Data &amp; Messaging
+              <a:t>Digital Watermarking &amp; Provenance
 </a:t>
             </a:r>
             <a:pPr indent="0" marL="0">
@@ -5804,7 +5947,7 @@
               <a:buNone/>
             </a:pPr>
             <a:r>
-              <a:rPr lang="en-US" sz="1200" dirty="0">
+              <a:rPr lang="en-US" sz="1250" dirty="0">
                 <a:solidFill>
                   <a:srgbClr val="64748B"/>
                 </a:solidFill>
@@ -5812,89 +5955,7 @@
                 <a:ea typeface="Segoe UI" pitchFamily="34" charset="-122"/>
                 <a:cs typeface="Segoe UI" pitchFamily="34" charset="-120"/>
               </a:rPr>
-              <a:t>Firestore Native: Document persistence for scripts, timelines &amp; version snapshots.
-Cloud Storage (GCS): V4 signed URLs for high-throughput media streaming.
-</a:t>
-            </a:r>
-            <a:pPr indent="0" marL="0">
-              <a:buNone/>
-            </a:pPr>
-            <a:r>
-              <a:rPr lang="en-US" sz="1100" b="1" dirty="0">
-                <a:solidFill>
-                  <a:srgbClr val="0F172A"/>
-                </a:solidFill>
-                <a:latin typeface="Courier New" pitchFamily="34" charset="0"/>
-                <a:ea typeface="Courier New" pitchFamily="34" charset="-122"/>
-                <a:cs typeface="Courier New" pitchFamily="34" charset="-120"/>
-              </a:rPr>
-              <a:t>[gs://shine-studio-media]</a:t>
-            </a:r>
-            <a:endParaRPr lang="en-US" sz="1450" dirty="0"/>
-          </a:p>
-        </p:txBody>
-      </p:sp>
-      <p:sp>
-        <p:nvSpPr>
-          <p:cNvPr id="14" name="Shape 12"/>
-          <p:cNvSpPr/>
-          <p:nvPr/>
-        </p:nvSpPr>
-        <p:spPr>
-          <a:xfrm>
-            <a:off x="8046720" y="2148840"/>
-            <a:ext cx="3383280" cy="3200400"/>
-          </a:xfrm>
-          <a:prstGeom prst="roundRect">
-            <a:avLst>
-              <a:gd name="adj" fmla="val 2857"/>
-            </a:avLst>
-          </a:prstGeom>
-          <a:solidFill>
-            <a:srgbClr val="FFFFFF"/>
-          </a:solidFill>
-          <a:ln w="12700">
-            <a:solidFill>
-              <a:srgbClr val="E2E8F0"/>
-            </a:solidFill>
-            <a:prstDash val="solid"/>
-          </a:ln>
-        </p:spPr>
-      </p:sp>
-      <p:sp>
-        <p:nvSpPr>
-          <p:cNvPr id="15" name="Text 13"/>
-          <p:cNvSpPr/>
-          <p:nvPr/>
-        </p:nvSpPr>
-        <p:spPr>
-          <a:xfrm>
-            <a:off x="8275320" y="2286000"/>
-            <a:ext cx="2926080" cy="2926080"/>
-          </a:xfrm>
-          <a:prstGeom prst="rect">
-            <a:avLst/>
-          </a:prstGeom>
-          <a:noFill/>
-          <a:ln/>
-        </p:spPr>
-        <p:txBody>
-          <a:bodyPr wrap="square" rtlCol="0" anchor="t"/>
-          <a:lstStyle/>
-          <a:p>
-            <a:pPr indent="0" marL="0">
-              <a:buNone/>
-            </a:pPr>
-            <a:r>
-              <a:rPr lang="en-US" sz="1450" b="1" dirty="0">
-                <a:solidFill>
-                  <a:srgbClr val="0F172A"/>
-                </a:solidFill>
-                <a:latin typeface="Segoe UI" pitchFamily="34" charset="0"/>
-                <a:ea typeface="Segoe UI" pitchFamily="34" charset="-122"/>
-                <a:cs typeface="Segoe UI" pitchFamily="34" charset="-120"/>
-              </a:rPr>
-              <a:t>Security &amp; Observability
+              <a:t>Enterprise trust and media integrity suite:
 </a:t>
             </a:r>
             <a:pPr indent="0" marL="0">
@@ -5906,97 +5967,52 @@
             <a:r>
               <a:rPr lang="en-US" sz="1200" dirty="0">
                 <a:solidFill>
-                  <a:srgbClr val="64748B"/>
-                </a:solidFill>
-                <a:latin typeface="Segoe UI" pitchFamily="34" charset="0"/>
-                <a:ea typeface="Segoe UI" pitchFamily="34" charset="-122"/>
-                <a:cs typeface="Segoe UI" pitchFamily="34" charset="-120"/>
-              </a:rPr>
-              <a:t>Cloud IAM &amp; Secret Manager: Least-privilege roles (aiplatform.user, datastore.user).
-Cloud Logging: Real-time structured telemetry &amp; P99 latency tracking.
+                  <a:srgbClr val="334155"/>
+                </a:solidFill>
+                <a:latin typeface="Segoe UI" pitchFamily="34" charset="0"/>
+                <a:ea typeface="Segoe UI" pitchFamily="34" charset="-122"/>
+                <a:cs typeface="Segoe UI" pitchFamily="34" charset="-120"/>
+              </a:rPr>
+              <a:t>• Google SynthID: Embeds imperceptible digital watermarks into audio &amp; video.
 </a:t>
             </a:r>
             <a:pPr indent="0" marL="0">
-              <a:buNone/>
-            </a:pPr>
-            <a:r>
-              <a:rPr lang="en-US" sz="1100" b="1" dirty="0">
-                <a:solidFill>
-                  <a:srgbClr val="0F172A"/>
-                </a:solidFill>
-                <a:latin typeface="Courier New" pitchFamily="34" charset="0"/>
-                <a:ea typeface="Courier New" pitchFamily="34" charset="-122"/>
-                <a:cs typeface="Courier New" pitchFamily="34" charset="-120"/>
-              </a:rPr>
-              <a:t>[Enterprise IAM &amp; Audit Trails]</a:t>
-            </a:r>
-            <a:endParaRPr lang="en-US" sz="1450" dirty="0"/>
-          </a:p>
-        </p:txBody>
-      </p:sp>
-      <p:sp>
-        <p:nvSpPr>
-          <p:cNvPr id="16" name="Shape 14"/>
-          <p:cNvSpPr/>
-          <p:nvPr/>
-        </p:nvSpPr>
-        <p:spPr>
-          <a:xfrm>
-            <a:off x="731520" y="5486400"/>
-            <a:ext cx="10698480" cy="594360"/>
-          </a:xfrm>
-          <a:prstGeom prst="roundRect">
-            <a:avLst>
-              <a:gd name="adj" fmla="val 12308"/>
-            </a:avLst>
-          </a:prstGeom>
-          <a:solidFill>
-            <a:srgbClr val="F8FAFC"/>
-          </a:solidFill>
-          <a:ln w="12700">
-            <a:solidFill>
-              <a:srgbClr val="E2E8F0"/>
-            </a:solidFill>
-            <a:prstDash val="solid"/>
-          </a:ln>
-        </p:spPr>
-      </p:sp>
-      <p:sp>
-        <p:nvSpPr>
-          <p:cNvPr id="17" name="Text 15"/>
-          <p:cNvSpPr/>
-          <p:nvPr/>
-        </p:nvSpPr>
-        <p:spPr>
-          <a:xfrm>
-            <a:off x="914400" y="5486400"/>
-            <a:ext cx="10332720" cy="594360"/>
-          </a:xfrm>
-          <a:prstGeom prst="rect">
-            <a:avLst/>
-          </a:prstGeom>
-          <a:noFill/>
-          <a:ln/>
-        </p:spPr>
-        <p:txBody>
-          <a:bodyPr wrap="square" rtlCol="0" anchor="ctr"/>
-          <a:lstStyle/>
-          <a:p>
-            <a:pPr indent="0" marL="0">
-              <a:buNone/>
-            </a:pPr>
-            <a:r>
-              <a:rPr lang="en-US" sz="1150" b="1" dirty="0">
-                <a:solidFill>
-                  <a:srgbClr val="475569"/>
-                </a:solidFill>
-                <a:latin typeface="Segoe UI" pitchFamily="34" charset="0"/>
-                <a:ea typeface="Segoe UI" pitchFamily="34" charset="-122"/>
-                <a:cs typeface="Segoe UI" pitchFamily="34" charset="-120"/>
-              </a:rPr>
-              <a:t>🔗 Synergy Advantage: Native identity &amp; networking across all GCP services eliminates ingress/egress transit bottlenecks and simplifies DevOps automation.</a:t>
-            </a:r>
-            <a:endParaRPr lang="en-US" sz="1150" dirty="0"/>
+              <a:lnSpc>
+                <a:spcPct val="120000"/>
+              </a:lnSpc>
+              <a:buNone/>
+            </a:pPr>
+            <a:r>
+              <a:rPr lang="en-US" sz="1200" dirty="0">
+                <a:solidFill>
+                  <a:srgbClr val="334155"/>
+                </a:solidFill>
+                <a:latin typeface="Segoe UI" pitchFamily="34" charset="0"/>
+                <a:ea typeface="Segoe UI" pitchFamily="34" charset="-122"/>
+                <a:cs typeface="Segoe UI" pitchFamily="34" charset="-120"/>
+              </a:rPr>
+              <a:t>• C2PA Content Credentials: Cryptographically signs provenance manifests.
+</a:t>
+            </a:r>
+            <a:pPr indent="0" marL="0">
+              <a:lnSpc>
+                <a:spcPct val="120000"/>
+              </a:lnSpc>
+              <a:buNone/>
+            </a:pPr>
+            <a:r>
+              <a:rPr lang="en-US" sz="1200" dirty="0">
+                <a:solidFill>
+                  <a:srgbClr val="334155"/>
+                </a:solidFill>
+                <a:latin typeface="Segoe UI" pitchFamily="34" charset="0"/>
+                <a:ea typeface="Segoe UI" pitchFamily="34" charset="-122"/>
+                <a:cs typeface="Segoe UI" pitchFamily="34" charset="-120"/>
+              </a:rPr>
+              <a:t>• V4 Signed URLs: Generates temporary 30-minute GCS links for secure media streaming.
+</a:t>
+            </a:r>
+            <a:endParaRPr lang="en-US" sz="1500" dirty="0"/>
           </a:p>
         </p:txBody>
       </p:sp>
@@ -6211,7 +6227,7 @@
                 <a:ea typeface="Courier New" pitchFamily="34" charset="-122"/>
                 <a:cs typeface="Courier New" pitchFamily="34" charset="-120"/>
               </a:rPr>
-              <a:t>14 / 23</a:t>
+              <a:t>14 / 24</a:t>
             </a:r>
             <a:endParaRPr lang="en-US" sz="1100" dirty="0"/>
           </a:p>
@@ -6250,7 +6266,7 @@
         </p:nvSpPr>
         <p:spPr>
           <a:xfrm>
-            <a:off x="731520" y="1051560"/>
+            <a:off x="731520" y="1097280"/>
             <a:ext cx="9144000" cy="320040"/>
           </a:xfrm>
           <a:prstGeom prst="rect">
@@ -6275,6 +6291,692 @@
                 <a:ea typeface="Courier New" pitchFamily="34" charset="-122"/>
                 <a:cs typeface="Courier New" pitchFamily="34" charset="-120"/>
               </a:rPr>
+              <a:t>INFRASTRUCTURE SYNERGY</a:t>
+            </a:r>
+            <a:endParaRPr lang="en-US" sz="1100" dirty="0"/>
+          </a:p>
+        </p:txBody>
+      </p:sp>
+      <p:sp>
+        <p:nvSpPr>
+          <p:cNvPr id="9" name="Text 7"/>
+          <p:cNvSpPr/>
+          <p:nvPr/>
+        </p:nvSpPr>
+        <p:spPr>
+          <a:xfrm>
+            <a:off x="731520" y="1417320"/>
+            <a:ext cx="10698480" cy="548640"/>
+          </a:xfrm>
+          <a:prstGeom prst="rect">
+            <a:avLst/>
+          </a:prstGeom>
+          <a:noFill/>
+          <a:ln/>
+        </p:spPr>
+        <p:txBody>
+          <a:bodyPr wrap="square" rtlCol="0" anchor="ctr"/>
+          <a:lstStyle/>
+          <a:p>
+            <a:pPr indent="0" marL="0">
+              <a:buNone/>
+            </a:pPr>
+            <a:r>
+              <a:rPr lang="en-US" sz="2600" b="1" dirty="0">
+                <a:solidFill>
+                  <a:srgbClr val="0F172A"/>
+                </a:solidFill>
+                <a:latin typeface="Segoe UI" pitchFamily="34" charset="0"/>
+                <a:ea typeface="Segoe UI" pitchFamily="34" charset="-122"/>
+                <a:cs typeface="Segoe UI" pitchFamily="34" charset="-120"/>
+              </a:rPr>
+              <a:t>Google Cloud Unified Service Synergy</a:t>
+            </a:r>
+            <a:endParaRPr lang="en-US" sz="2600" dirty="0"/>
+          </a:p>
+        </p:txBody>
+      </p:sp>
+      <p:sp>
+        <p:nvSpPr>
+          <p:cNvPr id="10" name="Shape 8"/>
+          <p:cNvSpPr/>
+          <p:nvPr/>
+        </p:nvSpPr>
+        <p:spPr>
+          <a:xfrm>
+            <a:off x="731520" y="2148840"/>
+            <a:ext cx="3383280" cy="3200400"/>
+          </a:xfrm>
+          <a:prstGeom prst="roundRect">
+            <a:avLst>
+              <a:gd name="adj" fmla="val 2857"/>
+            </a:avLst>
+          </a:prstGeom>
+          <a:solidFill>
+            <a:srgbClr val="FFFFFF"/>
+          </a:solidFill>
+          <a:ln w="12700">
+            <a:solidFill>
+              <a:srgbClr val="E2E8F0"/>
+            </a:solidFill>
+            <a:prstDash val="solid"/>
+          </a:ln>
+        </p:spPr>
+      </p:sp>
+      <p:sp>
+        <p:nvSpPr>
+          <p:cNvPr id="11" name="Text 9"/>
+          <p:cNvSpPr/>
+          <p:nvPr/>
+        </p:nvSpPr>
+        <p:spPr>
+          <a:xfrm>
+            <a:off x="960120" y="2286000"/>
+            <a:ext cx="2926080" cy="2926080"/>
+          </a:xfrm>
+          <a:prstGeom prst="rect">
+            <a:avLst/>
+          </a:prstGeom>
+          <a:noFill/>
+          <a:ln/>
+        </p:spPr>
+        <p:txBody>
+          <a:bodyPr wrap="square" rtlCol="0" anchor="t"/>
+          <a:lstStyle/>
+          <a:p>
+            <a:pPr indent="0" marL="0">
+              <a:buNone/>
+            </a:pPr>
+            <a:r>
+              <a:rPr lang="en-US" sz="1450" b="1" dirty="0">
+                <a:solidFill>
+                  <a:srgbClr val="0F172A"/>
+                </a:solidFill>
+                <a:latin typeface="Segoe UI" pitchFamily="34" charset="0"/>
+                <a:ea typeface="Segoe UI" pitchFamily="34" charset="-122"/>
+                <a:cs typeface="Segoe UI" pitchFamily="34" charset="-120"/>
+              </a:rPr>
+              <a:t>Compute &amp; Scaling
+</a:t>
+            </a:r>
+            <a:pPr indent="0" marL="0">
+              <a:lnSpc>
+                <a:spcPct val="120000"/>
+              </a:lnSpc>
+              <a:buNone/>
+            </a:pPr>
+            <a:r>
+              <a:rPr lang="en-US" sz="1200" dirty="0">
+                <a:solidFill>
+                  <a:srgbClr val="64748B"/>
+                </a:solidFill>
+                <a:latin typeface="Segoe UI" pitchFamily="34" charset="0"/>
+                <a:ea typeface="Segoe UI" pitchFamily="34" charset="-122"/>
+                <a:cs typeface="Segoe UI" pitchFamily="34" charset="-120"/>
+              </a:rPr>
+              <a:t>Cloud Run: Serverless execution with --min-instances 0 scaling to 0 when idle.
+Cloud Scheduler: Periodic cron (*/5 * * * *) token sync heartbeat.
+</a:t>
+            </a:r>
+            <a:pPr indent="0" marL="0">
+              <a:buNone/>
+            </a:pPr>
+            <a:r>
+              <a:rPr lang="en-US" sz="1100" b="1" dirty="0">
+                <a:solidFill>
+                  <a:srgbClr val="0F172A"/>
+                </a:solidFill>
+                <a:latin typeface="Courier New" pitchFamily="34" charset="0"/>
+                <a:ea typeface="Courier New" pitchFamily="34" charset="-122"/>
+                <a:cs typeface="Courier New" pitchFamily="34" charset="-120"/>
+              </a:rPr>
+              <a:t>[$0 Idle Compute Cost]</a:t>
+            </a:r>
+            <a:endParaRPr lang="en-US" sz="1450" dirty="0"/>
+          </a:p>
+        </p:txBody>
+      </p:sp>
+      <p:sp>
+        <p:nvSpPr>
+          <p:cNvPr id="12" name="Shape 10"/>
+          <p:cNvSpPr/>
+          <p:nvPr/>
+        </p:nvSpPr>
+        <p:spPr>
+          <a:xfrm>
+            <a:off x="4389120" y="2148840"/>
+            <a:ext cx="3383280" cy="3200400"/>
+          </a:xfrm>
+          <a:prstGeom prst="roundRect">
+            <a:avLst>
+              <a:gd name="adj" fmla="val 2857"/>
+            </a:avLst>
+          </a:prstGeom>
+          <a:solidFill>
+            <a:srgbClr val="FFFFFF"/>
+          </a:solidFill>
+          <a:ln w="12700">
+            <a:solidFill>
+              <a:srgbClr val="E2E8F0"/>
+            </a:solidFill>
+            <a:prstDash val="solid"/>
+          </a:ln>
+        </p:spPr>
+      </p:sp>
+      <p:sp>
+        <p:nvSpPr>
+          <p:cNvPr id="13" name="Text 11"/>
+          <p:cNvSpPr/>
+          <p:nvPr/>
+        </p:nvSpPr>
+        <p:spPr>
+          <a:xfrm>
+            <a:off x="4617720" y="2286000"/>
+            <a:ext cx="2926080" cy="2926080"/>
+          </a:xfrm>
+          <a:prstGeom prst="rect">
+            <a:avLst/>
+          </a:prstGeom>
+          <a:noFill/>
+          <a:ln/>
+        </p:spPr>
+        <p:txBody>
+          <a:bodyPr wrap="square" rtlCol="0" anchor="t"/>
+          <a:lstStyle/>
+          <a:p>
+            <a:pPr indent="0" marL="0">
+              <a:buNone/>
+            </a:pPr>
+            <a:r>
+              <a:rPr lang="en-US" sz="1450" b="1" dirty="0">
+                <a:solidFill>
+                  <a:srgbClr val="0F172A"/>
+                </a:solidFill>
+                <a:latin typeface="Segoe UI" pitchFamily="34" charset="0"/>
+                <a:ea typeface="Segoe UI" pitchFamily="34" charset="-122"/>
+                <a:cs typeface="Segoe UI" pitchFamily="34" charset="-120"/>
+              </a:rPr>
+              <a:t>Data &amp; Messaging
+</a:t>
+            </a:r>
+            <a:pPr indent="0" marL="0">
+              <a:lnSpc>
+                <a:spcPct val="120000"/>
+              </a:lnSpc>
+              <a:buNone/>
+            </a:pPr>
+            <a:r>
+              <a:rPr lang="en-US" sz="1200" dirty="0">
+                <a:solidFill>
+                  <a:srgbClr val="64748B"/>
+                </a:solidFill>
+                <a:latin typeface="Segoe UI" pitchFamily="34" charset="0"/>
+                <a:ea typeface="Segoe UI" pitchFamily="34" charset="-122"/>
+                <a:cs typeface="Segoe UI" pitchFamily="34" charset="-120"/>
+              </a:rPr>
+              <a:t>Firestore Native: Document persistence for scripts, timelines &amp; version snapshots.
+Cloud Storage (GCS): V4 signed URLs for high-throughput media streaming.
+</a:t>
+            </a:r>
+            <a:pPr indent="0" marL="0">
+              <a:buNone/>
+            </a:pPr>
+            <a:r>
+              <a:rPr lang="en-US" sz="1100" b="1" dirty="0">
+                <a:solidFill>
+                  <a:srgbClr val="0F172A"/>
+                </a:solidFill>
+                <a:latin typeface="Courier New" pitchFamily="34" charset="0"/>
+                <a:ea typeface="Courier New" pitchFamily="34" charset="-122"/>
+                <a:cs typeface="Courier New" pitchFamily="34" charset="-120"/>
+              </a:rPr>
+              <a:t>[gs://shine-studio-media]</a:t>
+            </a:r>
+            <a:endParaRPr lang="en-US" sz="1450" dirty="0"/>
+          </a:p>
+        </p:txBody>
+      </p:sp>
+      <p:sp>
+        <p:nvSpPr>
+          <p:cNvPr id="14" name="Shape 12"/>
+          <p:cNvSpPr/>
+          <p:nvPr/>
+        </p:nvSpPr>
+        <p:spPr>
+          <a:xfrm>
+            <a:off x="8046720" y="2148840"/>
+            <a:ext cx="3383280" cy="3200400"/>
+          </a:xfrm>
+          <a:prstGeom prst="roundRect">
+            <a:avLst>
+              <a:gd name="adj" fmla="val 2857"/>
+            </a:avLst>
+          </a:prstGeom>
+          <a:solidFill>
+            <a:srgbClr val="FFFFFF"/>
+          </a:solidFill>
+          <a:ln w="12700">
+            <a:solidFill>
+              <a:srgbClr val="E2E8F0"/>
+            </a:solidFill>
+            <a:prstDash val="solid"/>
+          </a:ln>
+        </p:spPr>
+      </p:sp>
+      <p:sp>
+        <p:nvSpPr>
+          <p:cNvPr id="15" name="Text 13"/>
+          <p:cNvSpPr/>
+          <p:nvPr/>
+        </p:nvSpPr>
+        <p:spPr>
+          <a:xfrm>
+            <a:off x="8275320" y="2286000"/>
+            <a:ext cx="2926080" cy="2926080"/>
+          </a:xfrm>
+          <a:prstGeom prst="rect">
+            <a:avLst/>
+          </a:prstGeom>
+          <a:noFill/>
+          <a:ln/>
+        </p:spPr>
+        <p:txBody>
+          <a:bodyPr wrap="square" rtlCol="0" anchor="t"/>
+          <a:lstStyle/>
+          <a:p>
+            <a:pPr indent="0" marL="0">
+              <a:buNone/>
+            </a:pPr>
+            <a:r>
+              <a:rPr lang="en-US" sz="1450" b="1" dirty="0">
+                <a:solidFill>
+                  <a:srgbClr val="0F172A"/>
+                </a:solidFill>
+                <a:latin typeface="Segoe UI" pitchFamily="34" charset="0"/>
+                <a:ea typeface="Segoe UI" pitchFamily="34" charset="-122"/>
+                <a:cs typeface="Segoe UI" pitchFamily="34" charset="-120"/>
+              </a:rPr>
+              <a:t>Security &amp; Observability
+</a:t>
+            </a:r>
+            <a:pPr indent="0" marL="0">
+              <a:lnSpc>
+                <a:spcPct val="120000"/>
+              </a:lnSpc>
+              <a:buNone/>
+            </a:pPr>
+            <a:r>
+              <a:rPr lang="en-US" sz="1200" dirty="0">
+                <a:solidFill>
+                  <a:srgbClr val="64748B"/>
+                </a:solidFill>
+                <a:latin typeface="Segoe UI" pitchFamily="34" charset="0"/>
+                <a:ea typeface="Segoe UI" pitchFamily="34" charset="-122"/>
+                <a:cs typeface="Segoe UI" pitchFamily="34" charset="-120"/>
+              </a:rPr>
+              <a:t>Cloud IAM &amp; Secret Manager: Least-privilege roles (aiplatform.user, datastore.user).
+Cloud Logging: Real-time structured telemetry &amp; P99 latency tracking.
+</a:t>
+            </a:r>
+            <a:pPr indent="0" marL="0">
+              <a:buNone/>
+            </a:pPr>
+            <a:r>
+              <a:rPr lang="en-US" sz="1100" b="1" dirty="0">
+                <a:solidFill>
+                  <a:srgbClr val="0F172A"/>
+                </a:solidFill>
+                <a:latin typeface="Courier New" pitchFamily="34" charset="0"/>
+                <a:ea typeface="Courier New" pitchFamily="34" charset="-122"/>
+                <a:cs typeface="Courier New" pitchFamily="34" charset="-120"/>
+              </a:rPr>
+              <a:t>[Enterprise IAM &amp; Audit Trails]</a:t>
+            </a:r>
+            <a:endParaRPr lang="en-US" sz="1450" dirty="0"/>
+          </a:p>
+        </p:txBody>
+      </p:sp>
+      <p:sp>
+        <p:nvSpPr>
+          <p:cNvPr id="16" name="Shape 14"/>
+          <p:cNvSpPr/>
+          <p:nvPr/>
+        </p:nvSpPr>
+        <p:spPr>
+          <a:xfrm>
+            <a:off x="731520" y="5486400"/>
+            <a:ext cx="10698480" cy="594360"/>
+          </a:xfrm>
+          <a:prstGeom prst="roundRect">
+            <a:avLst>
+              <a:gd name="adj" fmla="val 12308"/>
+            </a:avLst>
+          </a:prstGeom>
+          <a:solidFill>
+            <a:srgbClr val="F8FAFC"/>
+          </a:solidFill>
+          <a:ln w="12700">
+            <a:solidFill>
+              <a:srgbClr val="E2E8F0"/>
+            </a:solidFill>
+            <a:prstDash val="solid"/>
+          </a:ln>
+        </p:spPr>
+      </p:sp>
+      <p:sp>
+        <p:nvSpPr>
+          <p:cNvPr id="17" name="Text 15"/>
+          <p:cNvSpPr/>
+          <p:nvPr/>
+        </p:nvSpPr>
+        <p:spPr>
+          <a:xfrm>
+            <a:off x="914400" y="5486400"/>
+            <a:ext cx="10332720" cy="594360"/>
+          </a:xfrm>
+          <a:prstGeom prst="rect">
+            <a:avLst/>
+          </a:prstGeom>
+          <a:noFill/>
+          <a:ln/>
+        </p:spPr>
+        <p:txBody>
+          <a:bodyPr wrap="square" rtlCol="0" anchor="ctr"/>
+          <a:lstStyle/>
+          <a:p>
+            <a:pPr indent="0" marL="0">
+              <a:buNone/>
+            </a:pPr>
+            <a:r>
+              <a:rPr lang="en-US" sz="1150" b="1" dirty="0">
+                <a:solidFill>
+                  <a:srgbClr val="475569"/>
+                </a:solidFill>
+                <a:latin typeface="Segoe UI" pitchFamily="34" charset="0"/>
+                <a:ea typeface="Segoe UI" pitchFamily="34" charset="-122"/>
+                <a:cs typeface="Segoe UI" pitchFamily="34" charset="-120"/>
+              </a:rPr>
+              <a:t>🔗 Synergy Advantage: Native identity &amp; networking across all GCP services eliminates ingress/egress transit bottlenecks and simplifies DevOps automation.</a:t>
+            </a:r>
+            <a:endParaRPr lang="en-US" sz="1150" dirty="0"/>
+          </a:p>
+        </p:txBody>
+      </p:sp>
+    </p:spTree>
+  </p:cSld>
+  <p:clrMapOvr>
+    <a:masterClrMapping/>
+  </p:clrMapOvr>
+</p:sld>
+</file>
+
+<file path=ppt/slides/slide15.xml><?xml version="1.0" encoding="utf-8"?>
+<p:sld xmlns:a="http://schemas.openxmlformats.org/drawingml/2006/main" xmlns:r="http://schemas.openxmlformats.org/officeDocument/2006/relationships" xmlns:p="http://schemas.openxmlformats.org/presentationml/2006/main">
+  <p:cSld name="Slide 15">
+    <p:bg>
+      <p:bgPr>
+        <a:solidFill>
+          <a:srgbClr val="FCFDFF"/>
+        </a:solidFill>
+      </p:bgPr>
+    </p:bg>
+    <p:spTree>
+      <p:nvGrpSpPr>
+        <p:cNvPr id="1" name=""/>
+        <p:cNvGrpSpPr/>
+        <p:nvPr/>
+      </p:nvGrpSpPr>
+      <p:grpSpPr>
+        <a:xfrm>
+          <a:off x="0" y="0"/>
+          <a:ext cx="0" cy="0"/>
+          <a:chOff x="0" y="0"/>
+          <a:chExt cx="0" cy="0"/>
+        </a:xfrm>
+      </p:grpSpPr>
+      <p:sp>
+        <p:nvSpPr>
+          <p:cNvPr id="2" name="Shape 0"/>
+          <p:cNvSpPr/>
+          <p:nvPr/>
+        </p:nvSpPr>
+        <p:spPr>
+          <a:xfrm>
+            <a:off x="731520" y="365760"/>
+            <a:ext cx="384048" cy="384048"/>
+          </a:xfrm>
+          <a:prstGeom prst="roundRect">
+            <a:avLst>
+              <a:gd name="adj" fmla="val 19048"/>
+            </a:avLst>
+          </a:prstGeom>
+          <a:solidFill>
+            <a:srgbClr val="0F172A"/>
+          </a:solidFill>
+          <a:ln w="12700">
+            <a:solidFill>
+              <a:srgbClr val="0F172A"/>
+            </a:solidFill>
+            <a:prstDash val="solid"/>
+          </a:ln>
+        </p:spPr>
+      </p:sp>
+      <p:sp>
+        <p:nvSpPr>
+          <p:cNvPr id="3" name="Text 1"/>
+          <p:cNvSpPr/>
+          <p:nvPr/>
+        </p:nvSpPr>
+        <p:spPr>
+          <a:xfrm>
+            <a:off x="731520" y="365760"/>
+            <a:ext cx="384048" cy="384048"/>
+          </a:xfrm>
+          <a:prstGeom prst="rect">
+            <a:avLst/>
+          </a:prstGeom>
+          <a:noFill/>
+          <a:ln/>
+        </p:spPr>
+        <p:txBody>
+          <a:bodyPr wrap="square" rtlCol="0" anchor="ctr"/>
+          <a:lstStyle/>
+          <a:p>
+            <a:pPr algn="ctr" indent="0" marL="0">
+              <a:buNone/>
+            </a:pPr>
+            <a:r>
+              <a:rPr lang="en-US" sz="1400" b="1" dirty="0">
+                <a:solidFill>
+                  <a:srgbClr val="FFFFFF"/>
+                </a:solidFill>
+                <a:latin typeface="Segoe UI" pitchFamily="34" charset="0"/>
+                <a:ea typeface="Segoe UI" pitchFamily="34" charset="-122"/>
+                <a:cs typeface="Segoe UI" pitchFamily="34" charset="-120"/>
+              </a:rPr>
+              <a:t>S</a:t>
+            </a:r>
+            <a:endParaRPr lang="en-US" sz="1400" dirty="0"/>
+          </a:p>
+        </p:txBody>
+      </p:sp>
+      <p:sp>
+        <p:nvSpPr>
+          <p:cNvPr id="4" name="Text 2"/>
+          <p:cNvSpPr/>
+          <p:nvPr/>
+        </p:nvSpPr>
+        <p:spPr>
+          <a:xfrm>
+            <a:off x="1234440" y="365760"/>
+            <a:ext cx="7772400" cy="384048"/>
+          </a:xfrm>
+          <a:prstGeom prst="rect">
+            <a:avLst/>
+          </a:prstGeom>
+          <a:noFill/>
+          <a:ln/>
+        </p:spPr>
+        <p:txBody>
+          <a:bodyPr wrap="square" rtlCol="0" anchor="ctr"/>
+          <a:lstStyle/>
+          <a:p>
+            <a:pPr indent="0" marL="0">
+              <a:buNone/>
+            </a:pPr>
+            <a:r>
+              <a:rPr lang="en-US" sz="1200" b="1" dirty="0">
+                <a:solidFill>
+                  <a:srgbClr val="0F172A"/>
+                </a:solidFill>
+                <a:latin typeface="Segoe UI" pitchFamily="34" charset="0"/>
+                <a:ea typeface="Segoe UI" pitchFamily="34" charset="-122"/>
+                <a:cs typeface="Segoe UI" pitchFamily="34" charset="-120"/>
+              </a:rPr>
+              <a:t>SHINE STUDIO  </a:t>
+            </a:r>
+            <a:pPr indent="0" marL="0">
+              <a:buNone/>
+            </a:pPr>
+            <a:r>
+              <a:rPr lang="en-US" sz="1200" dirty="0">
+                <a:solidFill>
+                  <a:srgbClr val="64748B"/>
+                </a:solidFill>
+                <a:latin typeface="Segoe UI" pitchFamily="34" charset="0"/>
+                <a:ea typeface="Segoe UI" pitchFamily="34" charset="-122"/>
+                <a:cs typeface="Segoe UI" pitchFamily="34" charset="-120"/>
+              </a:rPr>
+              <a:t>|  System Architecture &amp; Product Blueprint</a:t>
+            </a:r>
+            <a:endParaRPr lang="en-US" sz="1200" dirty="0"/>
+          </a:p>
+        </p:txBody>
+      </p:sp>
+      <p:sp>
+        <p:nvSpPr>
+          <p:cNvPr id="5" name="Shape 3"/>
+          <p:cNvSpPr/>
+          <p:nvPr/>
+        </p:nvSpPr>
+        <p:spPr>
+          <a:xfrm>
+            <a:off x="10332720" y="365760"/>
+            <a:ext cx="1097280" cy="384048"/>
+          </a:xfrm>
+          <a:prstGeom prst="roundRect">
+            <a:avLst>
+              <a:gd name="adj" fmla="val 35714"/>
+            </a:avLst>
+          </a:prstGeom>
+          <a:solidFill>
+            <a:srgbClr val="F1F5F9"/>
+          </a:solidFill>
+          <a:ln w="12700">
+            <a:solidFill>
+              <a:srgbClr val="E2E8F0"/>
+            </a:solidFill>
+            <a:prstDash val="solid"/>
+          </a:ln>
+        </p:spPr>
+      </p:sp>
+      <p:sp>
+        <p:nvSpPr>
+          <p:cNvPr id="6" name="Text 4"/>
+          <p:cNvSpPr/>
+          <p:nvPr/>
+        </p:nvSpPr>
+        <p:spPr>
+          <a:xfrm>
+            <a:off x="10332720" y="365760"/>
+            <a:ext cx="1097280" cy="384048"/>
+          </a:xfrm>
+          <a:prstGeom prst="rect">
+            <a:avLst/>
+          </a:prstGeom>
+          <a:noFill/>
+          <a:ln/>
+        </p:spPr>
+        <p:txBody>
+          <a:bodyPr wrap="square" rtlCol="0" anchor="ctr"/>
+          <a:lstStyle/>
+          <a:p>
+            <a:pPr algn="ctr" indent="0" marL="0">
+              <a:buNone/>
+            </a:pPr>
+            <a:r>
+              <a:rPr lang="en-US" sz="1100" b="1" dirty="0">
+                <a:solidFill>
+                  <a:srgbClr val="64748B"/>
+                </a:solidFill>
+                <a:latin typeface="Courier New" pitchFamily="34" charset="0"/>
+                <a:ea typeface="Courier New" pitchFamily="34" charset="-122"/>
+                <a:cs typeface="Courier New" pitchFamily="34" charset="-120"/>
+              </a:rPr>
+              <a:t>15 / 24</a:t>
+            </a:r>
+            <a:endParaRPr lang="en-US" sz="1100" dirty="0"/>
+          </a:p>
+        </p:txBody>
+      </p:sp>
+      <p:sp>
+        <p:nvSpPr>
+          <p:cNvPr id="7" name="Shape 5"/>
+          <p:cNvSpPr/>
+          <p:nvPr/>
+        </p:nvSpPr>
+        <p:spPr>
+          <a:xfrm>
+            <a:off x="731520" y="868680"/>
+            <a:ext cx="10698480" cy="13716"/>
+          </a:xfrm>
+          <a:prstGeom prst="rect">
+            <a:avLst/>
+          </a:prstGeom>
+          <a:solidFill>
+            <a:srgbClr val="E2E8F0"/>
+          </a:solidFill>
+          <a:ln w="12700">
+            <a:solidFill>
+              <a:srgbClr val="E2E8F0"/>
+            </a:solidFill>
+            <a:prstDash val="solid"/>
+          </a:ln>
+        </p:spPr>
+      </p:sp>
+      <p:sp>
+        <p:nvSpPr>
+          <p:cNvPr id="8" name="Text 6"/>
+          <p:cNvSpPr/>
+          <p:nvPr/>
+        </p:nvSpPr>
+        <p:spPr>
+          <a:xfrm>
+            <a:off x="731520" y="1051560"/>
+            <a:ext cx="9144000" cy="320040"/>
+          </a:xfrm>
+          <a:prstGeom prst="rect">
+            <a:avLst/>
+          </a:prstGeom>
+          <a:noFill/>
+          <a:ln/>
+        </p:spPr>
+        <p:txBody>
+          <a:bodyPr wrap="square" rtlCol="0" anchor="ctr"/>
+          <a:lstStyle/>
+          <a:p>
+            <a:pPr indent="0" marL="0">
+              <a:buNone/>
+            </a:pPr>
+            <a:r>
+              <a:rPr lang="en-US" sz="1100" b="1" dirty="0">
+                <a:solidFill>
+                  <a:srgbClr val="64748B"/>
+                </a:solidFill>
+                <a:latin typeface="Courier New" pitchFamily="34" charset="0"/>
+                <a:ea typeface="Courier New" pitchFamily="34" charset="-122"/>
+                <a:cs typeface="Courier New" pitchFamily="34" charset="-120"/>
+              </a:rPr>
               <a:t>GENERATIVE AI STACK</a:t>
             </a:r>
             <a:endParaRPr lang="en-US" sz="1100" dirty="0"/>
@@ -6322,7 +7024,7 @@
       </p:sp>
       <p:graphicFrame>
         <p:nvGraphicFramePr>
-          <p:cNvPr id="15" name="Table 0"/>
+          <p:cNvPr id="16" name="Table 0"/>
           <p:cNvGraphicFramePr>
             <a:graphicFrameLocks noGrp="1"/>
           </p:cNvGraphicFramePr>
@@ -9374,644 +10076,6 @@
 </p:sld>
 </file>
 
-<file path=ppt/slides/slide15.xml><?xml version="1.0" encoding="utf-8"?>
-<p:sld xmlns:a="http://schemas.openxmlformats.org/drawingml/2006/main" xmlns:r="http://schemas.openxmlformats.org/officeDocument/2006/relationships" xmlns:p="http://schemas.openxmlformats.org/presentationml/2006/main">
-  <p:cSld name="Slide 15">
-    <p:bg>
-      <p:bgPr>
-        <a:solidFill>
-          <a:srgbClr val="FCFDFF"/>
-        </a:solidFill>
-      </p:bgPr>
-    </p:bg>
-    <p:spTree>
-      <p:nvGrpSpPr>
-        <p:cNvPr id="1" name=""/>
-        <p:cNvGrpSpPr/>
-        <p:nvPr/>
-      </p:nvGrpSpPr>
-      <p:grpSpPr>
-        <a:xfrm>
-          <a:off x="0" y="0"/>
-          <a:ext cx="0" cy="0"/>
-          <a:chOff x="0" y="0"/>
-          <a:chExt cx="0" cy="0"/>
-        </a:xfrm>
-      </p:grpSpPr>
-      <p:sp>
-        <p:nvSpPr>
-          <p:cNvPr id="2" name="Shape 0"/>
-          <p:cNvSpPr/>
-          <p:nvPr/>
-        </p:nvSpPr>
-        <p:spPr>
-          <a:xfrm>
-            <a:off x="731520" y="365760"/>
-            <a:ext cx="384048" cy="384048"/>
-          </a:xfrm>
-          <a:prstGeom prst="roundRect">
-            <a:avLst>
-              <a:gd name="adj" fmla="val 19048"/>
-            </a:avLst>
-          </a:prstGeom>
-          <a:solidFill>
-            <a:srgbClr val="0F172A"/>
-          </a:solidFill>
-          <a:ln w="12700">
-            <a:solidFill>
-              <a:srgbClr val="0F172A"/>
-            </a:solidFill>
-            <a:prstDash val="solid"/>
-          </a:ln>
-        </p:spPr>
-      </p:sp>
-      <p:sp>
-        <p:nvSpPr>
-          <p:cNvPr id="3" name="Text 1"/>
-          <p:cNvSpPr/>
-          <p:nvPr/>
-        </p:nvSpPr>
-        <p:spPr>
-          <a:xfrm>
-            <a:off x="731520" y="365760"/>
-            <a:ext cx="384048" cy="384048"/>
-          </a:xfrm>
-          <a:prstGeom prst="rect">
-            <a:avLst/>
-          </a:prstGeom>
-          <a:noFill/>
-          <a:ln/>
-        </p:spPr>
-        <p:txBody>
-          <a:bodyPr wrap="square" rtlCol="0" anchor="ctr"/>
-          <a:lstStyle/>
-          <a:p>
-            <a:pPr algn="ctr" indent="0" marL="0">
-              <a:buNone/>
-            </a:pPr>
-            <a:r>
-              <a:rPr lang="en-US" sz="1400" b="1" dirty="0">
-                <a:solidFill>
-                  <a:srgbClr val="FFFFFF"/>
-                </a:solidFill>
-                <a:latin typeface="Segoe UI" pitchFamily="34" charset="0"/>
-                <a:ea typeface="Segoe UI" pitchFamily="34" charset="-122"/>
-                <a:cs typeface="Segoe UI" pitchFamily="34" charset="-120"/>
-              </a:rPr>
-              <a:t>S</a:t>
-            </a:r>
-            <a:endParaRPr lang="en-US" sz="1400" dirty="0"/>
-          </a:p>
-        </p:txBody>
-      </p:sp>
-      <p:sp>
-        <p:nvSpPr>
-          <p:cNvPr id="4" name="Text 2"/>
-          <p:cNvSpPr/>
-          <p:nvPr/>
-        </p:nvSpPr>
-        <p:spPr>
-          <a:xfrm>
-            <a:off x="1234440" y="365760"/>
-            <a:ext cx="7772400" cy="384048"/>
-          </a:xfrm>
-          <a:prstGeom prst="rect">
-            <a:avLst/>
-          </a:prstGeom>
-          <a:noFill/>
-          <a:ln/>
-        </p:spPr>
-        <p:txBody>
-          <a:bodyPr wrap="square" rtlCol="0" anchor="ctr"/>
-          <a:lstStyle/>
-          <a:p>
-            <a:pPr indent="0" marL="0">
-              <a:buNone/>
-            </a:pPr>
-            <a:r>
-              <a:rPr lang="en-US" sz="1200" b="1" dirty="0">
-                <a:solidFill>
-                  <a:srgbClr val="0F172A"/>
-                </a:solidFill>
-                <a:latin typeface="Segoe UI" pitchFamily="34" charset="0"/>
-                <a:ea typeface="Segoe UI" pitchFamily="34" charset="-122"/>
-                <a:cs typeface="Segoe UI" pitchFamily="34" charset="-120"/>
-              </a:rPr>
-              <a:t>SHINE STUDIO  </a:t>
-            </a:r>
-            <a:pPr indent="0" marL="0">
-              <a:buNone/>
-            </a:pPr>
-            <a:r>
-              <a:rPr lang="en-US" sz="1200" dirty="0">
-                <a:solidFill>
-                  <a:srgbClr val="64748B"/>
-                </a:solidFill>
-                <a:latin typeface="Segoe UI" pitchFamily="34" charset="0"/>
-                <a:ea typeface="Segoe UI" pitchFamily="34" charset="-122"/>
-                <a:cs typeface="Segoe UI" pitchFamily="34" charset="-120"/>
-              </a:rPr>
-              <a:t>|  System Architecture &amp; Product Blueprint</a:t>
-            </a:r>
-            <a:endParaRPr lang="en-US" sz="1200" dirty="0"/>
-          </a:p>
-        </p:txBody>
-      </p:sp>
-      <p:sp>
-        <p:nvSpPr>
-          <p:cNvPr id="5" name="Shape 3"/>
-          <p:cNvSpPr/>
-          <p:nvPr/>
-        </p:nvSpPr>
-        <p:spPr>
-          <a:xfrm>
-            <a:off x="10332720" y="365760"/>
-            <a:ext cx="1097280" cy="384048"/>
-          </a:xfrm>
-          <a:prstGeom prst="roundRect">
-            <a:avLst>
-              <a:gd name="adj" fmla="val 35714"/>
-            </a:avLst>
-          </a:prstGeom>
-          <a:solidFill>
-            <a:srgbClr val="F1F5F9"/>
-          </a:solidFill>
-          <a:ln w="12700">
-            <a:solidFill>
-              <a:srgbClr val="E2E8F0"/>
-            </a:solidFill>
-            <a:prstDash val="solid"/>
-          </a:ln>
-        </p:spPr>
-      </p:sp>
-      <p:sp>
-        <p:nvSpPr>
-          <p:cNvPr id="6" name="Text 4"/>
-          <p:cNvSpPr/>
-          <p:nvPr/>
-        </p:nvSpPr>
-        <p:spPr>
-          <a:xfrm>
-            <a:off x="10332720" y="365760"/>
-            <a:ext cx="1097280" cy="384048"/>
-          </a:xfrm>
-          <a:prstGeom prst="rect">
-            <a:avLst/>
-          </a:prstGeom>
-          <a:noFill/>
-          <a:ln/>
-        </p:spPr>
-        <p:txBody>
-          <a:bodyPr wrap="square" rtlCol="0" anchor="ctr"/>
-          <a:lstStyle/>
-          <a:p>
-            <a:pPr algn="ctr" indent="0" marL="0">
-              <a:buNone/>
-            </a:pPr>
-            <a:r>
-              <a:rPr lang="en-US" sz="1100" b="1" dirty="0">
-                <a:solidFill>
-                  <a:srgbClr val="64748B"/>
-                </a:solidFill>
-                <a:latin typeface="Courier New" pitchFamily="34" charset="0"/>
-                <a:ea typeface="Courier New" pitchFamily="34" charset="-122"/>
-                <a:cs typeface="Courier New" pitchFamily="34" charset="-120"/>
-              </a:rPr>
-              <a:t>15 / 23</a:t>
-            </a:r>
-            <a:endParaRPr lang="en-US" sz="1100" dirty="0"/>
-          </a:p>
-        </p:txBody>
-      </p:sp>
-      <p:sp>
-        <p:nvSpPr>
-          <p:cNvPr id="7" name="Shape 5"/>
-          <p:cNvSpPr/>
-          <p:nvPr/>
-        </p:nvSpPr>
-        <p:spPr>
-          <a:xfrm>
-            <a:off x="731520" y="868680"/>
-            <a:ext cx="10698480" cy="13716"/>
-          </a:xfrm>
-          <a:prstGeom prst="rect">
-            <a:avLst/>
-          </a:prstGeom>
-          <a:solidFill>
-            <a:srgbClr val="E2E8F0"/>
-          </a:solidFill>
-          <a:ln w="12700">
-            <a:solidFill>
-              <a:srgbClr val="E2E8F0"/>
-            </a:solidFill>
-            <a:prstDash val="solid"/>
-          </a:ln>
-        </p:spPr>
-      </p:sp>
-      <p:sp>
-        <p:nvSpPr>
-          <p:cNvPr id="8" name="Text 6"/>
-          <p:cNvSpPr/>
-          <p:nvPr/>
-        </p:nvSpPr>
-        <p:spPr>
-          <a:xfrm>
-            <a:off x="731520" y="1097280"/>
-            <a:ext cx="9144000" cy="320040"/>
-          </a:xfrm>
-          <a:prstGeom prst="rect">
-            <a:avLst/>
-          </a:prstGeom>
-          <a:noFill/>
-          <a:ln/>
-        </p:spPr>
-        <p:txBody>
-          <a:bodyPr wrap="square" rtlCol="0" anchor="ctr"/>
-          <a:lstStyle/>
-          <a:p>
-            <a:pPr indent="0" marL="0">
-              <a:buNone/>
-            </a:pPr>
-            <a:r>
-              <a:rPr lang="en-US" sz="1100" b="1" dirty="0">
-                <a:solidFill>
-                  <a:srgbClr val="64748B"/>
-                </a:solidFill>
-                <a:latin typeface="Courier New" pitchFamily="34" charset="0"/>
-                <a:ea typeface="Courier New" pitchFamily="34" charset="-122"/>
-                <a:cs typeface="Courier New" pitchFamily="34" charset="-120"/>
-              </a:rPr>
-              <a:t>PROTOCOL INTEGRATION</a:t>
-            </a:r>
-            <a:endParaRPr lang="en-US" sz="1100" dirty="0"/>
-          </a:p>
-        </p:txBody>
-      </p:sp>
-      <p:sp>
-        <p:nvSpPr>
-          <p:cNvPr id="9" name="Text 7"/>
-          <p:cNvSpPr/>
-          <p:nvPr/>
-        </p:nvSpPr>
-        <p:spPr>
-          <a:xfrm>
-            <a:off x="731520" y="1417320"/>
-            <a:ext cx="10698480" cy="548640"/>
-          </a:xfrm>
-          <a:prstGeom prst="rect">
-            <a:avLst/>
-          </a:prstGeom>
-          <a:noFill/>
-          <a:ln/>
-        </p:spPr>
-        <p:txBody>
-          <a:bodyPr wrap="square" rtlCol="0" anchor="ctr"/>
-          <a:lstStyle/>
-          <a:p>
-            <a:pPr indent="0" marL="0">
-              <a:buNone/>
-            </a:pPr>
-            <a:r>
-              <a:rPr lang="en-US" sz="2600" b="1" dirty="0">
-                <a:solidFill>
-                  <a:srgbClr val="0F172A"/>
-                </a:solidFill>
-                <a:latin typeface="Segoe UI" pitchFamily="34" charset="0"/>
-                <a:ea typeface="Segoe UI" pitchFamily="34" charset="-122"/>
-                <a:cs typeface="Segoe UI" pitchFamily="34" charset="-120"/>
-              </a:rPr>
-              <a:t>Model Context Protocol (MCP) Integration Fabric</a:t>
-            </a:r>
-            <a:endParaRPr lang="en-US" sz="2600" dirty="0"/>
-          </a:p>
-        </p:txBody>
-      </p:sp>
-      <p:sp>
-        <p:nvSpPr>
-          <p:cNvPr id="10" name="Shape 8"/>
-          <p:cNvSpPr/>
-          <p:nvPr/>
-        </p:nvSpPr>
-        <p:spPr>
-          <a:xfrm>
-            <a:off x="731520" y="2148840"/>
-            <a:ext cx="5212080" cy="3566160"/>
-          </a:xfrm>
-          <a:prstGeom prst="roundRect">
-            <a:avLst>
-              <a:gd name="adj" fmla="val 2564"/>
-            </a:avLst>
-          </a:prstGeom>
-          <a:solidFill>
-            <a:srgbClr val="FFFFFF"/>
-          </a:solidFill>
-          <a:ln w="12700">
-            <a:solidFill>
-              <a:srgbClr val="E2E8F0"/>
-            </a:solidFill>
-            <a:prstDash val="solid"/>
-          </a:ln>
-        </p:spPr>
-      </p:sp>
-      <p:sp>
-        <p:nvSpPr>
-          <p:cNvPr id="11" name="Text 9"/>
-          <p:cNvSpPr/>
-          <p:nvPr/>
-        </p:nvSpPr>
-        <p:spPr>
-          <a:xfrm>
-            <a:off x="1005840" y="2331720"/>
-            <a:ext cx="4663440" cy="3200400"/>
-          </a:xfrm>
-          <a:prstGeom prst="rect">
-            <a:avLst/>
-          </a:prstGeom>
-          <a:noFill/>
-          <a:ln/>
-        </p:spPr>
-        <p:txBody>
-          <a:bodyPr wrap="square" rtlCol="0" anchor="t"/>
-          <a:lstStyle/>
-          <a:p>
-            <a:pPr indent="0" marL="0">
-              <a:buNone/>
-            </a:pPr>
-            <a:r>
-              <a:rPr lang="en-US" sz="1500" b="1" dirty="0">
-                <a:solidFill>
-                  <a:srgbClr val="0F172A"/>
-                </a:solidFill>
-                <a:latin typeface="Segoe UI" pitchFamily="34" charset="0"/>
-                <a:ea typeface="Segoe UI" pitchFamily="34" charset="-122"/>
-                <a:cs typeface="Segoe UI" pitchFamily="34" charset="-120"/>
-              </a:rPr>
-              <a:t>1. Parallel AI Search MCP (search.parallel.ai/mcp)
-</a:t>
-            </a:r>
-            <a:pPr indent="0" marL="0">
-              <a:lnSpc>
-                <a:spcPct val="120000"/>
-              </a:lnSpc>
-              <a:buNone/>
-            </a:pPr>
-            <a:r>
-              <a:rPr lang="en-US" sz="1250" dirty="0">
-                <a:solidFill>
-                  <a:srgbClr val="64748B"/>
-                </a:solidFill>
-                <a:latin typeface="Segoe UI" pitchFamily="34" charset="0"/>
-                <a:ea typeface="Segoe UI" pitchFamily="34" charset="-122"/>
-                <a:cs typeface="Segoe UI" pitchFamily="34" charset="-120"/>
-              </a:rPr>
-              <a:t>Connects Shine multi-agent director to real-time web search for discovering viral drama tropes and performing safety audits:
-</a:t>
-            </a:r>
-            <a:pPr indent="0" marL="0">
-              <a:lnSpc>
-                <a:spcPct val="120000"/>
-              </a:lnSpc>
-              <a:buNone/>
-            </a:pPr>
-            <a:r>
-              <a:rPr lang="en-US" sz="1200" dirty="0">
-                <a:solidFill>
-                  <a:srgbClr val="334155"/>
-                </a:solidFill>
-                <a:latin typeface="Segoe UI" pitchFamily="34" charset="0"/>
-                <a:ea typeface="Segoe UI" pitchFamily="34" charset="-122"/>
-                <a:cs typeface="Segoe UI" pitchFamily="34" charset="-120"/>
-              </a:rPr>
-              <a:t>• Trend Radar Agent: Scans real-time trending tropes across 6 regions.
-</a:t>
-            </a:r>
-            <a:pPr indent="0" marL="0">
-              <a:lnSpc>
-                <a:spcPct val="120000"/>
-              </a:lnSpc>
-              <a:buNone/>
-            </a:pPr>
-            <a:r>
-              <a:rPr lang="en-US" sz="1200" dirty="0">
-                <a:solidFill>
-                  <a:srgbClr val="334155"/>
-                </a:solidFill>
-                <a:latin typeface="Segoe UI" pitchFamily="34" charset="0"/>
-                <a:ea typeface="Segoe UI" pitchFamily="34" charset="-122"/>
-                <a:cs typeface="Segoe UI" pitchFamily="34" charset="-120"/>
-              </a:rPr>
-              <a:t>• Supervision Agent: Automated pre-flight copyright check on titles &amp; novel synopses.
-</a:t>
-            </a:r>
-            <a:pPr indent="0" marL="0">
-              <a:lnSpc>
-                <a:spcPct val="120000"/>
-              </a:lnSpc>
-              <a:buNone/>
-            </a:pPr>
-            <a:r>
-              <a:rPr lang="en-US" sz="1200" dirty="0">
-                <a:solidFill>
-                  <a:srgbClr val="334155"/>
-                </a:solidFill>
-                <a:latin typeface="Segoe UI" pitchFamily="34" charset="0"/>
-                <a:ea typeface="Segoe UI" pitchFamily="34" charset="-122"/>
-                <a:cs typeface="Segoe UI" pitchFamily="34" charset="-120"/>
-              </a:rPr>
-              <a:t>• SfxService: Discovers open sound effects across Freesound &amp; web sources.
-</a:t>
-            </a:r>
-            <a:pPr indent="0" marL="0">
-              <a:buNone/>
-            </a:pPr>
-            <a:endParaRPr lang="en-US" sz="1500" dirty="0"/>
-          </a:p>
-          <a:p>
-            <a:pPr indent="0" marL="0">
-              <a:buNone/>
-            </a:pPr>
-            <a:r>
-              <a:rPr lang="en-US" sz="1100" dirty="0">
-                <a:solidFill>
-                  <a:srgbClr val="0F172A"/>
-                </a:solidFill>
-                <a:latin typeface="Courier New" pitchFamily="34" charset="0"/>
-                <a:ea typeface="Courier New" pitchFamily="34" charset="-122"/>
-                <a:cs typeface="Courier New" pitchFamily="34" charset="-120"/>
-              </a:rPr>
-              <a:t>Client: server/src/integrations/mcp/ParallelMCPClient.ts</a:t>
-            </a:r>
-            <a:endParaRPr lang="en-US" sz="1500" dirty="0"/>
-          </a:p>
-        </p:txBody>
-      </p:sp>
-      <p:sp>
-        <p:nvSpPr>
-          <p:cNvPr id="12" name="Shape 10"/>
-          <p:cNvSpPr/>
-          <p:nvPr/>
-        </p:nvSpPr>
-        <p:spPr>
-          <a:xfrm>
-            <a:off x="6217920" y="2148840"/>
-            <a:ext cx="5212080" cy="3566160"/>
-          </a:xfrm>
-          <a:prstGeom prst="roundRect">
-            <a:avLst>
-              <a:gd name="adj" fmla="val 2564"/>
-            </a:avLst>
-          </a:prstGeom>
-          <a:solidFill>
-            <a:srgbClr val="FFFFFF"/>
-          </a:solidFill>
-          <a:ln w="12700">
-            <a:solidFill>
-              <a:srgbClr val="E2E8F0"/>
-            </a:solidFill>
-            <a:prstDash val="solid"/>
-          </a:ln>
-        </p:spPr>
-      </p:sp>
-      <p:sp>
-        <p:nvSpPr>
-          <p:cNvPr id="13" name="Text 11"/>
-          <p:cNvSpPr/>
-          <p:nvPr/>
-        </p:nvSpPr>
-        <p:spPr>
-          <a:xfrm>
-            <a:off x="6492240" y="2331720"/>
-            <a:ext cx="4663440" cy="3200400"/>
-          </a:xfrm>
-          <a:prstGeom prst="rect">
-            <a:avLst/>
-          </a:prstGeom>
-          <a:noFill/>
-          <a:ln/>
-        </p:spPr>
-        <p:txBody>
-          <a:bodyPr wrap="square" rtlCol="0" anchor="t"/>
-          <a:lstStyle/>
-          <a:p>
-            <a:pPr indent="0" marL="0">
-              <a:buNone/>
-            </a:pPr>
-            <a:r>
-              <a:rPr lang="en-US" sz="1500" b="1" dirty="0">
-                <a:solidFill>
-                  <a:srgbClr val="0F172A"/>
-                </a:solidFill>
-                <a:latin typeface="Segoe UI" pitchFamily="34" charset="0"/>
-                <a:ea typeface="Segoe UI" pitchFamily="34" charset="-122"/>
-                <a:cs typeface="Segoe UI" pitchFamily="34" charset="-120"/>
-              </a:rPr>
-              <a:t>2. Grafana MCP &amp; Loki Observability
-</a:t>
-            </a:r>
-            <a:pPr indent="0" marL="0">
-              <a:lnSpc>
-                <a:spcPct val="120000"/>
-              </a:lnSpc>
-              <a:buNone/>
-            </a:pPr>
-            <a:r>
-              <a:rPr lang="en-US" sz="1250" dirty="0">
-                <a:solidFill>
-                  <a:srgbClr val="64748B"/>
-                </a:solidFill>
-                <a:latin typeface="Segoe UI" pitchFamily="34" charset="0"/>
-                <a:ea typeface="Segoe UI" pitchFamily="34" charset="-122"/>
-                <a:cs typeface="Segoe UI" pitchFamily="34" charset="-120"/>
-              </a:rPr>
-              <a:t>Unifies live system monitoring, container health, and error tracing through the official Grafana MCP endpoint:
-</a:t>
-            </a:r>
-            <a:pPr indent="0" marL="0">
-              <a:lnSpc>
-                <a:spcPct val="120000"/>
-              </a:lnSpc>
-              <a:buNone/>
-            </a:pPr>
-            <a:r>
-              <a:rPr lang="en-US" sz="1200" dirty="0">
-                <a:solidFill>
-                  <a:srgbClr val="334155"/>
-                </a:solidFill>
-                <a:latin typeface="Segoe UI" pitchFamily="34" charset="0"/>
-                <a:ea typeface="Segoe UI" pitchFamily="34" charset="-122"/>
-                <a:cs typeface="Segoe UI" pitchFamily="34" charset="-120"/>
-              </a:rPr>
-              <a:t>• Telemetry Streaming: Auto-flushes structured logs &amp; RSS to Grafana Loki every 15s.
-</a:t>
-            </a:r>
-            <a:pPr indent="0" marL="0">
-              <a:lnSpc>
-                <a:spcPct val="120000"/>
-              </a:lnSpc>
-              <a:buNone/>
-            </a:pPr>
-            <a:r>
-              <a:rPr lang="en-US" sz="1200" dirty="0">
-                <a:solidFill>
-                  <a:srgbClr val="334155"/>
-                </a:solidFill>
-                <a:latin typeface="Segoe UI" pitchFamily="34" charset="0"/>
-                <a:ea typeface="Segoe UI" pitchFamily="34" charset="-122"/>
-                <a:cs typeface="Segoe UI" pitchFamily="34" charset="-120"/>
-              </a:rPr>
-              <a:t>• P99 Latency &amp; Probes: Exposes GET /api/admin/observability tracking WebSockets.
-</a:t>
-            </a:r>
-            <a:pPr indent="0" marL="0">
-              <a:lnSpc>
-                <a:spcPct val="120000"/>
-              </a:lnSpc>
-              <a:buNone/>
-            </a:pPr>
-            <a:r>
-              <a:rPr lang="en-US" sz="1200" dirty="0">
-                <a:solidFill>
-                  <a:srgbClr val="334155"/>
-                </a:solidFill>
-                <a:latin typeface="Segoe UI" pitchFamily="34" charset="0"/>
-                <a:ea typeface="Segoe UI" pitchFamily="34" charset="-122"/>
-                <a:cs typeface="Segoe UI" pitchFamily="34" charset="-120"/>
-              </a:rPr>
-              <a:t>• Automated Alerts: Triggers instant email alerts upon critical AI pipeline failures.
-</a:t>
-            </a:r>
-            <a:pPr indent="0" marL="0">
-              <a:buNone/>
-            </a:pPr>
-            <a:endParaRPr lang="en-US" sz="1500" dirty="0"/>
-          </a:p>
-          <a:p>
-            <a:pPr indent="0" marL="0">
-              <a:buNone/>
-            </a:pPr>
-            <a:r>
-              <a:rPr lang="en-US" sz="1100" dirty="0">
-                <a:solidFill>
-                  <a:srgbClr val="0F172A"/>
-                </a:solidFill>
-                <a:latin typeface="Courier New" pitchFamily="34" charset="0"/>
-                <a:ea typeface="Courier New" pitchFamily="34" charset="-122"/>
-                <a:cs typeface="Courier New" pitchFamily="34" charset="-120"/>
-              </a:rPr>
-              <a:t>Service: server/src/services/observability/GrafanaObservabilityService.ts</a:t>
-            </a:r>
-            <a:endParaRPr lang="en-US" sz="1500" dirty="0"/>
-          </a:p>
-        </p:txBody>
-      </p:sp>
-    </p:spTree>
-  </p:cSld>
-  <p:clrMapOvr>
-    <a:masterClrMapping/>
-  </p:clrMapOvr>
-</p:sld>
-</file>
-
 <file path=ppt/slides/slide16.xml><?xml version="1.0" encoding="utf-8"?>
 <p:sld xmlns:a="http://schemas.openxmlformats.org/drawingml/2006/main" xmlns:r="http://schemas.openxmlformats.org/officeDocument/2006/relationships" xmlns:p="http://schemas.openxmlformats.org/presentationml/2006/main">
   <p:cSld name="Slide 16">
@@ -10215,7 +10279,7 @@
                 <a:ea typeface="Courier New" pitchFamily="34" charset="-122"/>
                 <a:cs typeface="Courier New" pitchFamily="34" charset="-120"/>
               </a:rPr>
-              <a:t>16 / 23</a:t>
+              <a:t>16 / 24</a:t>
             </a:r>
             <a:endParaRPr lang="en-US" sz="1100" dirty="0"/>
           </a:p>
@@ -10279,7 +10343,7 @@
                 <a:ea typeface="Courier New" pitchFamily="34" charset="-122"/>
                 <a:cs typeface="Courier New" pitchFamily="34" charset="-120"/>
               </a:rPr>
-              <a:t>COMPETITIVE EDGE</a:t>
+              <a:t>PROTOCOL INTEGRATION</a:t>
             </a:r>
             <a:endParaRPr lang="en-US" sz="1100" dirty="0"/>
           </a:p>
@@ -10318,7 +10382,7 @@
                 <a:ea typeface="Segoe UI" pitchFamily="34" charset="-122"/>
                 <a:cs typeface="Segoe UI" pitchFamily="34" charset="-120"/>
               </a:rPr>
-              <a:t>Shine's 4 Unique Selling Points (USPs)</a:t>
+              <a:t>Model Context Protocol (MCP) Integration Fabric</a:t>
             </a:r>
             <a:endParaRPr lang="en-US" sz="2600" dirty="0"/>
           </a:p>
@@ -10333,11 +10397,11 @@
         <p:spPr>
           <a:xfrm>
             <a:off x="731520" y="2148840"/>
-            <a:ext cx="5212080" cy="1783080"/>
+            <a:ext cx="5212080" cy="3566160"/>
           </a:xfrm>
           <a:prstGeom prst="roundRect">
             <a:avLst>
-              <a:gd name="adj" fmla="val 5128"/>
+              <a:gd name="adj" fmla="val 2564"/>
             </a:avLst>
           </a:prstGeom>
           <a:solidFill>
@@ -10359,8 +10423,8 @@
         </p:nvSpPr>
         <p:spPr>
           <a:xfrm>
-            <a:off x="960120" y="2331720"/>
-            <a:ext cx="4754880" cy="1463040"/>
+            <a:off x="1005840" y="2331720"/>
+            <a:ext cx="4663440" cy="3200400"/>
           </a:xfrm>
           <a:prstGeom prst="rect">
             <a:avLst/>
@@ -10376,7 +10440,7 @@
               <a:buNone/>
             </a:pPr>
             <a:r>
-              <a:rPr lang="en-US" sz="1450" b="1" dirty="0">
+              <a:rPr lang="en-US" sz="1500" b="1" dirty="0">
                 <a:solidFill>
                   <a:srgbClr val="0F172A"/>
                 </a:solidFill>
@@ -10384,7 +10448,7 @@
                 <a:ea typeface="Segoe UI" pitchFamily="34" charset="-122"/>
                 <a:cs typeface="Segoe UI" pitchFamily="34" charset="-120"/>
               </a:rPr>
-              <a:t>1. Decoupled Multi-Language Dubbing
+              <a:t>1. Parallel AI Search MCP (search.parallel.ai/mcp)
 </a:t>
             </a:r>
             <a:pPr indent="0" marL="0">
@@ -10394,17 +10458,92 @@
               <a:buNone/>
             </a:pPr>
             <a:r>
+              <a:rPr lang="en-US" sz="1250" dirty="0">
+                <a:solidFill>
+                  <a:srgbClr val="64748B"/>
+                </a:solidFill>
+                <a:latin typeface="Segoe UI" pitchFamily="34" charset="0"/>
+                <a:ea typeface="Segoe UI" pitchFamily="34" charset="-122"/>
+                <a:cs typeface="Segoe UI" pitchFamily="34" charset="-120"/>
+              </a:rPr>
+              <a:t>Connects Shine multi-agent director to real-time web search for discovering viral drama tropes and performing safety audits:
+</a:t>
+            </a:r>
+            <a:pPr indent="0" marL="0">
+              <a:lnSpc>
+                <a:spcPct val="120000"/>
+              </a:lnSpc>
+              <a:buNone/>
+            </a:pPr>
+            <a:r>
               <a:rPr lang="en-US" sz="1200" dirty="0">
                 <a:solidFill>
-                  <a:srgbClr val="64748B"/>
-                </a:solidFill>
-                <a:latin typeface="Segoe UI" pitchFamily="34" charset="0"/>
-                <a:ea typeface="Segoe UI" pitchFamily="34" charset="-122"/>
-                <a:cs typeface="Segoe UI" pitchFamily="34" charset="-120"/>
-              </a:rPr>
-              <a:t>Silent visual clips + neural speech allow swapping dialogue into 6+ languages and auto-aligning timeline bounds (Δt) without re-rendering expensive video AI clips.</a:t>
-            </a:r>
-            <a:endParaRPr lang="en-US" sz="1450" dirty="0"/>
+                  <a:srgbClr val="334155"/>
+                </a:solidFill>
+                <a:latin typeface="Segoe UI" pitchFamily="34" charset="0"/>
+                <a:ea typeface="Segoe UI" pitchFamily="34" charset="-122"/>
+                <a:cs typeface="Segoe UI" pitchFamily="34" charset="-120"/>
+              </a:rPr>
+              <a:t>• Trend Radar Agent: Scans real-time trending tropes across 6 regions.
+</a:t>
+            </a:r>
+            <a:pPr indent="0" marL="0">
+              <a:lnSpc>
+                <a:spcPct val="120000"/>
+              </a:lnSpc>
+              <a:buNone/>
+            </a:pPr>
+            <a:r>
+              <a:rPr lang="en-US" sz="1200" dirty="0">
+                <a:solidFill>
+                  <a:srgbClr val="334155"/>
+                </a:solidFill>
+                <a:latin typeface="Segoe UI" pitchFamily="34" charset="0"/>
+                <a:ea typeface="Segoe UI" pitchFamily="34" charset="-122"/>
+                <a:cs typeface="Segoe UI" pitchFamily="34" charset="-120"/>
+              </a:rPr>
+              <a:t>• Supervision Agent: Automated pre-flight copyright check on titles &amp; novel synopses.
+</a:t>
+            </a:r>
+            <a:pPr indent="0" marL="0">
+              <a:lnSpc>
+                <a:spcPct val="120000"/>
+              </a:lnSpc>
+              <a:buNone/>
+            </a:pPr>
+            <a:r>
+              <a:rPr lang="en-US" sz="1200" dirty="0">
+                <a:solidFill>
+                  <a:srgbClr val="334155"/>
+                </a:solidFill>
+                <a:latin typeface="Segoe UI" pitchFamily="34" charset="0"/>
+                <a:ea typeface="Segoe UI" pitchFamily="34" charset="-122"/>
+                <a:cs typeface="Segoe UI" pitchFamily="34" charset="-120"/>
+              </a:rPr>
+              <a:t>• SfxService: Discovers open sound effects across Freesound &amp; web sources.
+</a:t>
+            </a:r>
+            <a:pPr indent="0" marL="0">
+              <a:buNone/>
+            </a:pPr>
+            <a:endParaRPr lang="en-US" sz="1500" dirty="0"/>
+          </a:p>
+          <a:p>
+            <a:pPr indent="0" marL="0">
+              <a:buNone/>
+            </a:pPr>
+            <a:r>
+              <a:rPr lang="en-US" sz="1100" dirty="0">
+                <a:solidFill>
+                  <a:srgbClr val="0F172A"/>
+                </a:solidFill>
+                <a:latin typeface="Courier New" pitchFamily="34" charset="0"/>
+                <a:ea typeface="Courier New" pitchFamily="34" charset="-122"/>
+                <a:cs typeface="Courier New" pitchFamily="34" charset="-120"/>
+              </a:rPr>
+              <a:t>Client: server/src/integrations/mcp/ParallelMCPClient.ts</a:t>
+            </a:r>
+            <a:endParaRPr lang="en-US" sz="1500" dirty="0"/>
           </a:p>
         </p:txBody>
       </p:sp>
@@ -10417,11 +10556,11 @@
         <p:spPr>
           <a:xfrm>
             <a:off x="6217920" y="2148840"/>
-            <a:ext cx="5212080" cy="1783080"/>
+            <a:ext cx="5212080" cy="3566160"/>
           </a:xfrm>
           <a:prstGeom prst="roundRect">
             <a:avLst>
-              <a:gd name="adj" fmla="val 5128"/>
+              <a:gd name="adj" fmla="val 2564"/>
             </a:avLst>
           </a:prstGeom>
           <a:solidFill>
@@ -10443,8 +10582,8 @@
         </p:nvSpPr>
         <p:spPr>
           <a:xfrm>
-            <a:off x="6446520" y="2331720"/>
-            <a:ext cx="4754880" cy="1463040"/>
+            <a:off x="6492240" y="2331720"/>
+            <a:ext cx="4663440" cy="3200400"/>
           </a:xfrm>
           <a:prstGeom prst="rect">
             <a:avLst/>
@@ -10460,7 +10599,7 @@
               <a:buNone/>
             </a:pPr>
             <a:r>
-              <a:rPr lang="en-US" sz="1450" b="1" dirty="0">
+              <a:rPr lang="en-US" sz="1500" b="1" dirty="0">
                 <a:solidFill>
                   <a:srgbClr val="0F172A"/>
                 </a:solidFill>
@@ -10468,7 +10607,7 @@
                 <a:ea typeface="Segoe UI" pitchFamily="34" charset="-122"/>
                 <a:cs typeface="Segoe UI" pitchFamily="34" charset="-120"/>
               </a:rPr>
-              <a:t>2. In-Browser $0 GPU WebCodecs Render
+              <a:t>2. Grafana MCP &amp; Loki Observability
 </a:t>
             </a:r>
             <a:pPr indent="0" marL="0">
@@ -10478,7 +10617,7 @@
               <a:buNone/>
             </a:pPr>
             <a:r>
-              <a:rPr lang="en-US" sz="1200" dirty="0">
+              <a:rPr lang="en-US" sz="1250" dirty="0">
                 <a:solidFill>
                   <a:srgbClr val="64748B"/>
                 </a:solidFill>
@@ -10486,73 +10625,7 @@
                 <a:ea typeface="Segoe UI" pitchFamily="34" charset="-122"/>
                 <a:cs typeface="Segoe UI" pitchFamily="34" charset="-120"/>
               </a:rPr>
-              <a:t>Creators export 1080p MP4 episodes directly in browser memory in ~12 seconds, delivering fast turnarounds with zero server GPU overhead.</a:t>
-            </a:r>
-            <a:endParaRPr lang="en-US" sz="1450" dirty="0"/>
-          </a:p>
-        </p:txBody>
-      </p:sp>
-      <p:sp>
-        <p:nvSpPr>
-          <p:cNvPr id="14" name="Shape 12"/>
-          <p:cNvSpPr/>
-          <p:nvPr/>
-        </p:nvSpPr>
-        <p:spPr>
-          <a:xfrm>
-            <a:off x="731520" y="4114800"/>
-            <a:ext cx="5212080" cy="1783080"/>
-          </a:xfrm>
-          <a:prstGeom prst="roundRect">
-            <a:avLst>
-              <a:gd name="adj" fmla="val 5128"/>
-            </a:avLst>
-          </a:prstGeom>
-          <a:solidFill>
-            <a:srgbClr val="FFFFFF"/>
-          </a:solidFill>
-          <a:ln w="12700">
-            <a:solidFill>
-              <a:srgbClr val="E2E8F0"/>
-            </a:solidFill>
-            <a:prstDash val="solid"/>
-          </a:ln>
-        </p:spPr>
-      </p:sp>
-      <p:sp>
-        <p:nvSpPr>
-          <p:cNvPr id="15" name="Text 13"/>
-          <p:cNvSpPr/>
-          <p:nvPr/>
-        </p:nvSpPr>
-        <p:spPr>
-          <a:xfrm>
-            <a:off x="960120" y="4297680"/>
-            <a:ext cx="4754880" cy="1463040"/>
-          </a:xfrm>
-          <a:prstGeom prst="rect">
-            <a:avLst/>
-          </a:prstGeom>
-          <a:noFill/>
-          <a:ln/>
-        </p:spPr>
-        <p:txBody>
-          <a:bodyPr wrap="square" rtlCol="0" anchor="t"/>
-          <a:lstStyle/>
-          <a:p>
-            <a:pPr indent="0" marL="0">
-              <a:buNone/>
-            </a:pPr>
-            <a:r>
-              <a:rPr lang="en-US" sz="1450" b="1" dirty="0">
-                <a:solidFill>
-                  <a:srgbClr val="0F172A"/>
-                </a:solidFill>
-                <a:latin typeface="Segoe UI" pitchFamily="34" charset="0"/>
-                <a:ea typeface="Segoe UI" pitchFamily="34" charset="-122"/>
-                <a:cs typeface="Segoe UI" pitchFamily="34" charset="-120"/>
-              </a:rPr>
-              <a:t>3. Persona Studio &amp; 8 Facial Anchors
+              <a:t>Unifies live system monitoring, container health, and error tracing through the official Grafana MCP endpoint:
 </a:t>
             </a:r>
             <a:pPr indent="0" marL="0">
@@ -10564,79 +10637,13 @@
             <a:r>
               <a:rPr lang="en-US" sz="1200" dirty="0">
                 <a:solidFill>
-                  <a:srgbClr val="64748B"/>
-                </a:solidFill>
-                <a:latin typeface="Segoe UI" pitchFamily="34" charset="0"/>
-                <a:ea typeface="Segoe UI" pitchFamily="34" charset="-122"/>
-                <a:cs typeface="Segoe UI" pitchFamily="34" charset="-120"/>
-              </a:rPr>
-              <a:t>Locks facial geometry, wardrobe, and character embeddings across 50 episodes, eliminating visual drift and inconsistency.</a:t>
-            </a:r>
-            <a:endParaRPr lang="en-US" sz="1450" dirty="0"/>
-          </a:p>
-        </p:txBody>
-      </p:sp>
-      <p:sp>
-        <p:nvSpPr>
-          <p:cNvPr id="16" name="Shape 14"/>
-          <p:cNvSpPr/>
-          <p:nvPr/>
-        </p:nvSpPr>
-        <p:spPr>
-          <a:xfrm>
-            <a:off x="6217920" y="4114800"/>
-            <a:ext cx="5212080" cy="1783080"/>
-          </a:xfrm>
-          <a:prstGeom prst="roundRect">
-            <a:avLst>
-              <a:gd name="adj" fmla="val 5128"/>
-            </a:avLst>
-          </a:prstGeom>
-          <a:solidFill>
-            <a:srgbClr val="FFFFFF"/>
-          </a:solidFill>
-          <a:ln w="12700">
-            <a:solidFill>
-              <a:srgbClr val="E2E8F0"/>
-            </a:solidFill>
-            <a:prstDash val="solid"/>
-          </a:ln>
-        </p:spPr>
-      </p:sp>
-      <p:sp>
-        <p:nvSpPr>
-          <p:cNvPr id="17" name="Text 15"/>
-          <p:cNvSpPr/>
-          <p:nvPr/>
-        </p:nvSpPr>
-        <p:spPr>
-          <a:xfrm>
-            <a:off x="6446520" y="4297680"/>
-            <a:ext cx="4754880" cy="1463040"/>
-          </a:xfrm>
-          <a:prstGeom prst="rect">
-            <a:avLst/>
-          </a:prstGeom>
-          <a:noFill/>
-          <a:ln/>
-        </p:spPr>
-        <p:txBody>
-          <a:bodyPr wrap="square" rtlCol="0" anchor="t"/>
-          <a:lstStyle/>
-          <a:p>
-            <a:pPr indent="0" marL="0">
-              <a:buNone/>
-            </a:pPr>
-            <a:r>
-              <a:rPr lang="en-US" sz="1450" b="1" dirty="0">
-                <a:solidFill>
-                  <a:srgbClr val="0F172A"/>
-                </a:solidFill>
-                <a:latin typeface="Segoe UI" pitchFamily="34" charset="0"/>
-                <a:ea typeface="Segoe UI" pitchFamily="34" charset="-122"/>
-                <a:cs typeface="Segoe UI" pitchFamily="34" charset="-120"/>
-              </a:rPr>
-              <a:t>4. Scale-to-Zero Serverless Economy
+                  <a:srgbClr val="334155"/>
+                </a:solidFill>
+                <a:latin typeface="Segoe UI" pitchFamily="34" charset="0"/>
+                <a:ea typeface="Segoe UI" pitchFamily="34" charset="-122"/>
+                <a:cs typeface="Segoe UI" pitchFamily="34" charset="-120"/>
+              </a:rPr>
+              <a:t>• Telemetry Streaming: Auto-flushes structured logs &amp; RSS to Grafana Loki every 15s.
 </a:t>
             </a:r>
             <a:pPr indent="0" marL="0">
@@ -10648,15 +10655,54 @@
             <a:r>
               <a:rPr lang="en-US" sz="1200" dirty="0">
                 <a:solidFill>
-                  <a:srgbClr val="64748B"/>
-                </a:solidFill>
-                <a:latin typeface="Segoe UI" pitchFamily="34" charset="0"/>
-                <a:ea typeface="Segoe UI" pitchFamily="34" charset="-122"/>
-                <a:cs typeface="Segoe UI" pitchFamily="34" charset="-120"/>
-              </a:rPr>
-              <a:t>100% serverless infrastructure on Google Cloud Run automatically scales containers to 0 instances when idle, ensuring $0 static maintenance costs.</a:t>
-            </a:r>
-            <a:endParaRPr lang="en-US" sz="1450" dirty="0"/>
+                  <a:srgbClr val="334155"/>
+                </a:solidFill>
+                <a:latin typeface="Segoe UI" pitchFamily="34" charset="0"/>
+                <a:ea typeface="Segoe UI" pitchFamily="34" charset="-122"/>
+                <a:cs typeface="Segoe UI" pitchFamily="34" charset="-120"/>
+              </a:rPr>
+              <a:t>• P99 Latency &amp; Probes: Exposes GET /api/admin/observability tracking WebSockets.
+</a:t>
+            </a:r>
+            <a:pPr indent="0" marL="0">
+              <a:lnSpc>
+                <a:spcPct val="120000"/>
+              </a:lnSpc>
+              <a:buNone/>
+            </a:pPr>
+            <a:r>
+              <a:rPr lang="en-US" sz="1200" dirty="0">
+                <a:solidFill>
+                  <a:srgbClr val="334155"/>
+                </a:solidFill>
+                <a:latin typeface="Segoe UI" pitchFamily="34" charset="0"/>
+                <a:ea typeface="Segoe UI" pitchFamily="34" charset="-122"/>
+                <a:cs typeface="Segoe UI" pitchFamily="34" charset="-120"/>
+              </a:rPr>
+              <a:t>• Automated Alerts: Triggers instant email alerts upon critical AI pipeline failures.
+</a:t>
+            </a:r>
+            <a:pPr indent="0" marL="0">
+              <a:buNone/>
+            </a:pPr>
+            <a:endParaRPr lang="en-US" sz="1500" dirty="0"/>
+          </a:p>
+          <a:p>
+            <a:pPr indent="0" marL="0">
+              <a:buNone/>
+            </a:pPr>
+            <a:r>
+              <a:rPr lang="en-US" sz="1100" dirty="0">
+                <a:solidFill>
+                  <a:srgbClr val="0F172A"/>
+                </a:solidFill>
+                <a:latin typeface="Courier New" pitchFamily="34" charset="0"/>
+                <a:ea typeface="Courier New" pitchFamily="34" charset="-122"/>
+                <a:cs typeface="Courier New" pitchFamily="34" charset="-120"/>
+              </a:rPr>
+              <a:t>Service: server/src/services/observability/GrafanaObservabilityService.ts</a:t>
+            </a:r>
+            <a:endParaRPr lang="en-US" sz="1500" dirty="0"/>
           </a:p>
         </p:txBody>
       </p:sp>
@@ -10871,7 +10917,7 @@
                 <a:ea typeface="Courier New" pitchFamily="34" charset="-122"/>
                 <a:cs typeface="Courier New" pitchFamily="34" charset="-120"/>
               </a:rPr>
-              <a:t>17 / 23</a:t>
+              <a:t>17 / 24</a:t>
             </a:r>
             <a:endParaRPr lang="en-US" sz="1100" dirty="0"/>
           </a:p>
@@ -10935,7 +10981,7 @@
                 <a:ea typeface="Courier New" pitchFamily="34" charset="-122"/>
                 <a:cs typeface="Courier New" pitchFamily="34" charset="-120"/>
               </a:rPr>
-              <a:t>CONSISTENCY ENGINE</a:t>
+              <a:t>COMPETITIVE EDGE</a:t>
             </a:r>
             <a:endParaRPr lang="en-US" sz="1100" dirty="0"/>
           </a:p>
@@ -10974,7 +11020,7 @@
                 <a:ea typeface="Segoe UI" pitchFamily="34" charset="-122"/>
                 <a:cs typeface="Segoe UI" pitchFamily="34" charset="-120"/>
               </a:rPr>
-              <a:t>Persona Studio: 8 Facial Consistency Anchors</a:t>
+              <a:t>Shine's 4 Unique Selling Points (USPs)</a:t>
             </a:r>
             <a:endParaRPr lang="en-US" sz="2600" dirty="0"/>
           </a:p>
@@ -10989,11 +11035,11 @@
         <p:spPr>
           <a:xfrm>
             <a:off x="731520" y="2148840"/>
-            <a:ext cx="5212080" cy="3566160"/>
+            <a:ext cx="5212080" cy="1783080"/>
           </a:xfrm>
           <a:prstGeom prst="roundRect">
             <a:avLst>
-              <a:gd name="adj" fmla="val 2564"/>
+              <a:gd name="adj" fmla="val 5128"/>
             </a:avLst>
           </a:prstGeom>
           <a:solidFill>
@@ -11015,8 +11061,8 @@
         </p:nvSpPr>
         <p:spPr>
           <a:xfrm>
-            <a:off x="1005840" y="2331720"/>
-            <a:ext cx="4663440" cy="3200400"/>
+            <a:off x="960120" y="2331720"/>
+            <a:ext cx="4754880" cy="1463040"/>
           </a:xfrm>
           <a:prstGeom prst="rect">
             <a:avLst/>
@@ -11032,7 +11078,7 @@
               <a:buNone/>
             </a:pPr>
             <a:r>
-              <a:rPr lang="en-US" sz="1500" b="1" dirty="0">
+              <a:rPr lang="en-US" sz="1450" b="1" dirty="0">
                 <a:solidFill>
                   <a:srgbClr val="0F172A"/>
                 </a:solidFill>
@@ -11040,7 +11086,7 @@
                 <a:ea typeface="Segoe UI" pitchFamily="34" charset="-122"/>
                 <a:cs typeface="Segoe UI" pitchFamily="34" charset="-120"/>
               </a:rPr>
-              <a:t>8-Angle Facial Consistency Locking
+              <a:t>1. Decoupled Multi-Language Dubbing
 </a:t>
             </a:r>
             <a:pPr indent="0" marL="0">
@@ -11050,7 +11096,7 @@
               <a:buNone/>
             </a:pPr>
             <a:r>
-              <a:rPr lang="en-US" sz="1250" dirty="0">
+              <a:rPr lang="en-US" sz="1200" dirty="0">
                 <a:solidFill>
                   <a:srgbClr val="64748B"/>
                 </a:solidFill>
@@ -11058,64 +11104,9 @@
                 <a:ea typeface="Segoe UI" pitchFamily="34" charset="-122"/>
                 <a:cs typeface="Segoe UI" pitchFamily="34" charset="-120"/>
               </a:rPr>
-              <a:t>When a character is registered, Persona Studio generates 8 multi-angle reference keyframes to lock their biometric DNA:
-</a:t>
-            </a:r>
-            <a:pPr indent="0" marL="0">
-              <a:lnSpc>
-                <a:spcPct val="120000"/>
-              </a:lnSpc>
-              <a:buNone/>
-            </a:pPr>
-            <a:r>
-              <a:rPr lang="en-US" sz="1200" dirty="0">
-                <a:solidFill>
-                  <a:srgbClr val="334155"/>
-                </a:solidFill>
-                <a:latin typeface="Segoe UI" pitchFamily="34" charset="0"/>
-                <a:ea typeface="Segoe UI" pitchFamily="34" charset="-122"/>
-                <a:cs typeface="Segoe UI" pitchFamily="34" charset="-120"/>
-              </a:rPr>
-              <a:t>• Frontal Portrait &amp; 45° Left/Right Profile
-</a:t>
-            </a:r>
-            <a:pPr indent="0" marL="0">
-              <a:lnSpc>
-                <a:spcPct val="120000"/>
-              </a:lnSpc>
-              <a:buNone/>
-            </a:pPr>
-            <a:r>
-              <a:rPr lang="en-US" sz="1200" dirty="0">
-                <a:solidFill>
-                  <a:srgbClr val="334155"/>
-                </a:solidFill>
-                <a:latin typeface="Segoe UI" pitchFamily="34" charset="0"/>
-                <a:ea typeface="Segoe UI" pitchFamily="34" charset="-122"/>
-                <a:cs typeface="Segoe UI" pitchFamily="34" charset="-120"/>
-              </a:rPr>
-              <a:t>• Full Side Profile &amp; High/Low Angle Cinematic Shots
-</a:t>
-            </a:r>
-            <a:pPr indent="0" marL="0">
-              <a:lnSpc>
-                <a:spcPct val="120000"/>
-              </a:lnSpc>
-              <a:buNone/>
-            </a:pPr>
-            <a:r>
-              <a:rPr lang="en-US" sz="1200" dirty="0">
-                <a:solidFill>
-                  <a:srgbClr val="334155"/>
-                </a:solidFill>
-                <a:latin typeface="Segoe UI" pitchFamily="34" charset="0"/>
-                <a:ea typeface="Segoe UI" pitchFamily="34" charset="-122"/>
-                <a:cs typeface="Segoe UI" pitchFamily="34" charset="-120"/>
-              </a:rPr>
-              <a:t>• Emotional Smirk &amp; Dramatic Anger expressions
-</a:t>
-            </a:r>
-            <a:endParaRPr lang="en-US" sz="1500" dirty="0"/>
+              <a:t>Silent visual clips + neural speech allow swapping dialogue into 6+ languages and auto-aligning timeline bounds (Δt) without re-rendering expensive video AI clips.</a:t>
+            </a:r>
+            <a:endParaRPr lang="en-US" sz="1450" dirty="0"/>
           </a:p>
         </p:txBody>
       </p:sp>
@@ -11128,11 +11119,11 @@
         <p:spPr>
           <a:xfrm>
             <a:off x="6217920" y="2148840"/>
-            <a:ext cx="5212080" cy="3566160"/>
+            <a:ext cx="5212080" cy="1783080"/>
           </a:xfrm>
           <a:prstGeom prst="roundRect">
             <a:avLst>
-              <a:gd name="adj" fmla="val 2564"/>
+              <a:gd name="adj" fmla="val 5128"/>
             </a:avLst>
           </a:prstGeom>
           <a:solidFill>
@@ -11154,8 +11145,8 @@
         </p:nvSpPr>
         <p:spPr>
           <a:xfrm>
-            <a:off x="6492240" y="2331720"/>
-            <a:ext cx="4663440" cy="3200400"/>
+            <a:off x="6446520" y="2331720"/>
+            <a:ext cx="4754880" cy="1463040"/>
           </a:xfrm>
           <a:prstGeom prst="rect">
             <a:avLst/>
@@ -11171,7 +11162,7 @@
               <a:buNone/>
             </a:pPr>
             <a:r>
-              <a:rPr lang="en-US" sz="1500" b="1" dirty="0">
+              <a:rPr lang="en-US" sz="1450" b="1" dirty="0">
                 <a:solidFill>
                   <a:srgbClr val="0F172A"/>
                 </a:solidFill>
@@ -11179,7 +11170,7 @@
                 <a:ea typeface="Segoe UI" pitchFamily="34" charset="-122"/>
                 <a:cs typeface="Segoe UI" pitchFamily="34" charset="-120"/>
               </a:rPr>
-              <a:t>Prompt DNA &amp; Reference Injection
+              <a:t>2. In-Browser $0 GPU WebCodecs Render
 </a:t>
             </a:r>
             <a:pPr indent="0" marL="0">
@@ -11189,7 +11180,7 @@
               <a:buNone/>
             </a:pPr>
             <a:r>
-              <a:rPr lang="en-US" sz="1250" dirty="0">
+              <a:rPr lang="en-US" sz="1200" dirty="0">
                 <a:solidFill>
                   <a:srgbClr val="64748B"/>
                 </a:solidFill>
@@ -11197,7 +11188,73 @@
                 <a:ea typeface="Segoe UI" pitchFamily="34" charset="-122"/>
                 <a:cs typeface="Segoe UI" pitchFamily="34" charset="-120"/>
               </a:rPr>
-              <a:t>During video and storyboard generation, the character visual traits and reference image URLs are automatically injected into Gemini and Veo prompts:
+              <a:t>Creators export 1080p MP4 episodes directly in browser memory in ~12 seconds, delivering fast turnarounds with zero server GPU overhead.</a:t>
+            </a:r>
+            <a:endParaRPr lang="en-US" sz="1450" dirty="0"/>
+          </a:p>
+        </p:txBody>
+      </p:sp>
+      <p:sp>
+        <p:nvSpPr>
+          <p:cNvPr id="14" name="Shape 12"/>
+          <p:cNvSpPr/>
+          <p:nvPr/>
+        </p:nvSpPr>
+        <p:spPr>
+          <a:xfrm>
+            <a:off x="731520" y="4114800"/>
+            <a:ext cx="5212080" cy="1783080"/>
+          </a:xfrm>
+          <a:prstGeom prst="roundRect">
+            <a:avLst>
+              <a:gd name="adj" fmla="val 5128"/>
+            </a:avLst>
+          </a:prstGeom>
+          <a:solidFill>
+            <a:srgbClr val="FFFFFF"/>
+          </a:solidFill>
+          <a:ln w="12700">
+            <a:solidFill>
+              <a:srgbClr val="E2E8F0"/>
+            </a:solidFill>
+            <a:prstDash val="solid"/>
+          </a:ln>
+        </p:spPr>
+      </p:sp>
+      <p:sp>
+        <p:nvSpPr>
+          <p:cNvPr id="15" name="Text 13"/>
+          <p:cNvSpPr/>
+          <p:nvPr/>
+        </p:nvSpPr>
+        <p:spPr>
+          <a:xfrm>
+            <a:off x="960120" y="4297680"/>
+            <a:ext cx="4754880" cy="1463040"/>
+          </a:xfrm>
+          <a:prstGeom prst="rect">
+            <a:avLst/>
+          </a:prstGeom>
+          <a:noFill/>
+          <a:ln/>
+        </p:spPr>
+        <p:txBody>
+          <a:bodyPr wrap="square" rtlCol="0" anchor="t"/>
+          <a:lstStyle/>
+          <a:p>
+            <a:pPr indent="0" marL="0">
+              <a:buNone/>
+            </a:pPr>
+            <a:r>
+              <a:rPr lang="en-US" sz="1450" b="1" dirty="0">
+                <a:solidFill>
+                  <a:srgbClr val="0F172A"/>
+                </a:solidFill>
+                <a:latin typeface="Segoe UI" pitchFamily="34" charset="0"/>
+                <a:ea typeface="Segoe UI" pitchFamily="34" charset="-122"/>
+                <a:cs typeface="Segoe UI" pitchFamily="34" charset="-120"/>
+              </a:rPr>
+              <a:t>3. Persona Studio &amp; 8 Facial Anchors
 </a:t>
             </a:r>
             <a:pPr indent="0" marL="0">
@@ -11209,13 +11266,79 @@
             <a:r>
               <a:rPr lang="en-US" sz="1200" dirty="0">
                 <a:solidFill>
-                  <a:srgbClr val="334155"/>
-                </a:solidFill>
-                <a:latin typeface="Segoe UI" pitchFamily="34" charset="0"/>
-                <a:ea typeface="Segoe UI" pitchFamily="34" charset="-122"/>
-                <a:cs typeface="Segoe UI" pitchFamily="34" charset="-120"/>
-              </a:rPr>
-              <a:t>• Preserves signature hairstyles, scars, and attire continuity.
+                  <a:srgbClr val="64748B"/>
+                </a:solidFill>
+                <a:latin typeface="Segoe UI" pitchFamily="34" charset="0"/>
+                <a:ea typeface="Segoe UI" pitchFamily="34" charset="-122"/>
+                <a:cs typeface="Segoe UI" pitchFamily="34" charset="-120"/>
+              </a:rPr>
+              <a:t>Locks facial geometry, wardrobe, and character embeddings across 50 episodes, eliminating visual drift and inconsistency.</a:t>
+            </a:r>
+            <a:endParaRPr lang="en-US" sz="1450" dirty="0"/>
+          </a:p>
+        </p:txBody>
+      </p:sp>
+      <p:sp>
+        <p:nvSpPr>
+          <p:cNvPr id="16" name="Shape 14"/>
+          <p:cNvSpPr/>
+          <p:nvPr/>
+        </p:nvSpPr>
+        <p:spPr>
+          <a:xfrm>
+            <a:off x="6217920" y="4114800"/>
+            <a:ext cx="5212080" cy="1783080"/>
+          </a:xfrm>
+          <a:prstGeom prst="roundRect">
+            <a:avLst>
+              <a:gd name="adj" fmla="val 5128"/>
+            </a:avLst>
+          </a:prstGeom>
+          <a:solidFill>
+            <a:srgbClr val="FFFFFF"/>
+          </a:solidFill>
+          <a:ln w="12700">
+            <a:solidFill>
+              <a:srgbClr val="E2E8F0"/>
+            </a:solidFill>
+            <a:prstDash val="solid"/>
+          </a:ln>
+        </p:spPr>
+      </p:sp>
+      <p:sp>
+        <p:nvSpPr>
+          <p:cNvPr id="17" name="Text 15"/>
+          <p:cNvSpPr/>
+          <p:nvPr/>
+        </p:nvSpPr>
+        <p:spPr>
+          <a:xfrm>
+            <a:off x="6446520" y="4297680"/>
+            <a:ext cx="4754880" cy="1463040"/>
+          </a:xfrm>
+          <a:prstGeom prst="rect">
+            <a:avLst/>
+          </a:prstGeom>
+          <a:noFill/>
+          <a:ln/>
+        </p:spPr>
+        <p:txBody>
+          <a:bodyPr wrap="square" rtlCol="0" anchor="t"/>
+          <a:lstStyle/>
+          <a:p>
+            <a:pPr indent="0" marL="0">
+              <a:buNone/>
+            </a:pPr>
+            <a:r>
+              <a:rPr lang="en-US" sz="1450" b="1" dirty="0">
+                <a:solidFill>
+                  <a:srgbClr val="0F172A"/>
+                </a:solidFill>
+                <a:latin typeface="Segoe UI" pitchFamily="34" charset="0"/>
+                <a:ea typeface="Segoe UI" pitchFamily="34" charset="-122"/>
+                <a:cs typeface="Segoe UI" pitchFamily="34" charset="-120"/>
+              </a:rPr>
+              <a:t>4. Scale-to-Zero Serverless Economy
 </a:t>
             </a:r>
             <a:pPr indent="0" marL="0">
@@ -11227,34 +11350,15 @@
             <a:r>
               <a:rPr lang="en-US" sz="1200" dirty="0">
                 <a:solidFill>
-                  <a:srgbClr val="334155"/>
-                </a:solidFill>
-                <a:latin typeface="Segoe UI" pitchFamily="34" charset="0"/>
-                <a:ea typeface="Segoe UI" pitchFamily="34" charset="-122"/>
-                <a:cs typeface="Segoe UI" pitchFamily="34" charset="-120"/>
-              </a:rPr>
-              <a:t>• Links voice IDs (Gemini Audio) to specific character personas.
-</a:t>
-            </a:r>
-            <a:pPr indent="0" marL="0">
-              <a:lnSpc>
-                <a:spcPct val="120000"/>
-              </a:lnSpc>
-              <a:buNone/>
-            </a:pPr>
-            <a:r>
-              <a:rPr lang="en-US" sz="1200" dirty="0">
-                <a:solidFill>
-                  <a:srgbClr val="334155"/>
-                </a:solidFill>
-                <a:latin typeface="Segoe UI" pitchFamily="34" charset="0"/>
-                <a:ea typeface="Segoe UI" pitchFamily="34" charset="-122"/>
-                <a:cs typeface="Segoe UI" pitchFamily="34" charset="-120"/>
-              </a:rPr>
-              <a:t>• Guarantees cast continuity across all 20–50 episodes.
-</a:t>
-            </a:r>
-            <a:endParaRPr lang="en-US" sz="1500" dirty="0"/>
+                  <a:srgbClr val="64748B"/>
+                </a:solidFill>
+                <a:latin typeface="Segoe UI" pitchFamily="34" charset="0"/>
+                <a:ea typeface="Segoe UI" pitchFamily="34" charset="-122"/>
+                <a:cs typeface="Segoe UI" pitchFamily="34" charset="-120"/>
+              </a:rPr>
+              <a:t>100% serverless infrastructure on Google Cloud Run automatically scales containers to 0 instances when idle, ensuring $0 static maintenance costs.</a:t>
+            </a:r>
+            <a:endParaRPr lang="en-US" sz="1450" dirty="0"/>
           </a:p>
         </p:txBody>
       </p:sp>
@@ -11469,7 +11573,7 @@
                 <a:ea typeface="Courier New" pitchFamily="34" charset="-122"/>
                 <a:cs typeface="Courier New" pitchFamily="34" charset="-120"/>
               </a:rPr>
-              <a:t>18 / 23</a:t>
+              <a:t>18 / 24</a:t>
             </a:r>
             <a:endParaRPr lang="en-US" sz="1100" dirty="0"/>
           </a:p>
@@ -11533,7 +11637,7 @@
                 <a:ea typeface="Courier New" pitchFamily="34" charset="-122"/>
                 <a:cs typeface="Courier New" pitchFamily="34" charset="-120"/>
               </a:rPr>
-              <a:t>AUDIENCE RETENTION</a:t>
+              <a:t>CONSISTENCY ENGINE</a:t>
             </a:r>
             <a:endParaRPr lang="en-US" sz="1100" dirty="0"/>
           </a:p>
@@ -11572,7 +11676,7 @@
                 <a:ea typeface="Segoe UI" pitchFamily="34" charset="-122"/>
                 <a:cs typeface="Segoe UI" pitchFamily="34" charset="-120"/>
               </a:rPr>
-              <a:t>Kinetic Subtitles &amp; Dynamic Cliffhanger Engine</a:t>
+              <a:t>Persona Studio: 8 Facial Consistency Anchors</a:t>
             </a:r>
             <a:endParaRPr lang="en-US" sz="2600" dirty="0"/>
           </a:p>
@@ -11638,7 +11742,7 @@
                 <a:ea typeface="Segoe UI" pitchFamily="34" charset="-122"/>
                 <a:cs typeface="Segoe UI" pitchFamily="34" charset="-120"/>
               </a:rPr>
-              <a:t>Word-Level Animated Kinetic Captions
+              <a:t>8-Angle Facial Consistency Locking
 </a:t>
             </a:r>
             <a:pPr indent="0" marL="0">
@@ -11656,7 +11760,7 @@
                 <a:ea typeface="Segoe UI" pitchFamily="34" charset="-122"/>
                 <a:cs typeface="Segoe UI" pitchFamily="34" charset="-120"/>
               </a:rPr>
-              <a:t>Captions drive over 60% of short-form video watch time. Shine automatically generates viral animated subtitles:
+              <a:t>When a character is registered, Persona Studio generates 8 multi-angle reference keyframes to lock their biometric DNA:
 </a:t>
             </a:r>
             <a:pPr indent="0" marL="0">
@@ -11674,7 +11778,7 @@
                 <a:ea typeface="Segoe UI" pitchFamily="34" charset="-122"/>
                 <a:cs typeface="Segoe UI" pitchFamily="34" charset="-120"/>
               </a:rPr>
-              <a:t>• Karaoke Pop-In: Active words highlight &amp; bounce on beat with speech.
+              <a:t>• Frontal Portrait &amp; 45° Left/Right Profile
 </a:t>
             </a:r>
             <a:pPr indent="0" marL="0">
@@ -11692,7 +11796,7 @@
                 <a:ea typeface="Segoe UI" pitchFamily="34" charset="-122"/>
                 <a:cs typeface="Segoe UI" pitchFamily="34" charset="-120"/>
               </a:rPr>
-              <a:t>• Typography Presets: Dramatic Punch, Neon Cyberpunk, Clean Minimalist.
+              <a:t>• Full Side Profile &amp; High/Low Angle Cinematic Shots
 </a:t>
             </a:r>
             <a:pPr indent="0" marL="0">
@@ -11710,7 +11814,7 @@
                 <a:ea typeface="Segoe UI" pitchFamily="34" charset="-122"/>
                 <a:cs typeface="Segoe UI" pitchFamily="34" charset="-120"/>
               </a:rPr>
-              <a:t>• One-Click Translation: Translates subtitles while preserving millisecond timings.
+              <a:t>• Emotional Smirk &amp; Dramatic Anger expressions
 </a:t>
             </a:r>
             <a:endParaRPr lang="en-US" sz="1500" dirty="0"/>
@@ -11777,7 +11881,7 @@
                 <a:ea typeface="Segoe UI" pitchFamily="34" charset="-122"/>
                 <a:cs typeface="Segoe UI" pitchFamily="34" charset="-120"/>
               </a:rPr>
-              <a:t>Dynamic Cliffhanger Engine
+              <a:t>Prompt DNA &amp; Reference Injection
 </a:t>
             </a:r>
             <a:pPr indent="0" marL="0">
@@ -11795,7 +11899,7 @@
                 <a:ea typeface="Segoe UI" pitchFamily="34" charset="-122"/>
                 <a:cs typeface="Segoe UI" pitchFamily="34" charset="-120"/>
               </a:rPr>
-              <a:t>Automatically identifies the episode climax and injects an intense 3-second hook sequence:
+              <a:t>During video and storyboard generation, the character visual traits and reference image URLs are automatically injected into Gemini and Veo prompts:
 </a:t>
             </a:r>
             <a:pPr indent="0" marL="0">
@@ -11813,7 +11917,7 @@
                 <a:ea typeface="Segoe UI" pitchFamily="34" charset="-122"/>
                 <a:cs typeface="Segoe UI" pitchFamily="34" charset="-120"/>
               </a:rPr>
-              <a:t>• GLSL Shaders: Triggers glitch, flash, or keyframe zoom-in effects.
+              <a:t>• Preserves signature hairstyles, scars, and attire continuity.
 </a:t>
             </a:r>
             <a:pPr indent="0" marL="0">
@@ -11831,7 +11935,7 @@
                 <a:ea typeface="Segoe UI" pitchFamily="34" charset="-122"/>
                 <a:cs typeface="Segoe UI" pitchFamily="34" charset="-120"/>
               </a:rPr>
-              <a:t>• Audio Stinger: Injects dramatic crescendo risers on AUDIO 3.
+              <a:t>• Links voice IDs (Gemini Audio) to specific character personas.
 </a:t>
             </a:r>
             <a:pPr indent="0" marL="0">
@@ -11849,7 +11953,7 @@
                 <a:ea typeface="Segoe UI" pitchFamily="34" charset="-122"/>
                 <a:cs typeface="Segoe UI" pitchFamily="34" charset="-120"/>
               </a:rPr>
-              <a:t>• Call-to-Action Overlay: Displays "Episode 2 Unlocked in 3s".
+              <a:t>• Guarantees cast continuity across all 20–50 episodes.
 </a:t>
             </a:r>
             <a:endParaRPr lang="en-US" sz="1500" dirty="0"/>
@@ -12067,7 +12171,7 @@
                 <a:ea typeface="Courier New" pitchFamily="34" charset="-122"/>
                 <a:cs typeface="Courier New" pitchFamily="34" charset="-120"/>
               </a:rPr>
-              <a:t>19 / 23</a:t>
+              <a:t>19 / 24</a:t>
             </a:r>
             <a:endParaRPr lang="en-US" sz="1100" dirty="0"/>
           </a:p>
@@ -12131,7 +12235,7 @@
                 <a:ea typeface="Courier New" pitchFamily="34" charset="-122"/>
                 <a:cs typeface="Courier New" pitchFamily="34" charset="-120"/>
               </a:rPr>
-              <a:t>DEVELOPMENT EVOLUTION</a:t>
+              <a:t>AUDIENCE RETENTION</a:t>
             </a:r>
             <a:endParaRPr lang="en-US" sz="1100" dirty="0"/>
           </a:p>
@@ -12170,7 +12274,7 @@
                 <a:ea typeface="Segoe UI" pitchFamily="34" charset="-122"/>
                 <a:cs typeface="Segoe UI" pitchFamily="34" charset="-120"/>
               </a:rPr>
-              <a:t>Agile Engineering Roadmap (Sprints 1–7)</a:t>
+              <a:t>Kinetic Subtitles &amp; Dynamic Cliffhanger Engine</a:t>
             </a:r>
             <a:endParaRPr lang="en-US" sz="2600" dirty="0"/>
           </a:p>
@@ -12185,11 +12289,11 @@
         <p:spPr>
           <a:xfrm>
             <a:off x="731520" y="2148840"/>
-            <a:ext cx="10698480" cy="621792"/>
+            <a:ext cx="5212080" cy="3566160"/>
           </a:xfrm>
           <a:prstGeom prst="roundRect">
             <a:avLst>
-              <a:gd name="adj" fmla="val 11765"/>
+              <a:gd name="adj" fmla="val 2564"/>
             </a:avLst>
           </a:prstGeom>
           <a:solidFill>
@@ -12211,8 +12315,8 @@
         </p:nvSpPr>
         <p:spPr>
           <a:xfrm>
-            <a:off x="914400" y="2148840"/>
-            <a:ext cx="8503920" cy="621792"/>
+            <a:off x="1005840" y="2331720"/>
+            <a:ext cx="4663440" cy="3200400"/>
           </a:xfrm>
           <a:prstGeom prst="rect">
             <a:avLst/>
@@ -12221,14 +12325,14 @@
           <a:ln/>
         </p:spPr>
         <p:txBody>
-          <a:bodyPr wrap="square" rtlCol="0" anchor="ctr"/>
-          <a:lstStyle/>
-          <a:p>
-            <a:pPr indent="0" marL="0">
-              <a:buNone/>
-            </a:pPr>
-            <a:r>
-              <a:rPr lang="en-US" sz="1250" b="1" dirty="0">
+          <a:bodyPr wrap="square" rtlCol="0" anchor="t"/>
+          <a:lstStyle/>
+          <a:p>
+            <a:pPr indent="0" marL="0">
+              <a:buNone/>
+            </a:pPr>
+            <a:r>
+              <a:rPr lang="en-US" sz="1500" b="1" dirty="0">
                 <a:solidFill>
                   <a:srgbClr val="0F172A"/>
                 </a:solidFill>
@@ -12236,9 +12340,31 @@
                 <a:ea typeface="Segoe UI" pitchFamily="34" charset="-122"/>
                 <a:cs typeface="Segoe UI" pitchFamily="34" charset="-120"/>
               </a:rPr>
-              <a:t>Sprint 1: </a:t>
-            </a:r>
-            <a:pPr indent="0" marL="0">
+              <a:t>Word-Level Animated Kinetic Captions
+</a:t>
+            </a:r>
+            <a:pPr indent="0" marL="0">
+              <a:lnSpc>
+                <a:spcPct val="120000"/>
+              </a:lnSpc>
+              <a:buNone/>
+            </a:pPr>
+            <a:r>
+              <a:rPr lang="en-US" sz="1250" dirty="0">
+                <a:solidFill>
+                  <a:srgbClr val="64748B"/>
+                </a:solidFill>
+                <a:latin typeface="Segoe UI" pitchFamily="34" charset="0"/>
+                <a:ea typeface="Segoe UI" pitchFamily="34" charset="-122"/>
+                <a:cs typeface="Segoe UI" pitchFamily="34" charset="-120"/>
+              </a:rPr>
+              <a:t>Captions drive over 60% of short-form video watch time. Shine automatically generates viral animated subtitles:
+</a:t>
+            </a:r>
+            <a:pPr indent="0" marL="0">
+              <a:lnSpc>
+                <a:spcPct val="120000"/>
+              </a:lnSpc>
               <a:buNone/>
             </a:pPr>
             <a:r>
@@ -12250,65 +12376,63 @@
                 <a:ea typeface="Segoe UI" pitchFamily="34" charset="-122"/>
                 <a:cs typeface="Segoe UI" pitchFamily="34" charset="-120"/>
               </a:rPr>
-              <a:t>Foundation, Vertex AI SDK, Pluggable DBs (Firestore/SQLite), and Auth Suite.</a:t>
-            </a:r>
-            <a:endParaRPr lang="en-US" sz="1250" dirty="0"/>
-          </a:p>
-        </p:txBody>
-      </p:sp>
-      <p:sp>
-        <p:nvSpPr>
-          <p:cNvPr id="12" name="Text 10"/>
-          <p:cNvSpPr/>
-          <p:nvPr/>
-        </p:nvSpPr>
-        <p:spPr>
-          <a:xfrm>
-            <a:off x="9509760" y="2148840"/>
-            <a:ext cx="1737360" cy="621792"/>
-          </a:xfrm>
-          <a:prstGeom prst="rect">
-            <a:avLst/>
-          </a:prstGeom>
-          <a:noFill/>
-          <a:ln/>
-        </p:spPr>
-        <p:txBody>
-          <a:bodyPr wrap="square" rtlCol="0" anchor="ctr"/>
-          <a:lstStyle/>
-          <a:p>
-            <a:pPr algn="r" indent="0" marL="0">
-              <a:buNone/>
-            </a:pPr>
-            <a:r>
-              <a:rPr lang="en-US" sz="1100" b="1" dirty="0">
-                <a:solidFill>
-                  <a:srgbClr val="0F172A"/>
-                </a:solidFill>
-                <a:latin typeface="Courier New" pitchFamily="34" charset="0"/>
-                <a:ea typeface="Courier New" pitchFamily="34" charset="-122"/>
-                <a:cs typeface="Courier New" pitchFamily="34" charset="-120"/>
-              </a:rPr>
-              <a:t>[v0.1 Alpha]</a:t>
-            </a:r>
-            <a:endParaRPr lang="en-US" sz="1100" dirty="0"/>
-          </a:p>
-        </p:txBody>
-      </p:sp>
-      <p:sp>
-        <p:nvSpPr>
-          <p:cNvPr id="13" name="Shape 11"/>
-          <p:cNvSpPr/>
-          <p:nvPr/>
-        </p:nvSpPr>
-        <p:spPr>
-          <a:xfrm>
-            <a:off x="731520" y="2834640"/>
-            <a:ext cx="10698480" cy="621792"/>
+              <a:t>• Karaoke Pop-In: Active words highlight &amp; bounce on beat with speech.
+</a:t>
+            </a:r>
+            <a:pPr indent="0" marL="0">
+              <a:lnSpc>
+                <a:spcPct val="120000"/>
+              </a:lnSpc>
+              <a:buNone/>
+            </a:pPr>
+            <a:r>
+              <a:rPr lang="en-US" sz="1200" dirty="0">
+                <a:solidFill>
+                  <a:srgbClr val="334155"/>
+                </a:solidFill>
+                <a:latin typeface="Segoe UI" pitchFamily="34" charset="0"/>
+                <a:ea typeface="Segoe UI" pitchFamily="34" charset="-122"/>
+                <a:cs typeface="Segoe UI" pitchFamily="34" charset="-120"/>
+              </a:rPr>
+              <a:t>• Typography Presets: Dramatic Punch, Neon Cyberpunk, Clean Minimalist.
+</a:t>
+            </a:r>
+            <a:pPr indent="0" marL="0">
+              <a:lnSpc>
+                <a:spcPct val="120000"/>
+              </a:lnSpc>
+              <a:buNone/>
+            </a:pPr>
+            <a:r>
+              <a:rPr lang="en-US" sz="1200" dirty="0">
+                <a:solidFill>
+                  <a:srgbClr val="334155"/>
+                </a:solidFill>
+                <a:latin typeface="Segoe UI" pitchFamily="34" charset="0"/>
+                <a:ea typeface="Segoe UI" pitchFamily="34" charset="-122"/>
+                <a:cs typeface="Segoe UI" pitchFamily="34" charset="-120"/>
+              </a:rPr>
+              <a:t>• One-Click Translation: Translates subtitles while preserving millisecond timings.
+</a:t>
+            </a:r>
+            <a:endParaRPr lang="en-US" sz="1500" dirty="0"/>
+          </a:p>
+        </p:txBody>
+      </p:sp>
+      <p:sp>
+        <p:nvSpPr>
+          <p:cNvPr id="12" name="Shape 10"/>
+          <p:cNvSpPr/>
+          <p:nvPr/>
+        </p:nvSpPr>
+        <p:spPr>
+          <a:xfrm>
+            <a:off x="6217920" y="2148840"/>
+            <a:ext cx="5212080" cy="3566160"/>
           </a:xfrm>
           <a:prstGeom prst="roundRect">
             <a:avLst>
-              <a:gd name="adj" fmla="val 11765"/>
+              <a:gd name="adj" fmla="val 2564"/>
             </a:avLst>
           </a:prstGeom>
           <a:solidFill>
@@ -12324,14 +12448,14 @@
       </p:sp>
       <p:sp>
         <p:nvSpPr>
-          <p:cNvPr id="14" name="Text 12"/>
-          <p:cNvSpPr/>
-          <p:nvPr/>
-        </p:nvSpPr>
-        <p:spPr>
-          <a:xfrm>
-            <a:off x="914400" y="2834640"/>
-            <a:ext cx="8503920" cy="621792"/>
+          <p:cNvPr id="13" name="Text 11"/>
+          <p:cNvSpPr/>
+          <p:nvPr/>
+        </p:nvSpPr>
+        <p:spPr>
+          <a:xfrm>
+            <a:off x="6492240" y="2331720"/>
+            <a:ext cx="4663440" cy="3200400"/>
           </a:xfrm>
           <a:prstGeom prst="rect">
             <a:avLst/>
@@ -12340,14 +12464,14 @@
           <a:ln/>
         </p:spPr>
         <p:txBody>
-          <a:bodyPr wrap="square" rtlCol="0" anchor="ctr"/>
-          <a:lstStyle/>
-          <a:p>
-            <a:pPr indent="0" marL="0">
-              <a:buNone/>
-            </a:pPr>
-            <a:r>
-              <a:rPr lang="en-US" sz="1250" b="1" dirty="0">
+          <a:bodyPr wrap="square" rtlCol="0" anchor="t"/>
+          <a:lstStyle/>
+          <a:p>
+            <a:pPr indent="0" marL="0">
+              <a:buNone/>
+            </a:pPr>
+            <a:r>
+              <a:rPr lang="en-US" sz="1500" b="1" dirty="0">
                 <a:solidFill>
                   <a:srgbClr val="0F172A"/>
                 </a:solidFill>
@@ -12355,9 +12479,31 @@
                 <a:ea typeface="Segoe UI" pitchFamily="34" charset="-122"/>
                 <a:cs typeface="Segoe UI" pitchFamily="34" charset="-120"/>
               </a:rPr>
-              <a:t>Sprint 2: </a:t>
-            </a:r>
-            <a:pPr indent="0" marL="0">
+              <a:t>Dynamic Cliffhanger Engine
+</a:t>
+            </a:r>
+            <a:pPr indent="0" marL="0">
+              <a:lnSpc>
+                <a:spcPct val="120000"/>
+              </a:lnSpc>
+              <a:buNone/>
+            </a:pPr>
+            <a:r>
+              <a:rPr lang="en-US" sz="1250" dirty="0">
+                <a:solidFill>
+                  <a:srgbClr val="64748B"/>
+                </a:solidFill>
+                <a:latin typeface="Segoe UI" pitchFamily="34" charset="0"/>
+                <a:ea typeface="Segoe UI" pitchFamily="34" charset="-122"/>
+                <a:cs typeface="Segoe UI" pitchFamily="34" charset="-120"/>
+              </a:rPr>
+              <a:t>Automatically identifies the episode climax and injects an intense 3-second hook sequence:
+</a:t>
+            </a:r>
+            <a:pPr indent="0" marL="0">
+              <a:lnSpc>
+                <a:spcPct val="120000"/>
+              </a:lnSpc>
               <a:buNone/>
             </a:pPr>
             <a:r>
@@ -12369,114 +12515,13 @@
                 <a:ea typeface="Segoe UI" pitchFamily="34" charset="-122"/>
                 <a:cs typeface="Segoe UI" pitchFamily="34" charset="-120"/>
               </a:rPr>
-              <a:t>Multi-Agent Script Pipeline, Trend Radar (Parallel MCP), Persona Studio.</a:t>
-            </a:r>
-            <a:endParaRPr lang="en-US" sz="1250" dirty="0"/>
-          </a:p>
-        </p:txBody>
-      </p:sp>
-      <p:sp>
-        <p:nvSpPr>
-          <p:cNvPr id="15" name="Text 13"/>
-          <p:cNvSpPr/>
-          <p:nvPr/>
-        </p:nvSpPr>
-        <p:spPr>
-          <a:xfrm>
-            <a:off x="9509760" y="2834640"/>
-            <a:ext cx="1737360" cy="621792"/>
-          </a:xfrm>
-          <a:prstGeom prst="rect">
-            <a:avLst/>
-          </a:prstGeom>
-          <a:noFill/>
-          <a:ln/>
-        </p:spPr>
-        <p:txBody>
-          <a:bodyPr wrap="square" rtlCol="0" anchor="ctr"/>
-          <a:lstStyle/>
-          <a:p>
-            <a:pPr algn="r" indent="0" marL="0">
-              <a:buNone/>
-            </a:pPr>
-            <a:r>
-              <a:rPr lang="en-US" sz="1100" b="1" dirty="0">
-                <a:solidFill>
-                  <a:srgbClr val="0F172A"/>
-                </a:solidFill>
-                <a:latin typeface="Courier New" pitchFamily="34" charset="0"/>
-                <a:ea typeface="Courier New" pitchFamily="34" charset="-122"/>
-                <a:cs typeface="Courier New" pitchFamily="34" charset="-120"/>
-              </a:rPr>
-              <a:t>[v0.2 Beta]</a:t>
-            </a:r>
-            <a:endParaRPr lang="en-US" sz="1100" dirty="0"/>
-          </a:p>
-        </p:txBody>
-      </p:sp>
-      <p:sp>
-        <p:nvSpPr>
-          <p:cNvPr id="16" name="Shape 14"/>
-          <p:cNvSpPr/>
-          <p:nvPr/>
-        </p:nvSpPr>
-        <p:spPr>
-          <a:xfrm>
-            <a:off x="731520" y="3520440"/>
-            <a:ext cx="10698480" cy="621792"/>
-          </a:xfrm>
-          <a:prstGeom prst="roundRect">
-            <a:avLst>
-              <a:gd name="adj" fmla="val 11765"/>
-            </a:avLst>
-          </a:prstGeom>
-          <a:solidFill>
-            <a:srgbClr val="FFFFFF"/>
-          </a:solidFill>
-          <a:ln w="12700">
-            <a:solidFill>
-              <a:srgbClr val="E2E8F0"/>
-            </a:solidFill>
-            <a:prstDash val="solid"/>
-          </a:ln>
-        </p:spPr>
-      </p:sp>
-      <p:sp>
-        <p:nvSpPr>
-          <p:cNvPr id="17" name="Text 15"/>
-          <p:cNvSpPr/>
-          <p:nvPr/>
-        </p:nvSpPr>
-        <p:spPr>
-          <a:xfrm>
-            <a:off x="914400" y="3520440"/>
-            <a:ext cx="8503920" cy="621792"/>
-          </a:xfrm>
-          <a:prstGeom prst="rect">
-            <a:avLst/>
-          </a:prstGeom>
-          <a:noFill/>
-          <a:ln/>
-        </p:spPr>
-        <p:txBody>
-          <a:bodyPr wrap="square" rtlCol="0" anchor="ctr"/>
-          <a:lstStyle/>
-          <a:p>
-            <a:pPr indent="0" marL="0">
-              <a:buNone/>
-            </a:pPr>
-            <a:r>
-              <a:rPr lang="en-US" sz="1250" b="1" dirty="0">
-                <a:solidFill>
-                  <a:srgbClr val="0F172A"/>
-                </a:solidFill>
-                <a:latin typeface="Segoe UI" pitchFamily="34" charset="0"/>
-                <a:ea typeface="Segoe UI" pitchFamily="34" charset="-122"/>
-                <a:cs typeface="Segoe UI" pitchFamily="34" charset="-120"/>
-              </a:rPr>
-              <a:t>Sprint 3: </a:t>
-            </a:r>
-            <a:pPr indent="0" marL="0">
+              <a:t>• GLSL Shaders: Triggers glitch, flash, or keyframe zoom-in effects.
+</a:t>
+            </a:r>
+            <a:pPr indent="0" marL="0">
+              <a:lnSpc>
+                <a:spcPct val="120000"/>
+              </a:lnSpc>
               <a:buNone/>
             </a:pPr>
             <a:r>
@@ -12488,114 +12533,13 @@
                 <a:ea typeface="Segoe UI" pitchFamily="34" charset="-122"/>
                 <a:cs typeface="Segoe UI" pitchFamily="34" charset="-120"/>
               </a:rPr>
-              <a:t>OpenVideo Pixi.js WebGL Editor, Undo/Redo Commands, Dual-Render Parity.</a:t>
-            </a:r>
-            <a:endParaRPr lang="en-US" sz="1250" dirty="0"/>
-          </a:p>
-        </p:txBody>
-      </p:sp>
-      <p:sp>
-        <p:nvSpPr>
-          <p:cNvPr id="18" name="Text 16"/>
-          <p:cNvSpPr/>
-          <p:nvPr/>
-        </p:nvSpPr>
-        <p:spPr>
-          <a:xfrm>
-            <a:off x="9509760" y="3520440"/>
-            <a:ext cx="1737360" cy="621792"/>
-          </a:xfrm>
-          <a:prstGeom prst="rect">
-            <a:avLst/>
-          </a:prstGeom>
-          <a:noFill/>
-          <a:ln/>
-        </p:spPr>
-        <p:txBody>
-          <a:bodyPr wrap="square" rtlCol="0" anchor="ctr"/>
-          <a:lstStyle/>
-          <a:p>
-            <a:pPr algn="r" indent="0" marL="0">
-              <a:buNone/>
-            </a:pPr>
-            <a:r>
-              <a:rPr lang="en-US" sz="1100" b="1" dirty="0">
-                <a:solidFill>
-                  <a:srgbClr val="0F172A"/>
-                </a:solidFill>
-                <a:latin typeface="Courier New" pitchFamily="34" charset="0"/>
-                <a:ea typeface="Courier New" pitchFamily="34" charset="-122"/>
-                <a:cs typeface="Courier New" pitchFamily="34" charset="-120"/>
-              </a:rPr>
-              <a:t>[v0.5 NLE Beta]</a:t>
-            </a:r>
-            <a:endParaRPr lang="en-US" sz="1100" dirty="0"/>
-          </a:p>
-        </p:txBody>
-      </p:sp>
-      <p:sp>
-        <p:nvSpPr>
-          <p:cNvPr id="19" name="Shape 17"/>
-          <p:cNvSpPr/>
-          <p:nvPr/>
-        </p:nvSpPr>
-        <p:spPr>
-          <a:xfrm>
-            <a:off x="731520" y="4206240"/>
-            <a:ext cx="10698480" cy="621792"/>
-          </a:xfrm>
-          <a:prstGeom prst="roundRect">
-            <a:avLst>
-              <a:gd name="adj" fmla="val 11765"/>
-            </a:avLst>
-          </a:prstGeom>
-          <a:solidFill>
-            <a:srgbClr val="FFFFFF"/>
-          </a:solidFill>
-          <a:ln w="12700">
-            <a:solidFill>
-              <a:srgbClr val="E2E8F0"/>
-            </a:solidFill>
-            <a:prstDash val="solid"/>
-          </a:ln>
-        </p:spPr>
-      </p:sp>
-      <p:sp>
-        <p:nvSpPr>
-          <p:cNvPr id="20" name="Text 18"/>
-          <p:cNvSpPr/>
-          <p:nvPr/>
-        </p:nvSpPr>
-        <p:spPr>
-          <a:xfrm>
-            <a:off x="914400" y="4206240"/>
-            <a:ext cx="8503920" cy="621792"/>
-          </a:xfrm>
-          <a:prstGeom prst="rect">
-            <a:avLst/>
-          </a:prstGeom>
-          <a:noFill/>
-          <a:ln/>
-        </p:spPr>
-        <p:txBody>
-          <a:bodyPr wrap="square" rtlCol="0" anchor="ctr"/>
-          <a:lstStyle/>
-          <a:p>
-            <a:pPr indent="0" marL="0">
-              <a:buNone/>
-            </a:pPr>
-            <a:r>
-              <a:rPr lang="en-US" sz="1250" b="1" dirty="0">
-                <a:solidFill>
-                  <a:srgbClr val="0F172A"/>
-                </a:solidFill>
-                <a:latin typeface="Segoe UI" pitchFamily="34" charset="0"/>
-                <a:ea typeface="Segoe UI" pitchFamily="34" charset="-122"/>
-                <a:cs typeface="Segoe UI" pitchFamily="34" charset="-120"/>
-              </a:rPr>
-              <a:t>Sprint 4: </a:t>
-            </a:r>
-            <a:pPr indent="0" marL="0">
+              <a:t>• Audio Stinger: Injects dramatic crescendo risers on AUDIO 3.
+</a:t>
+            </a:r>
+            <a:pPr indent="0" marL="0">
+              <a:lnSpc>
+                <a:spcPct val="120000"/>
+              </a:lnSpc>
               <a:buNone/>
             </a:pPr>
             <a:r>
@@ -12607,286 +12551,10 @@
                 <a:ea typeface="Segoe UI" pitchFamily="34" charset="-122"/>
                 <a:cs typeface="Segoe UI" pitchFamily="34" charset="-120"/>
               </a:rPr>
-              <a:t>Neural Voiceover, Kinetic Subtitles, Cliffhanger Engine, Meta Demucs v4.</a:t>
-            </a:r>
-            <a:endParaRPr lang="en-US" sz="1250" dirty="0"/>
-          </a:p>
-        </p:txBody>
-      </p:sp>
-      <p:sp>
-        <p:nvSpPr>
-          <p:cNvPr id="21" name="Text 19"/>
-          <p:cNvSpPr/>
-          <p:nvPr/>
-        </p:nvSpPr>
-        <p:spPr>
-          <a:xfrm>
-            <a:off x="9509760" y="4206240"/>
-            <a:ext cx="1737360" cy="621792"/>
-          </a:xfrm>
-          <a:prstGeom prst="rect">
-            <a:avLst/>
-          </a:prstGeom>
-          <a:noFill/>
-          <a:ln/>
-        </p:spPr>
-        <p:txBody>
-          <a:bodyPr wrap="square" rtlCol="0" anchor="ctr"/>
-          <a:lstStyle/>
-          <a:p>
-            <a:pPr algn="r" indent="0" marL="0">
-              <a:buNone/>
-            </a:pPr>
-            <a:r>
-              <a:rPr lang="en-US" sz="1100" b="1" dirty="0">
-                <a:solidFill>
-                  <a:srgbClr val="0F172A"/>
-                </a:solidFill>
-                <a:latin typeface="Courier New" pitchFamily="34" charset="0"/>
-                <a:ea typeface="Courier New" pitchFamily="34" charset="-122"/>
-                <a:cs typeface="Courier New" pitchFamily="34" charset="-120"/>
-              </a:rPr>
-              <a:t>[v0.8 RC1]</a:t>
-            </a:r>
-            <a:endParaRPr lang="en-US" sz="1100" dirty="0"/>
-          </a:p>
-        </p:txBody>
-      </p:sp>
-      <p:sp>
-        <p:nvSpPr>
-          <p:cNvPr id="22" name="Shape 20"/>
-          <p:cNvSpPr/>
-          <p:nvPr/>
-        </p:nvSpPr>
-        <p:spPr>
-          <a:xfrm>
-            <a:off x="731520" y="4892040"/>
-            <a:ext cx="10698480" cy="621792"/>
-          </a:xfrm>
-          <a:prstGeom prst="roundRect">
-            <a:avLst>
-              <a:gd name="adj" fmla="val 11765"/>
-            </a:avLst>
-          </a:prstGeom>
-          <a:solidFill>
-            <a:srgbClr val="FFFFFF"/>
-          </a:solidFill>
-          <a:ln w="12700">
-            <a:solidFill>
-              <a:srgbClr val="E2E8F0"/>
-            </a:solidFill>
-            <a:prstDash val="solid"/>
-          </a:ln>
-        </p:spPr>
-      </p:sp>
-      <p:sp>
-        <p:nvSpPr>
-          <p:cNvPr id="23" name="Text 21"/>
-          <p:cNvSpPr/>
-          <p:nvPr/>
-        </p:nvSpPr>
-        <p:spPr>
-          <a:xfrm>
-            <a:off x="914400" y="4892040"/>
-            <a:ext cx="8503920" cy="621792"/>
-          </a:xfrm>
-          <a:prstGeom prst="rect">
-            <a:avLst/>
-          </a:prstGeom>
-          <a:noFill/>
-          <a:ln/>
-        </p:spPr>
-        <p:txBody>
-          <a:bodyPr wrap="square" rtlCol="0" anchor="ctr"/>
-          <a:lstStyle/>
-          <a:p>
-            <a:pPr indent="0" marL="0">
-              <a:buNone/>
-            </a:pPr>
-            <a:r>
-              <a:rPr lang="en-US" sz="1250" b="1" dirty="0">
-                <a:solidFill>
-                  <a:srgbClr val="0F172A"/>
-                </a:solidFill>
-                <a:latin typeface="Segoe UI" pitchFamily="34" charset="0"/>
-                <a:ea typeface="Segoe UI" pitchFamily="34" charset="-122"/>
-                <a:cs typeface="Segoe UI" pitchFamily="34" charset="-120"/>
-              </a:rPr>
-              <a:t>Sprint 5: </a:t>
-            </a:r>
-            <a:pPr indent="0" marL="0">
-              <a:buNone/>
-            </a:pPr>
-            <a:r>
-              <a:rPr lang="en-US" sz="1200" dirty="0">
-                <a:solidFill>
-                  <a:srgbClr val="334155"/>
-                </a:solidFill>
-                <a:latin typeface="Segoe UI" pitchFamily="34" charset="0"/>
-                <a:ea typeface="Segoe UI" pitchFamily="34" charset="-122"/>
-                <a:cs typeface="Segoe UI" pitchFamily="34" charset="-120"/>
-              </a:rPr>
-              <a:t>WebSocket Delta Sync Architecture, Quality Linter &amp; i18n Key Parity.</a:t>
-            </a:r>
-            <a:endParaRPr lang="en-US" sz="1250" dirty="0"/>
-          </a:p>
-        </p:txBody>
-      </p:sp>
-      <p:sp>
-        <p:nvSpPr>
-          <p:cNvPr id="24" name="Text 22"/>
-          <p:cNvSpPr/>
-          <p:nvPr/>
-        </p:nvSpPr>
-        <p:spPr>
-          <a:xfrm>
-            <a:off x="9509760" y="4892040"/>
-            <a:ext cx="1737360" cy="621792"/>
-          </a:xfrm>
-          <a:prstGeom prst="rect">
-            <a:avLst/>
-          </a:prstGeom>
-          <a:noFill/>
-          <a:ln/>
-        </p:spPr>
-        <p:txBody>
-          <a:bodyPr wrap="square" rtlCol="0" anchor="ctr"/>
-          <a:lstStyle/>
-          <a:p>
-            <a:pPr algn="r" indent="0" marL="0">
-              <a:buNone/>
-            </a:pPr>
-            <a:r>
-              <a:rPr lang="en-US" sz="1100" b="1" dirty="0">
-                <a:solidFill>
-                  <a:srgbClr val="0F172A"/>
-                </a:solidFill>
-                <a:latin typeface="Courier New" pitchFamily="34" charset="0"/>
-                <a:ea typeface="Courier New" pitchFamily="34" charset="-122"/>
-                <a:cs typeface="Courier New" pitchFamily="34" charset="-120"/>
-              </a:rPr>
-              <a:t>[v0.9 RC2]</a:t>
-            </a:r>
-            <a:endParaRPr lang="en-US" sz="1100" dirty="0"/>
-          </a:p>
-        </p:txBody>
-      </p:sp>
-      <p:sp>
-        <p:nvSpPr>
-          <p:cNvPr id="25" name="Shape 23"/>
-          <p:cNvSpPr/>
-          <p:nvPr/>
-        </p:nvSpPr>
-        <p:spPr>
-          <a:xfrm>
-            <a:off x="731520" y="5577840"/>
-            <a:ext cx="10698480" cy="621792"/>
-          </a:xfrm>
-          <a:prstGeom prst="roundRect">
-            <a:avLst>
-              <a:gd name="adj" fmla="val 11765"/>
-            </a:avLst>
-          </a:prstGeom>
-          <a:solidFill>
-            <a:srgbClr val="FFFFFF"/>
-          </a:solidFill>
-          <a:ln w="12700">
-            <a:solidFill>
-              <a:srgbClr val="E2E8F0"/>
-            </a:solidFill>
-            <a:prstDash val="solid"/>
-          </a:ln>
-        </p:spPr>
-      </p:sp>
-      <p:sp>
-        <p:nvSpPr>
-          <p:cNvPr id="26" name="Text 24"/>
-          <p:cNvSpPr/>
-          <p:nvPr/>
-        </p:nvSpPr>
-        <p:spPr>
-          <a:xfrm>
-            <a:off x="914400" y="5577840"/>
-            <a:ext cx="8503920" cy="621792"/>
-          </a:xfrm>
-          <a:prstGeom prst="rect">
-            <a:avLst/>
-          </a:prstGeom>
-          <a:noFill/>
-          <a:ln/>
-        </p:spPr>
-        <p:txBody>
-          <a:bodyPr wrap="square" rtlCol="0" anchor="ctr"/>
-          <a:lstStyle/>
-          <a:p>
-            <a:pPr indent="0" marL="0">
-              <a:buNone/>
-            </a:pPr>
-            <a:r>
-              <a:rPr lang="en-US" sz="1250" b="1" dirty="0">
-                <a:solidFill>
-                  <a:srgbClr val="0F172A"/>
-                </a:solidFill>
-                <a:latin typeface="Segoe UI" pitchFamily="34" charset="0"/>
-                <a:ea typeface="Segoe UI" pitchFamily="34" charset="-122"/>
-                <a:cs typeface="Segoe UI" pitchFamily="34" charset="-120"/>
-              </a:rPr>
-              <a:t>Sprint 6 &amp; 7: </a:t>
-            </a:r>
-            <a:pPr indent="0" marL="0">
-              <a:buNone/>
-            </a:pPr>
-            <a:r>
-              <a:rPr lang="en-US" sz="1200" dirty="0">
-                <a:solidFill>
-                  <a:srgbClr val="334155"/>
-                </a:solidFill>
-                <a:latin typeface="Segoe UI" pitchFamily="34" charset="0"/>
-                <a:ea typeface="Segoe UI" pitchFamily="34" charset="-122"/>
-                <a:cs typeface="Segoe UI" pitchFamily="34" charset="-120"/>
-              </a:rPr>
-              <a:t>Multi-Platform Publishing, Grafana MCP Observability &amp; Playwright E2E Suite.</a:t>
-            </a:r>
-            <a:endParaRPr lang="en-US" sz="1250" dirty="0"/>
-          </a:p>
-        </p:txBody>
-      </p:sp>
-      <p:sp>
-        <p:nvSpPr>
-          <p:cNvPr id="27" name="Text 25"/>
-          <p:cNvSpPr/>
-          <p:nvPr/>
-        </p:nvSpPr>
-        <p:spPr>
-          <a:xfrm>
-            <a:off x="9509760" y="5577840"/>
-            <a:ext cx="1737360" cy="621792"/>
-          </a:xfrm>
-          <a:prstGeom prst="rect">
-            <a:avLst/>
-          </a:prstGeom>
-          <a:noFill/>
-          <a:ln/>
-        </p:spPr>
-        <p:txBody>
-          <a:bodyPr wrap="square" rtlCol="0" anchor="ctr"/>
-          <a:lstStyle/>
-          <a:p>
-            <a:pPr algn="r" indent="0" marL="0">
-              <a:buNone/>
-            </a:pPr>
-            <a:r>
-              <a:rPr lang="en-US" sz="1100" b="1" dirty="0">
-                <a:solidFill>
-                  <a:srgbClr val="0F172A"/>
-                </a:solidFill>
-                <a:latin typeface="Courier New" pitchFamily="34" charset="0"/>
-                <a:ea typeface="Courier New" pitchFamily="34" charset="-122"/>
-                <a:cs typeface="Courier New" pitchFamily="34" charset="-120"/>
-              </a:rPr>
-              <a:t>[v1.1 Commercial]</a:t>
-            </a:r>
-            <a:endParaRPr lang="en-US" sz="1100" dirty="0"/>
+              <a:t>• Call-to-Action Overlay: Displays "Episode 2 Unlocked in 3s".
+</a:t>
+            </a:r>
+            <a:endParaRPr lang="en-US" sz="1500" dirty="0"/>
           </a:p>
         </p:txBody>
       </p:sp>
@@ -13101,7 +12769,7 @@
                 <a:ea typeface="Courier New" pitchFamily="34" charset="-122"/>
                 <a:cs typeface="Courier New" pitchFamily="34" charset="-120"/>
               </a:rPr>
-              <a:t>02 / 23</a:t>
+              <a:t>02 / 24</a:t>
             </a:r>
             <a:endParaRPr lang="en-US" sz="1100" dirty="0"/>
           </a:p>
@@ -13784,7 +13452,7 @@
                 <a:ea typeface="Courier New" pitchFamily="34" charset="-122"/>
                 <a:cs typeface="Courier New" pitchFamily="34" charset="-120"/>
               </a:rPr>
-              <a:t>20 / 23</a:t>
+              <a:t>20 / 24</a:t>
             </a:r>
             <a:endParaRPr lang="en-US" sz="1100" dirty="0"/>
           </a:p>
@@ -13842,13 +13510,13 @@
             <a:r>
               <a:rPr lang="en-US" sz="1100" b="1" dirty="0">
                 <a:solidFill>
-                  <a:srgbClr val="D97706"/>
+                  <a:srgbClr val="64748B"/>
                 </a:solidFill>
                 <a:latin typeface="Courier New" pitchFamily="34" charset="0"/>
                 <a:ea typeface="Courier New" pitchFamily="34" charset="-122"/>
                 <a:cs typeface="Courier New" pitchFamily="34" charset="-120"/>
               </a:rPr>
-              <a:t>FUTURE PLANNING (PHASE 2 &amp; 3 ROADMAP)</a:t>
+              <a:t>DEVELOPMENT EVOLUTION</a:t>
             </a:r>
             <a:endParaRPr lang="en-US" sz="1100" dirty="0"/>
           </a:p>
@@ -13887,7 +13555,7 @@
                 <a:ea typeface="Segoe UI" pitchFamily="34" charset="-122"/>
                 <a:cs typeface="Segoe UI" pitchFamily="34" charset="-120"/>
               </a:rPr>
-              <a:t>Planned Roadmap Innovations</a:t>
+              <a:t>Agile Engineering Roadmap (Sprints 1–7)</a:t>
             </a:r>
             <a:endParaRPr lang="en-US" sz="2600" dirty="0"/>
           </a:p>
@@ -13902,11 +13570,11 @@
         <p:spPr>
           <a:xfrm>
             <a:off x="731520" y="2148840"/>
-            <a:ext cx="5212080" cy="1783080"/>
+            <a:ext cx="10698480" cy="621792"/>
           </a:xfrm>
           <a:prstGeom prst="roundRect">
             <a:avLst>
-              <a:gd name="adj" fmla="val 5128"/>
+              <a:gd name="adj" fmla="val 11765"/>
             </a:avLst>
           </a:prstGeom>
           <a:solidFill>
@@ -13928,8 +13596,8 @@
         </p:nvSpPr>
         <p:spPr>
           <a:xfrm>
-            <a:off x="960120" y="2313432"/>
-            <a:ext cx="4754880" cy="1508760"/>
+            <a:off x="914400" y="2148840"/>
+            <a:ext cx="8503920" cy="621792"/>
           </a:xfrm>
           <a:prstGeom prst="rect">
             <a:avLst/>
@@ -13938,14 +13606,14 @@
           <a:ln/>
         </p:spPr>
         <p:txBody>
-          <a:bodyPr wrap="square" rtlCol="0" anchor="t"/>
-          <a:lstStyle/>
-          <a:p>
-            <a:pPr indent="0" marL="0">
-              <a:buNone/>
-            </a:pPr>
-            <a:r>
-              <a:rPr lang="en-US" sz="1450" b="1" dirty="0">
+          <a:bodyPr wrap="square" rtlCol="0" anchor="ctr"/>
+          <a:lstStyle/>
+          <a:p>
+            <a:pPr indent="0" marL="0">
+              <a:buNone/>
+            </a:pPr>
+            <a:r>
+              <a:rPr lang="en-US" sz="1250" b="1" dirty="0">
                 <a:solidFill>
                   <a:srgbClr val="0F172A"/>
                 </a:solidFill>
@@ -13953,32 +13621,52 @@
                 <a:ea typeface="Segoe UI" pitchFamily="34" charset="-122"/>
                 <a:cs typeface="Segoe UI" pitchFamily="34" charset="-120"/>
               </a:rPr>
-              <a:t>1. Real-Time Multi-User Co-Editing
-</a:t>
-            </a:r>
-            <a:pPr indent="0" marL="0">
-              <a:lnSpc>
-                <a:spcPct val="115000"/>
-              </a:lnSpc>
+              <a:t>Sprint 1: </a:t>
+            </a:r>
+            <a:pPr indent="0" marL="0">
               <a:buNone/>
             </a:pPr>
             <a:r>
               <a:rPr lang="en-US" sz="1200" dirty="0">
                 <a:solidFill>
-                  <a:srgbClr val="64748B"/>
-                </a:solidFill>
-                <a:latin typeface="Segoe UI" pitchFamily="34" charset="0"/>
-                <a:ea typeface="Segoe UI" pitchFamily="34" charset="-122"/>
-                <a:cs typeface="Segoe UI" pitchFamily="34" charset="-120"/>
-              </a:rPr>
-              <a:t>Full client integration of the Socket.io RFC 6902 JSON Pointer delta patch engine for live collaborative timeline editing.
-</a:t>
-            </a:r>
-            <a:pPr indent="0" marL="0">
-              <a:buNone/>
-            </a:pPr>
-            <a:r>
-              <a:rPr lang="en-US" sz="1050" b="1" dirty="0">
+                  <a:srgbClr val="334155"/>
+                </a:solidFill>
+                <a:latin typeface="Segoe UI" pitchFamily="34" charset="0"/>
+                <a:ea typeface="Segoe UI" pitchFamily="34" charset="-122"/>
+                <a:cs typeface="Segoe UI" pitchFamily="34" charset="-120"/>
+              </a:rPr>
+              <a:t>Foundation, Vertex AI SDK, Pluggable DBs (Firestore/SQLite), and Auth Suite.</a:t>
+            </a:r>
+            <a:endParaRPr lang="en-US" sz="1250" dirty="0"/>
+          </a:p>
+        </p:txBody>
+      </p:sp>
+      <p:sp>
+        <p:nvSpPr>
+          <p:cNvPr id="12" name="Text 10"/>
+          <p:cNvSpPr/>
+          <p:nvPr/>
+        </p:nvSpPr>
+        <p:spPr>
+          <a:xfrm>
+            <a:off x="9509760" y="2148840"/>
+            <a:ext cx="1737360" cy="621792"/>
+          </a:xfrm>
+          <a:prstGeom prst="rect">
+            <a:avLst/>
+          </a:prstGeom>
+          <a:noFill/>
+          <a:ln/>
+        </p:spPr>
+        <p:txBody>
+          <a:bodyPr wrap="square" rtlCol="0" anchor="ctr"/>
+          <a:lstStyle/>
+          <a:p>
+            <a:pPr algn="r" indent="0" marL="0">
+              <a:buNone/>
+            </a:pPr>
+            <a:r>
+              <a:rPr lang="en-US" sz="1100" b="1" dirty="0">
                 <a:solidFill>
                   <a:srgbClr val="0F172A"/>
                 </a:solidFill>
@@ -13986,26 +13674,26 @@
                 <a:ea typeface="Courier New" pitchFamily="34" charset="-122"/>
                 <a:cs typeface="Courier New" pitchFamily="34" charset="-120"/>
               </a:rPr>
-              <a:t>[Phase 2: Live Team Collaboration]</a:t>
-            </a:r>
-            <a:endParaRPr lang="en-US" sz="1450" dirty="0"/>
-          </a:p>
-        </p:txBody>
-      </p:sp>
-      <p:sp>
-        <p:nvSpPr>
-          <p:cNvPr id="12" name="Shape 10"/>
-          <p:cNvSpPr/>
-          <p:nvPr/>
-        </p:nvSpPr>
-        <p:spPr>
-          <a:xfrm>
-            <a:off x="6217920" y="2148840"/>
-            <a:ext cx="5212080" cy="1783080"/>
+              <a:t>[v0.1 Alpha]</a:t>
+            </a:r>
+            <a:endParaRPr lang="en-US" sz="1100" dirty="0"/>
+          </a:p>
+        </p:txBody>
+      </p:sp>
+      <p:sp>
+        <p:nvSpPr>
+          <p:cNvPr id="13" name="Shape 11"/>
+          <p:cNvSpPr/>
+          <p:nvPr/>
+        </p:nvSpPr>
+        <p:spPr>
+          <a:xfrm>
+            <a:off x="731520" y="2834640"/>
+            <a:ext cx="10698480" cy="621792"/>
           </a:xfrm>
           <a:prstGeom prst="roundRect">
             <a:avLst>
-              <a:gd name="adj" fmla="val 5128"/>
+              <a:gd name="adj" fmla="val 11765"/>
             </a:avLst>
           </a:prstGeom>
           <a:solidFill>
@@ -14021,14 +13709,14 @@
       </p:sp>
       <p:sp>
         <p:nvSpPr>
-          <p:cNvPr id="13" name="Text 11"/>
-          <p:cNvSpPr/>
-          <p:nvPr/>
-        </p:nvSpPr>
-        <p:spPr>
-          <a:xfrm>
-            <a:off x="6446520" y="2313432"/>
-            <a:ext cx="4754880" cy="1508760"/>
+          <p:cNvPr id="14" name="Text 12"/>
+          <p:cNvSpPr/>
+          <p:nvPr/>
+        </p:nvSpPr>
+        <p:spPr>
+          <a:xfrm>
+            <a:off x="914400" y="2834640"/>
+            <a:ext cx="8503920" cy="621792"/>
           </a:xfrm>
           <a:prstGeom prst="rect">
             <a:avLst/>
@@ -14037,14 +13725,14 @@
           <a:ln/>
         </p:spPr>
         <p:txBody>
-          <a:bodyPr wrap="square" rtlCol="0" anchor="t"/>
-          <a:lstStyle/>
-          <a:p>
-            <a:pPr indent="0" marL="0">
-              <a:buNone/>
-            </a:pPr>
-            <a:r>
-              <a:rPr lang="en-US" sz="1450" b="1" dirty="0">
+          <a:bodyPr wrap="square" rtlCol="0" anchor="ctr"/>
+          <a:lstStyle/>
+          <a:p>
+            <a:pPr indent="0" marL="0">
+              <a:buNone/>
+            </a:pPr>
+            <a:r>
+              <a:rPr lang="en-US" sz="1250" b="1" dirty="0">
                 <a:solidFill>
                   <a:srgbClr val="0F172A"/>
                 </a:solidFill>
@@ -14052,32 +13740,52 @@
                 <a:ea typeface="Segoe UI" pitchFamily="34" charset="-122"/>
                 <a:cs typeface="Segoe UI" pitchFamily="34" charset="-120"/>
               </a:rPr>
-              <a:t>2. Distributed Batch Render Queue
-</a:t>
-            </a:r>
-            <a:pPr indent="0" marL="0">
-              <a:lnSpc>
-                <a:spcPct val="115000"/>
-              </a:lnSpc>
+              <a:t>Sprint 2: </a:t>
+            </a:r>
+            <a:pPr indent="0" marL="0">
               <a:buNone/>
             </a:pPr>
             <a:r>
               <a:rPr lang="en-US" sz="1200" dirty="0">
                 <a:solidFill>
-                  <a:srgbClr val="64748B"/>
-                </a:solidFill>
-                <a:latin typeface="Segoe UI" pitchFamily="34" charset="0"/>
-                <a:ea typeface="Segoe UI" pitchFamily="34" charset="-122"/>
-                <a:cs typeface="Segoe UI" pitchFamily="34" charset="-120"/>
-              </a:rPr>
-              <a:t>Automated multi-episode batch queueing across a pool of parallel Cloud Run Playwright worker nodes via Cloud Pub/Sub.
-</a:t>
-            </a:r>
-            <a:pPr indent="0" marL="0">
-              <a:buNone/>
-            </a:pPr>
-            <a:r>
-              <a:rPr lang="en-US" sz="1050" b="1" dirty="0">
+                  <a:srgbClr val="334155"/>
+                </a:solidFill>
+                <a:latin typeface="Segoe UI" pitchFamily="34" charset="0"/>
+                <a:ea typeface="Segoe UI" pitchFamily="34" charset="-122"/>
+                <a:cs typeface="Segoe UI" pitchFamily="34" charset="-120"/>
+              </a:rPr>
+              <a:t>Multi-Agent Script Pipeline, Trend Radar (Parallel MCP), Persona Studio.</a:t>
+            </a:r>
+            <a:endParaRPr lang="en-US" sz="1250" dirty="0"/>
+          </a:p>
+        </p:txBody>
+      </p:sp>
+      <p:sp>
+        <p:nvSpPr>
+          <p:cNvPr id="15" name="Text 13"/>
+          <p:cNvSpPr/>
+          <p:nvPr/>
+        </p:nvSpPr>
+        <p:spPr>
+          <a:xfrm>
+            <a:off x="9509760" y="2834640"/>
+            <a:ext cx="1737360" cy="621792"/>
+          </a:xfrm>
+          <a:prstGeom prst="rect">
+            <a:avLst/>
+          </a:prstGeom>
+          <a:noFill/>
+          <a:ln/>
+        </p:spPr>
+        <p:txBody>
+          <a:bodyPr wrap="square" rtlCol="0" anchor="ctr"/>
+          <a:lstStyle/>
+          <a:p>
+            <a:pPr algn="r" indent="0" marL="0">
+              <a:buNone/>
+            </a:pPr>
+            <a:r>
+              <a:rPr lang="en-US" sz="1100" b="1" dirty="0">
                 <a:solidFill>
                   <a:srgbClr val="0F172A"/>
                 </a:solidFill>
@@ -14085,26 +13793,26 @@
                 <a:ea typeface="Courier New" pitchFamily="34" charset="-122"/>
                 <a:cs typeface="Courier New" pitchFamily="34" charset="-120"/>
               </a:rPr>
-              <a:t>[Phase 2: Automated 50-Episode Batch Queue]</a:t>
-            </a:r>
-            <a:endParaRPr lang="en-US" sz="1450" dirty="0"/>
-          </a:p>
-        </p:txBody>
-      </p:sp>
-      <p:sp>
-        <p:nvSpPr>
-          <p:cNvPr id="14" name="Shape 12"/>
-          <p:cNvSpPr/>
-          <p:nvPr/>
-        </p:nvSpPr>
-        <p:spPr>
-          <a:xfrm>
-            <a:off x="731520" y="4114800"/>
-            <a:ext cx="5212080" cy="1783080"/>
+              <a:t>[v0.2 Beta]</a:t>
+            </a:r>
+            <a:endParaRPr lang="en-US" sz="1100" dirty="0"/>
+          </a:p>
+        </p:txBody>
+      </p:sp>
+      <p:sp>
+        <p:nvSpPr>
+          <p:cNvPr id="16" name="Shape 14"/>
+          <p:cNvSpPr/>
+          <p:nvPr/>
+        </p:nvSpPr>
+        <p:spPr>
+          <a:xfrm>
+            <a:off x="731520" y="3520440"/>
+            <a:ext cx="10698480" cy="621792"/>
           </a:xfrm>
           <a:prstGeom prst="roundRect">
             <a:avLst>
-              <a:gd name="adj" fmla="val 5128"/>
+              <a:gd name="adj" fmla="val 11765"/>
             </a:avLst>
           </a:prstGeom>
           <a:solidFill>
@@ -14120,14 +13828,14 @@
       </p:sp>
       <p:sp>
         <p:nvSpPr>
-          <p:cNvPr id="15" name="Text 13"/>
-          <p:cNvSpPr/>
-          <p:nvPr/>
-        </p:nvSpPr>
-        <p:spPr>
-          <a:xfrm>
-            <a:off x="960120" y="4279392"/>
-            <a:ext cx="4754880" cy="1508760"/>
+          <p:cNvPr id="17" name="Text 15"/>
+          <p:cNvSpPr/>
+          <p:nvPr/>
+        </p:nvSpPr>
+        <p:spPr>
+          <a:xfrm>
+            <a:off x="914400" y="3520440"/>
+            <a:ext cx="8503920" cy="621792"/>
           </a:xfrm>
           <a:prstGeom prst="rect">
             <a:avLst/>
@@ -14136,14 +13844,14 @@
           <a:ln/>
         </p:spPr>
         <p:txBody>
-          <a:bodyPr wrap="square" rtlCol="0" anchor="t"/>
-          <a:lstStyle/>
-          <a:p>
-            <a:pPr indent="0" marL="0">
-              <a:buNone/>
-            </a:pPr>
-            <a:r>
-              <a:rPr lang="en-US" sz="1450" b="1" dirty="0">
+          <a:bodyPr wrap="square" rtlCol="0" anchor="ctr"/>
+          <a:lstStyle/>
+          <a:p>
+            <a:pPr indent="0" marL="0">
+              <a:buNone/>
+            </a:pPr>
+            <a:r>
+              <a:rPr lang="en-US" sz="1250" b="1" dirty="0">
                 <a:solidFill>
                   <a:srgbClr val="0F172A"/>
                 </a:solidFill>
@@ -14151,32 +13859,52 @@
                 <a:ea typeface="Segoe UI" pitchFamily="34" charset="-122"/>
                 <a:cs typeface="Segoe UI" pitchFamily="34" charset="-120"/>
               </a:rPr>
-              <a:t>3. Platform Analytics &amp; Synthetic Audience
-</a:t>
-            </a:r>
-            <a:pPr indent="0" marL="0">
-              <a:lnSpc>
-                <a:spcPct val="115000"/>
-              </a:lnSpc>
+              <a:t>Sprint 3: </a:t>
+            </a:r>
+            <a:pPr indent="0" marL="0">
               <a:buNone/>
             </a:pPr>
             <a:r>
               <a:rPr lang="en-US" sz="1200" dirty="0">
                 <a:solidFill>
-                  <a:srgbClr val="64748B"/>
-                </a:solidFill>
-                <a:latin typeface="Segoe UI" pitchFamily="34" charset="0"/>
-                <a:ea typeface="Segoe UI" pitchFamily="34" charset="-122"/>
-                <a:cs typeface="Segoe UI" pitchFamily="34" charset="-120"/>
-              </a:rPr>
-              <a:t>Viewer retention heatmaps, drop-off prediction curves, and cross-platform publishing analytics (TikTok / Shorts / Reels).
-</a:t>
-            </a:r>
-            <a:pPr indent="0" marL="0">
-              <a:buNone/>
-            </a:pPr>
-            <a:r>
-              <a:rPr lang="en-US" sz="1050" b="1" dirty="0">
+                  <a:srgbClr val="334155"/>
+                </a:solidFill>
+                <a:latin typeface="Segoe UI" pitchFamily="34" charset="0"/>
+                <a:ea typeface="Segoe UI" pitchFamily="34" charset="-122"/>
+                <a:cs typeface="Segoe UI" pitchFamily="34" charset="-120"/>
+              </a:rPr>
+              <a:t>OpenVideo Pixi.js WebGL Editor, Undo/Redo Commands, Dual-Render Parity.</a:t>
+            </a:r>
+            <a:endParaRPr lang="en-US" sz="1250" dirty="0"/>
+          </a:p>
+        </p:txBody>
+      </p:sp>
+      <p:sp>
+        <p:nvSpPr>
+          <p:cNvPr id="18" name="Text 16"/>
+          <p:cNvSpPr/>
+          <p:nvPr/>
+        </p:nvSpPr>
+        <p:spPr>
+          <a:xfrm>
+            <a:off x="9509760" y="3520440"/>
+            <a:ext cx="1737360" cy="621792"/>
+          </a:xfrm>
+          <a:prstGeom prst="rect">
+            <a:avLst/>
+          </a:prstGeom>
+          <a:noFill/>
+          <a:ln/>
+        </p:spPr>
+        <p:txBody>
+          <a:bodyPr wrap="square" rtlCol="0" anchor="ctr"/>
+          <a:lstStyle/>
+          <a:p>
+            <a:pPr algn="r" indent="0" marL="0">
+              <a:buNone/>
+            </a:pPr>
+            <a:r>
+              <a:rPr lang="en-US" sz="1100" b="1" dirty="0">
                 <a:solidFill>
                   <a:srgbClr val="0F172A"/>
                 </a:solidFill>
@@ -14184,26 +13912,26 @@
                 <a:ea typeface="Courier New" pitchFamily="34" charset="-122"/>
                 <a:cs typeface="Courier New" pitchFamily="34" charset="-120"/>
               </a:rPr>
-              <a:t>[Phase 3: Platform Analytics &amp; Audience Simulator]</a:t>
-            </a:r>
-            <a:endParaRPr lang="en-US" sz="1450" dirty="0"/>
-          </a:p>
-        </p:txBody>
-      </p:sp>
-      <p:sp>
-        <p:nvSpPr>
-          <p:cNvPr id="16" name="Shape 14"/>
-          <p:cNvSpPr/>
-          <p:nvPr/>
-        </p:nvSpPr>
-        <p:spPr>
-          <a:xfrm>
-            <a:off x="6217920" y="4114800"/>
-            <a:ext cx="5212080" cy="1783080"/>
+              <a:t>[v0.5 NLE Beta]</a:t>
+            </a:r>
+            <a:endParaRPr lang="en-US" sz="1100" dirty="0"/>
+          </a:p>
+        </p:txBody>
+      </p:sp>
+      <p:sp>
+        <p:nvSpPr>
+          <p:cNvPr id="19" name="Shape 17"/>
+          <p:cNvSpPr/>
+          <p:nvPr/>
+        </p:nvSpPr>
+        <p:spPr>
+          <a:xfrm>
+            <a:off x="731520" y="4206240"/>
+            <a:ext cx="10698480" cy="621792"/>
           </a:xfrm>
           <a:prstGeom prst="roundRect">
             <a:avLst>
-              <a:gd name="adj" fmla="val 5128"/>
+              <a:gd name="adj" fmla="val 11765"/>
             </a:avLst>
           </a:prstGeom>
           <a:solidFill>
@@ -14219,14 +13947,14 @@
       </p:sp>
       <p:sp>
         <p:nvSpPr>
-          <p:cNvPr id="17" name="Text 15"/>
-          <p:cNvSpPr/>
-          <p:nvPr/>
-        </p:nvSpPr>
-        <p:spPr>
-          <a:xfrm>
-            <a:off x="6446520" y="4279392"/>
-            <a:ext cx="4754880" cy="1508760"/>
+          <p:cNvPr id="20" name="Text 18"/>
+          <p:cNvSpPr/>
+          <p:nvPr/>
+        </p:nvSpPr>
+        <p:spPr>
+          <a:xfrm>
+            <a:off x="914400" y="4206240"/>
+            <a:ext cx="8503920" cy="621792"/>
           </a:xfrm>
           <a:prstGeom prst="rect">
             <a:avLst/>
@@ -14235,14 +13963,14 @@
           <a:ln/>
         </p:spPr>
         <p:txBody>
-          <a:bodyPr wrap="square" rtlCol="0" anchor="t"/>
-          <a:lstStyle/>
-          <a:p>
-            <a:pPr indent="0" marL="0">
-              <a:buNone/>
-            </a:pPr>
-            <a:r>
-              <a:rPr lang="en-US" sz="1450" b="1" dirty="0">
+          <a:bodyPr wrap="square" rtlCol="0" anchor="ctr"/>
+          <a:lstStyle/>
+          <a:p>
+            <a:pPr indent="0" marL="0">
+              <a:buNone/>
+            </a:pPr>
+            <a:r>
+              <a:rPr lang="en-US" sz="1250" b="1" dirty="0">
                 <a:solidFill>
                   <a:srgbClr val="0F172A"/>
                 </a:solidFill>
@@ -14250,32 +13978,52 @@
                 <a:ea typeface="Segoe UI" pitchFamily="34" charset="-122"/>
                 <a:cs typeface="Segoe UI" pitchFamily="34" charset="-120"/>
               </a:rPr>
-              <a:t>4. Live Interactive Drama &amp; Marketplace
-</a:t>
-            </a:r>
-            <a:pPr indent="0" marL="0">
-              <a:lnSpc>
-                <a:spcPct val="115000"/>
-              </a:lnSpc>
+              <a:t>Sprint 4: </a:t>
+            </a:r>
+            <a:pPr indent="0" marL="0">
               <a:buNone/>
             </a:pPr>
             <a:r>
               <a:rPr lang="en-US" sz="1200" dirty="0">
                 <a:solidFill>
-                  <a:srgbClr val="64748B"/>
-                </a:solidFill>
-                <a:latin typeface="Segoe UI" pitchFamily="34" charset="0"/>
-                <a:ea typeface="Segoe UI" pitchFamily="34" charset="-122"/>
-                <a:cs typeface="Segoe UI" pitchFamily="34" charset="-120"/>
-              </a:rPr>
-              <a:t>Branching narrative trees (@antv/g6) for live voting + AI character asset trading marketplace.
-</a:t>
-            </a:r>
-            <a:pPr indent="0" marL="0">
-              <a:buNone/>
-            </a:pPr>
-            <a:r>
-              <a:rPr lang="en-US" sz="1050" b="1" dirty="0">
+                  <a:srgbClr val="334155"/>
+                </a:solidFill>
+                <a:latin typeface="Segoe UI" pitchFamily="34" charset="0"/>
+                <a:ea typeface="Segoe UI" pitchFamily="34" charset="-122"/>
+                <a:cs typeface="Segoe UI" pitchFamily="34" charset="-120"/>
+              </a:rPr>
+              <a:t>Neural Voiceover, Kinetic Subtitles, Cliffhanger Engine, Meta Demucs v4.</a:t>
+            </a:r>
+            <a:endParaRPr lang="en-US" sz="1250" dirty="0"/>
+          </a:p>
+        </p:txBody>
+      </p:sp>
+      <p:sp>
+        <p:nvSpPr>
+          <p:cNvPr id="21" name="Text 19"/>
+          <p:cNvSpPr/>
+          <p:nvPr/>
+        </p:nvSpPr>
+        <p:spPr>
+          <a:xfrm>
+            <a:off x="9509760" y="4206240"/>
+            <a:ext cx="1737360" cy="621792"/>
+          </a:xfrm>
+          <a:prstGeom prst="rect">
+            <a:avLst/>
+          </a:prstGeom>
+          <a:noFill/>
+          <a:ln/>
+        </p:spPr>
+        <p:txBody>
+          <a:bodyPr wrap="square" rtlCol="0" anchor="ctr"/>
+          <a:lstStyle/>
+          <a:p>
+            <a:pPr algn="r" indent="0" marL="0">
+              <a:buNone/>
+            </a:pPr>
+            <a:r>
+              <a:rPr lang="en-US" sz="1100" b="1" dirty="0">
                 <a:solidFill>
                   <a:srgbClr val="0F172A"/>
                 </a:solidFill>
@@ -14283,9 +14031,247 @@
                 <a:ea typeface="Courier New" pitchFamily="34" charset="-122"/>
                 <a:cs typeface="Courier New" pitchFamily="34" charset="-120"/>
               </a:rPr>
-              <a:t>[Phase 3: Branching Drama &amp; Character Hub]</a:t>
-            </a:r>
-            <a:endParaRPr lang="en-US" sz="1450" dirty="0"/>
+              <a:t>[v0.8 RC1]</a:t>
+            </a:r>
+            <a:endParaRPr lang="en-US" sz="1100" dirty="0"/>
+          </a:p>
+        </p:txBody>
+      </p:sp>
+      <p:sp>
+        <p:nvSpPr>
+          <p:cNvPr id="22" name="Shape 20"/>
+          <p:cNvSpPr/>
+          <p:nvPr/>
+        </p:nvSpPr>
+        <p:spPr>
+          <a:xfrm>
+            <a:off x="731520" y="4892040"/>
+            <a:ext cx="10698480" cy="621792"/>
+          </a:xfrm>
+          <a:prstGeom prst="roundRect">
+            <a:avLst>
+              <a:gd name="adj" fmla="val 11765"/>
+            </a:avLst>
+          </a:prstGeom>
+          <a:solidFill>
+            <a:srgbClr val="FFFFFF"/>
+          </a:solidFill>
+          <a:ln w="12700">
+            <a:solidFill>
+              <a:srgbClr val="E2E8F0"/>
+            </a:solidFill>
+            <a:prstDash val="solid"/>
+          </a:ln>
+        </p:spPr>
+      </p:sp>
+      <p:sp>
+        <p:nvSpPr>
+          <p:cNvPr id="23" name="Text 21"/>
+          <p:cNvSpPr/>
+          <p:nvPr/>
+        </p:nvSpPr>
+        <p:spPr>
+          <a:xfrm>
+            <a:off x="914400" y="4892040"/>
+            <a:ext cx="8503920" cy="621792"/>
+          </a:xfrm>
+          <a:prstGeom prst="rect">
+            <a:avLst/>
+          </a:prstGeom>
+          <a:noFill/>
+          <a:ln/>
+        </p:spPr>
+        <p:txBody>
+          <a:bodyPr wrap="square" rtlCol="0" anchor="ctr"/>
+          <a:lstStyle/>
+          <a:p>
+            <a:pPr indent="0" marL="0">
+              <a:buNone/>
+            </a:pPr>
+            <a:r>
+              <a:rPr lang="en-US" sz="1250" b="1" dirty="0">
+                <a:solidFill>
+                  <a:srgbClr val="0F172A"/>
+                </a:solidFill>
+                <a:latin typeface="Segoe UI" pitchFamily="34" charset="0"/>
+                <a:ea typeface="Segoe UI" pitchFamily="34" charset="-122"/>
+                <a:cs typeface="Segoe UI" pitchFamily="34" charset="-120"/>
+              </a:rPr>
+              <a:t>Sprint 5: </a:t>
+            </a:r>
+            <a:pPr indent="0" marL="0">
+              <a:buNone/>
+            </a:pPr>
+            <a:r>
+              <a:rPr lang="en-US" sz="1200" dirty="0">
+                <a:solidFill>
+                  <a:srgbClr val="334155"/>
+                </a:solidFill>
+                <a:latin typeface="Segoe UI" pitchFamily="34" charset="0"/>
+                <a:ea typeface="Segoe UI" pitchFamily="34" charset="-122"/>
+                <a:cs typeface="Segoe UI" pitchFamily="34" charset="-120"/>
+              </a:rPr>
+              <a:t>WebSocket Delta Sync Architecture, Quality Linter &amp; i18n Key Parity.</a:t>
+            </a:r>
+            <a:endParaRPr lang="en-US" sz="1250" dirty="0"/>
+          </a:p>
+        </p:txBody>
+      </p:sp>
+      <p:sp>
+        <p:nvSpPr>
+          <p:cNvPr id="24" name="Text 22"/>
+          <p:cNvSpPr/>
+          <p:nvPr/>
+        </p:nvSpPr>
+        <p:spPr>
+          <a:xfrm>
+            <a:off x="9509760" y="4892040"/>
+            <a:ext cx="1737360" cy="621792"/>
+          </a:xfrm>
+          <a:prstGeom prst="rect">
+            <a:avLst/>
+          </a:prstGeom>
+          <a:noFill/>
+          <a:ln/>
+        </p:spPr>
+        <p:txBody>
+          <a:bodyPr wrap="square" rtlCol="0" anchor="ctr"/>
+          <a:lstStyle/>
+          <a:p>
+            <a:pPr algn="r" indent="0" marL="0">
+              <a:buNone/>
+            </a:pPr>
+            <a:r>
+              <a:rPr lang="en-US" sz="1100" b="1" dirty="0">
+                <a:solidFill>
+                  <a:srgbClr val="0F172A"/>
+                </a:solidFill>
+                <a:latin typeface="Courier New" pitchFamily="34" charset="0"/>
+                <a:ea typeface="Courier New" pitchFamily="34" charset="-122"/>
+                <a:cs typeface="Courier New" pitchFamily="34" charset="-120"/>
+              </a:rPr>
+              <a:t>[v0.9 RC2]</a:t>
+            </a:r>
+            <a:endParaRPr lang="en-US" sz="1100" dirty="0"/>
+          </a:p>
+        </p:txBody>
+      </p:sp>
+      <p:sp>
+        <p:nvSpPr>
+          <p:cNvPr id="25" name="Shape 23"/>
+          <p:cNvSpPr/>
+          <p:nvPr/>
+        </p:nvSpPr>
+        <p:spPr>
+          <a:xfrm>
+            <a:off x="731520" y="5577840"/>
+            <a:ext cx="10698480" cy="621792"/>
+          </a:xfrm>
+          <a:prstGeom prst="roundRect">
+            <a:avLst>
+              <a:gd name="adj" fmla="val 11765"/>
+            </a:avLst>
+          </a:prstGeom>
+          <a:solidFill>
+            <a:srgbClr val="FFFFFF"/>
+          </a:solidFill>
+          <a:ln w="12700">
+            <a:solidFill>
+              <a:srgbClr val="E2E8F0"/>
+            </a:solidFill>
+            <a:prstDash val="solid"/>
+          </a:ln>
+        </p:spPr>
+      </p:sp>
+      <p:sp>
+        <p:nvSpPr>
+          <p:cNvPr id="26" name="Text 24"/>
+          <p:cNvSpPr/>
+          <p:nvPr/>
+        </p:nvSpPr>
+        <p:spPr>
+          <a:xfrm>
+            <a:off x="914400" y="5577840"/>
+            <a:ext cx="8503920" cy="621792"/>
+          </a:xfrm>
+          <a:prstGeom prst="rect">
+            <a:avLst/>
+          </a:prstGeom>
+          <a:noFill/>
+          <a:ln/>
+        </p:spPr>
+        <p:txBody>
+          <a:bodyPr wrap="square" rtlCol="0" anchor="ctr"/>
+          <a:lstStyle/>
+          <a:p>
+            <a:pPr indent="0" marL="0">
+              <a:buNone/>
+            </a:pPr>
+            <a:r>
+              <a:rPr lang="en-US" sz="1250" b="1" dirty="0">
+                <a:solidFill>
+                  <a:srgbClr val="0F172A"/>
+                </a:solidFill>
+                <a:latin typeface="Segoe UI" pitchFamily="34" charset="0"/>
+                <a:ea typeface="Segoe UI" pitchFamily="34" charset="-122"/>
+                <a:cs typeface="Segoe UI" pitchFamily="34" charset="-120"/>
+              </a:rPr>
+              <a:t>Sprint 6 &amp; 7: </a:t>
+            </a:r>
+            <a:pPr indent="0" marL="0">
+              <a:buNone/>
+            </a:pPr>
+            <a:r>
+              <a:rPr lang="en-US" sz="1200" dirty="0">
+                <a:solidFill>
+                  <a:srgbClr val="334155"/>
+                </a:solidFill>
+                <a:latin typeface="Segoe UI" pitchFamily="34" charset="0"/>
+                <a:ea typeface="Segoe UI" pitchFamily="34" charset="-122"/>
+                <a:cs typeface="Segoe UI" pitchFamily="34" charset="-120"/>
+              </a:rPr>
+              <a:t>Multi-Platform Publishing, Grafana MCP Observability &amp; Playwright E2E Suite.</a:t>
+            </a:r>
+            <a:endParaRPr lang="en-US" sz="1250" dirty="0"/>
+          </a:p>
+        </p:txBody>
+      </p:sp>
+      <p:sp>
+        <p:nvSpPr>
+          <p:cNvPr id="27" name="Text 25"/>
+          <p:cNvSpPr/>
+          <p:nvPr/>
+        </p:nvSpPr>
+        <p:spPr>
+          <a:xfrm>
+            <a:off x="9509760" y="5577840"/>
+            <a:ext cx="1737360" cy="621792"/>
+          </a:xfrm>
+          <a:prstGeom prst="rect">
+            <a:avLst/>
+          </a:prstGeom>
+          <a:noFill/>
+          <a:ln/>
+        </p:spPr>
+        <p:txBody>
+          <a:bodyPr wrap="square" rtlCol="0" anchor="ctr"/>
+          <a:lstStyle/>
+          <a:p>
+            <a:pPr algn="r" indent="0" marL="0">
+              <a:buNone/>
+            </a:pPr>
+            <a:r>
+              <a:rPr lang="en-US" sz="1100" b="1" dirty="0">
+                <a:solidFill>
+                  <a:srgbClr val="0F172A"/>
+                </a:solidFill>
+                <a:latin typeface="Courier New" pitchFamily="34" charset="0"/>
+                <a:ea typeface="Courier New" pitchFamily="34" charset="-122"/>
+                <a:cs typeface="Courier New" pitchFamily="34" charset="-120"/>
+              </a:rPr>
+              <a:t>[v1.1 Commercial]</a:t>
+            </a:r>
+            <a:endParaRPr lang="en-US" sz="1100" dirty="0"/>
           </a:p>
         </p:txBody>
       </p:sp>
@@ -14500,7 +14486,7 @@
                 <a:ea typeface="Courier New" pitchFamily="34" charset="-122"/>
                 <a:cs typeface="Courier New" pitchFamily="34" charset="-120"/>
               </a:rPr>
-              <a:t>21 / 23</a:t>
+              <a:t>21 / 24</a:t>
             </a:r>
             <a:endParaRPr lang="en-US" sz="1100" dirty="0"/>
           </a:p>
@@ -14558,13 +14544,13 @@
             <a:r>
               <a:rPr lang="en-US" sz="1100" b="1" dirty="0">
                 <a:solidFill>
-                  <a:srgbClr val="64748B"/>
+                  <a:srgbClr val="D97706"/>
                 </a:solidFill>
                 <a:latin typeface="Courier New" pitchFamily="34" charset="0"/>
                 <a:ea typeface="Courier New" pitchFamily="34" charset="-122"/>
                 <a:cs typeface="Courier New" pitchFamily="34" charset="-120"/>
               </a:rPr>
-              <a:t>COST ARCHITECTURE</a:t>
+              <a:t>FUTURE PLANNING (PHASE 2 &amp; 3 ROADMAP)</a:t>
             </a:r>
             <a:endParaRPr lang="en-US" sz="1100" dirty="0"/>
           </a:p>
@@ -14603,6 +14589,722 @@
                 <a:ea typeface="Segoe UI" pitchFamily="34" charset="-122"/>
                 <a:cs typeface="Segoe UI" pitchFamily="34" charset="-120"/>
               </a:rPr>
+              <a:t>Planned Roadmap Innovations</a:t>
+            </a:r>
+            <a:endParaRPr lang="en-US" sz="2600" dirty="0"/>
+          </a:p>
+        </p:txBody>
+      </p:sp>
+      <p:sp>
+        <p:nvSpPr>
+          <p:cNvPr id="10" name="Shape 8"/>
+          <p:cNvSpPr/>
+          <p:nvPr/>
+        </p:nvSpPr>
+        <p:spPr>
+          <a:xfrm>
+            <a:off x="731520" y="2148840"/>
+            <a:ext cx="5212080" cy="1783080"/>
+          </a:xfrm>
+          <a:prstGeom prst="roundRect">
+            <a:avLst>
+              <a:gd name="adj" fmla="val 5128"/>
+            </a:avLst>
+          </a:prstGeom>
+          <a:solidFill>
+            <a:srgbClr val="FFFFFF"/>
+          </a:solidFill>
+          <a:ln w="12700">
+            <a:solidFill>
+              <a:srgbClr val="E2E8F0"/>
+            </a:solidFill>
+            <a:prstDash val="solid"/>
+          </a:ln>
+        </p:spPr>
+      </p:sp>
+      <p:sp>
+        <p:nvSpPr>
+          <p:cNvPr id="11" name="Text 9"/>
+          <p:cNvSpPr/>
+          <p:nvPr/>
+        </p:nvSpPr>
+        <p:spPr>
+          <a:xfrm>
+            <a:off x="960120" y="2313432"/>
+            <a:ext cx="4754880" cy="1508760"/>
+          </a:xfrm>
+          <a:prstGeom prst="rect">
+            <a:avLst/>
+          </a:prstGeom>
+          <a:noFill/>
+          <a:ln/>
+        </p:spPr>
+        <p:txBody>
+          <a:bodyPr wrap="square" rtlCol="0" anchor="t"/>
+          <a:lstStyle/>
+          <a:p>
+            <a:pPr indent="0" marL="0">
+              <a:buNone/>
+            </a:pPr>
+            <a:r>
+              <a:rPr lang="en-US" sz="1450" b="1" dirty="0">
+                <a:solidFill>
+                  <a:srgbClr val="0F172A"/>
+                </a:solidFill>
+                <a:latin typeface="Segoe UI" pitchFamily="34" charset="0"/>
+                <a:ea typeface="Segoe UI" pitchFamily="34" charset="-122"/>
+                <a:cs typeface="Segoe UI" pitchFamily="34" charset="-120"/>
+              </a:rPr>
+              <a:t>1. Real-Time Multi-User Co-Editing
+</a:t>
+            </a:r>
+            <a:pPr indent="0" marL="0">
+              <a:lnSpc>
+                <a:spcPct val="115000"/>
+              </a:lnSpc>
+              <a:buNone/>
+            </a:pPr>
+            <a:r>
+              <a:rPr lang="en-US" sz="1200" dirty="0">
+                <a:solidFill>
+                  <a:srgbClr val="64748B"/>
+                </a:solidFill>
+                <a:latin typeface="Segoe UI" pitchFamily="34" charset="0"/>
+                <a:ea typeface="Segoe UI" pitchFamily="34" charset="-122"/>
+                <a:cs typeface="Segoe UI" pitchFamily="34" charset="-120"/>
+              </a:rPr>
+              <a:t>Full client integration of the Socket.io RFC 6902 JSON Pointer delta patch engine for live collaborative timeline editing.
+</a:t>
+            </a:r>
+            <a:pPr indent="0" marL="0">
+              <a:buNone/>
+            </a:pPr>
+            <a:r>
+              <a:rPr lang="en-US" sz="1050" b="1" dirty="0">
+                <a:solidFill>
+                  <a:srgbClr val="0F172A"/>
+                </a:solidFill>
+                <a:latin typeface="Courier New" pitchFamily="34" charset="0"/>
+                <a:ea typeface="Courier New" pitchFamily="34" charset="-122"/>
+                <a:cs typeface="Courier New" pitchFamily="34" charset="-120"/>
+              </a:rPr>
+              <a:t>[Phase 2: Live Team Collaboration]</a:t>
+            </a:r>
+            <a:endParaRPr lang="en-US" sz="1450" dirty="0"/>
+          </a:p>
+        </p:txBody>
+      </p:sp>
+      <p:sp>
+        <p:nvSpPr>
+          <p:cNvPr id="12" name="Shape 10"/>
+          <p:cNvSpPr/>
+          <p:nvPr/>
+        </p:nvSpPr>
+        <p:spPr>
+          <a:xfrm>
+            <a:off x="6217920" y="2148840"/>
+            <a:ext cx="5212080" cy="1783080"/>
+          </a:xfrm>
+          <a:prstGeom prst="roundRect">
+            <a:avLst>
+              <a:gd name="adj" fmla="val 5128"/>
+            </a:avLst>
+          </a:prstGeom>
+          <a:solidFill>
+            <a:srgbClr val="FFFFFF"/>
+          </a:solidFill>
+          <a:ln w="12700">
+            <a:solidFill>
+              <a:srgbClr val="E2E8F0"/>
+            </a:solidFill>
+            <a:prstDash val="solid"/>
+          </a:ln>
+        </p:spPr>
+      </p:sp>
+      <p:sp>
+        <p:nvSpPr>
+          <p:cNvPr id="13" name="Text 11"/>
+          <p:cNvSpPr/>
+          <p:nvPr/>
+        </p:nvSpPr>
+        <p:spPr>
+          <a:xfrm>
+            <a:off x="6446520" y="2313432"/>
+            <a:ext cx="4754880" cy="1508760"/>
+          </a:xfrm>
+          <a:prstGeom prst="rect">
+            <a:avLst/>
+          </a:prstGeom>
+          <a:noFill/>
+          <a:ln/>
+        </p:spPr>
+        <p:txBody>
+          <a:bodyPr wrap="square" rtlCol="0" anchor="t"/>
+          <a:lstStyle/>
+          <a:p>
+            <a:pPr indent="0" marL="0">
+              <a:buNone/>
+            </a:pPr>
+            <a:r>
+              <a:rPr lang="en-US" sz="1450" b="1" dirty="0">
+                <a:solidFill>
+                  <a:srgbClr val="0F172A"/>
+                </a:solidFill>
+                <a:latin typeface="Segoe UI" pitchFamily="34" charset="0"/>
+                <a:ea typeface="Segoe UI" pitchFamily="34" charset="-122"/>
+                <a:cs typeface="Segoe UI" pitchFamily="34" charset="-120"/>
+              </a:rPr>
+              <a:t>2. Distributed Batch Render Queue
+</a:t>
+            </a:r>
+            <a:pPr indent="0" marL="0">
+              <a:lnSpc>
+                <a:spcPct val="115000"/>
+              </a:lnSpc>
+              <a:buNone/>
+            </a:pPr>
+            <a:r>
+              <a:rPr lang="en-US" sz="1200" dirty="0">
+                <a:solidFill>
+                  <a:srgbClr val="64748B"/>
+                </a:solidFill>
+                <a:latin typeface="Segoe UI" pitchFamily="34" charset="0"/>
+                <a:ea typeface="Segoe UI" pitchFamily="34" charset="-122"/>
+                <a:cs typeface="Segoe UI" pitchFamily="34" charset="-120"/>
+              </a:rPr>
+              <a:t>Automated multi-episode batch queueing across a pool of parallel Cloud Run Playwright worker nodes via Cloud Pub/Sub.
+</a:t>
+            </a:r>
+            <a:pPr indent="0" marL="0">
+              <a:buNone/>
+            </a:pPr>
+            <a:r>
+              <a:rPr lang="en-US" sz="1050" b="1" dirty="0">
+                <a:solidFill>
+                  <a:srgbClr val="0F172A"/>
+                </a:solidFill>
+                <a:latin typeface="Courier New" pitchFamily="34" charset="0"/>
+                <a:ea typeface="Courier New" pitchFamily="34" charset="-122"/>
+                <a:cs typeface="Courier New" pitchFamily="34" charset="-120"/>
+              </a:rPr>
+              <a:t>[Phase 2: Automated 50-Episode Batch Queue]</a:t>
+            </a:r>
+            <a:endParaRPr lang="en-US" sz="1450" dirty="0"/>
+          </a:p>
+        </p:txBody>
+      </p:sp>
+      <p:sp>
+        <p:nvSpPr>
+          <p:cNvPr id="14" name="Shape 12"/>
+          <p:cNvSpPr/>
+          <p:nvPr/>
+        </p:nvSpPr>
+        <p:spPr>
+          <a:xfrm>
+            <a:off x="731520" y="4114800"/>
+            <a:ext cx="5212080" cy="1783080"/>
+          </a:xfrm>
+          <a:prstGeom prst="roundRect">
+            <a:avLst>
+              <a:gd name="adj" fmla="val 5128"/>
+            </a:avLst>
+          </a:prstGeom>
+          <a:solidFill>
+            <a:srgbClr val="FFFFFF"/>
+          </a:solidFill>
+          <a:ln w="12700">
+            <a:solidFill>
+              <a:srgbClr val="E2E8F0"/>
+            </a:solidFill>
+            <a:prstDash val="solid"/>
+          </a:ln>
+        </p:spPr>
+      </p:sp>
+      <p:sp>
+        <p:nvSpPr>
+          <p:cNvPr id="15" name="Text 13"/>
+          <p:cNvSpPr/>
+          <p:nvPr/>
+        </p:nvSpPr>
+        <p:spPr>
+          <a:xfrm>
+            <a:off x="960120" y="4279392"/>
+            <a:ext cx="4754880" cy="1508760"/>
+          </a:xfrm>
+          <a:prstGeom prst="rect">
+            <a:avLst/>
+          </a:prstGeom>
+          <a:noFill/>
+          <a:ln/>
+        </p:spPr>
+        <p:txBody>
+          <a:bodyPr wrap="square" rtlCol="0" anchor="t"/>
+          <a:lstStyle/>
+          <a:p>
+            <a:pPr indent="0" marL="0">
+              <a:buNone/>
+            </a:pPr>
+            <a:r>
+              <a:rPr lang="en-US" sz="1450" b="1" dirty="0">
+                <a:solidFill>
+                  <a:srgbClr val="0F172A"/>
+                </a:solidFill>
+                <a:latin typeface="Segoe UI" pitchFamily="34" charset="0"/>
+                <a:ea typeface="Segoe UI" pitchFamily="34" charset="-122"/>
+                <a:cs typeface="Segoe UI" pitchFamily="34" charset="-120"/>
+              </a:rPr>
+              <a:t>3. Platform Analytics &amp; Synthetic Audience
+</a:t>
+            </a:r>
+            <a:pPr indent="0" marL="0">
+              <a:lnSpc>
+                <a:spcPct val="115000"/>
+              </a:lnSpc>
+              <a:buNone/>
+            </a:pPr>
+            <a:r>
+              <a:rPr lang="en-US" sz="1200" dirty="0">
+                <a:solidFill>
+                  <a:srgbClr val="64748B"/>
+                </a:solidFill>
+                <a:latin typeface="Segoe UI" pitchFamily="34" charset="0"/>
+                <a:ea typeface="Segoe UI" pitchFamily="34" charset="-122"/>
+                <a:cs typeface="Segoe UI" pitchFamily="34" charset="-120"/>
+              </a:rPr>
+              <a:t>Viewer retention heatmaps, drop-off prediction curves, and cross-platform publishing analytics (TikTok / Shorts / Reels).
+</a:t>
+            </a:r>
+            <a:pPr indent="0" marL="0">
+              <a:buNone/>
+            </a:pPr>
+            <a:r>
+              <a:rPr lang="en-US" sz="1050" b="1" dirty="0">
+                <a:solidFill>
+                  <a:srgbClr val="0F172A"/>
+                </a:solidFill>
+                <a:latin typeface="Courier New" pitchFamily="34" charset="0"/>
+                <a:ea typeface="Courier New" pitchFamily="34" charset="-122"/>
+                <a:cs typeface="Courier New" pitchFamily="34" charset="-120"/>
+              </a:rPr>
+              <a:t>[Phase 3: Platform Analytics &amp; Audience Simulator]</a:t>
+            </a:r>
+            <a:endParaRPr lang="en-US" sz="1450" dirty="0"/>
+          </a:p>
+        </p:txBody>
+      </p:sp>
+      <p:sp>
+        <p:nvSpPr>
+          <p:cNvPr id="16" name="Shape 14"/>
+          <p:cNvSpPr/>
+          <p:nvPr/>
+        </p:nvSpPr>
+        <p:spPr>
+          <a:xfrm>
+            <a:off x="6217920" y="4114800"/>
+            <a:ext cx="5212080" cy="1783080"/>
+          </a:xfrm>
+          <a:prstGeom prst="roundRect">
+            <a:avLst>
+              <a:gd name="adj" fmla="val 5128"/>
+            </a:avLst>
+          </a:prstGeom>
+          <a:solidFill>
+            <a:srgbClr val="FFFFFF"/>
+          </a:solidFill>
+          <a:ln w="12700">
+            <a:solidFill>
+              <a:srgbClr val="E2E8F0"/>
+            </a:solidFill>
+            <a:prstDash val="solid"/>
+          </a:ln>
+        </p:spPr>
+      </p:sp>
+      <p:sp>
+        <p:nvSpPr>
+          <p:cNvPr id="17" name="Text 15"/>
+          <p:cNvSpPr/>
+          <p:nvPr/>
+        </p:nvSpPr>
+        <p:spPr>
+          <a:xfrm>
+            <a:off x="6446520" y="4279392"/>
+            <a:ext cx="4754880" cy="1508760"/>
+          </a:xfrm>
+          <a:prstGeom prst="rect">
+            <a:avLst/>
+          </a:prstGeom>
+          <a:noFill/>
+          <a:ln/>
+        </p:spPr>
+        <p:txBody>
+          <a:bodyPr wrap="square" rtlCol="0" anchor="t"/>
+          <a:lstStyle/>
+          <a:p>
+            <a:pPr indent="0" marL="0">
+              <a:buNone/>
+            </a:pPr>
+            <a:r>
+              <a:rPr lang="en-US" sz="1450" b="1" dirty="0">
+                <a:solidFill>
+                  <a:srgbClr val="0F172A"/>
+                </a:solidFill>
+                <a:latin typeface="Segoe UI" pitchFamily="34" charset="0"/>
+                <a:ea typeface="Segoe UI" pitchFamily="34" charset="-122"/>
+                <a:cs typeface="Segoe UI" pitchFamily="34" charset="-120"/>
+              </a:rPr>
+              <a:t>4. Live Interactive Drama &amp; Marketplace
+</a:t>
+            </a:r>
+            <a:pPr indent="0" marL="0">
+              <a:lnSpc>
+                <a:spcPct val="115000"/>
+              </a:lnSpc>
+              <a:buNone/>
+            </a:pPr>
+            <a:r>
+              <a:rPr lang="en-US" sz="1200" dirty="0">
+                <a:solidFill>
+                  <a:srgbClr val="64748B"/>
+                </a:solidFill>
+                <a:latin typeface="Segoe UI" pitchFamily="34" charset="0"/>
+                <a:ea typeface="Segoe UI" pitchFamily="34" charset="-122"/>
+                <a:cs typeface="Segoe UI" pitchFamily="34" charset="-120"/>
+              </a:rPr>
+              <a:t>Branching narrative trees (@antv/g6) for live voting + AI character asset trading marketplace.
+</a:t>
+            </a:r>
+            <a:pPr indent="0" marL="0">
+              <a:buNone/>
+            </a:pPr>
+            <a:r>
+              <a:rPr lang="en-US" sz="1050" b="1" dirty="0">
+                <a:solidFill>
+                  <a:srgbClr val="0F172A"/>
+                </a:solidFill>
+                <a:latin typeface="Courier New" pitchFamily="34" charset="0"/>
+                <a:ea typeface="Courier New" pitchFamily="34" charset="-122"/>
+                <a:cs typeface="Courier New" pitchFamily="34" charset="-120"/>
+              </a:rPr>
+              <a:t>[Phase 3: Branching Drama &amp; Character Hub]</a:t>
+            </a:r>
+            <a:endParaRPr lang="en-US" sz="1450" dirty="0"/>
+          </a:p>
+        </p:txBody>
+      </p:sp>
+    </p:spTree>
+  </p:cSld>
+  <p:clrMapOvr>
+    <a:masterClrMapping/>
+  </p:clrMapOvr>
+</p:sld>
+</file>
+
+<file path=ppt/slides/slide22.xml><?xml version="1.0" encoding="utf-8"?>
+<p:sld xmlns:a="http://schemas.openxmlformats.org/drawingml/2006/main" xmlns:r="http://schemas.openxmlformats.org/officeDocument/2006/relationships" xmlns:p="http://schemas.openxmlformats.org/presentationml/2006/main">
+  <p:cSld name="Slide 22">
+    <p:bg>
+      <p:bgPr>
+        <a:solidFill>
+          <a:srgbClr val="FCFDFF"/>
+        </a:solidFill>
+      </p:bgPr>
+    </p:bg>
+    <p:spTree>
+      <p:nvGrpSpPr>
+        <p:cNvPr id="1" name=""/>
+        <p:cNvGrpSpPr/>
+        <p:nvPr/>
+      </p:nvGrpSpPr>
+      <p:grpSpPr>
+        <a:xfrm>
+          <a:off x="0" y="0"/>
+          <a:ext cx="0" cy="0"/>
+          <a:chOff x="0" y="0"/>
+          <a:chExt cx="0" cy="0"/>
+        </a:xfrm>
+      </p:grpSpPr>
+      <p:sp>
+        <p:nvSpPr>
+          <p:cNvPr id="2" name="Shape 0"/>
+          <p:cNvSpPr/>
+          <p:nvPr/>
+        </p:nvSpPr>
+        <p:spPr>
+          <a:xfrm>
+            <a:off x="731520" y="365760"/>
+            <a:ext cx="384048" cy="384048"/>
+          </a:xfrm>
+          <a:prstGeom prst="roundRect">
+            <a:avLst>
+              <a:gd name="adj" fmla="val 19048"/>
+            </a:avLst>
+          </a:prstGeom>
+          <a:solidFill>
+            <a:srgbClr val="0F172A"/>
+          </a:solidFill>
+          <a:ln w="12700">
+            <a:solidFill>
+              <a:srgbClr val="0F172A"/>
+            </a:solidFill>
+            <a:prstDash val="solid"/>
+          </a:ln>
+        </p:spPr>
+      </p:sp>
+      <p:sp>
+        <p:nvSpPr>
+          <p:cNvPr id="3" name="Text 1"/>
+          <p:cNvSpPr/>
+          <p:nvPr/>
+        </p:nvSpPr>
+        <p:spPr>
+          <a:xfrm>
+            <a:off x="731520" y="365760"/>
+            <a:ext cx="384048" cy="384048"/>
+          </a:xfrm>
+          <a:prstGeom prst="rect">
+            <a:avLst/>
+          </a:prstGeom>
+          <a:noFill/>
+          <a:ln/>
+        </p:spPr>
+        <p:txBody>
+          <a:bodyPr wrap="square" rtlCol="0" anchor="ctr"/>
+          <a:lstStyle/>
+          <a:p>
+            <a:pPr algn="ctr" indent="0" marL="0">
+              <a:buNone/>
+            </a:pPr>
+            <a:r>
+              <a:rPr lang="en-US" sz="1400" b="1" dirty="0">
+                <a:solidFill>
+                  <a:srgbClr val="FFFFFF"/>
+                </a:solidFill>
+                <a:latin typeface="Segoe UI" pitchFamily="34" charset="0"/>
+                <a:ea typeface="Segoe UI" pitchFamily="34" charset="-122"/>
+                <a:cs typeface="Segoe UI" pitchFamily="34" charset="-120"/>
+              </a:rPr>
+              <a:t>S</a:t>
+            </a:r>
+            <a:endParaRPr lang="en-US" sz="1400" dirty="0"/>
+          </a:p>
+        </p:txBody>
+      </p:sp>
+      <p:sp>
+        <p:nvSpPr>
+          <p:cNvPr id="4" name="Text 2"/>
+          <p:cNvSpPr/>
+          <p:nvPr/>
+        </p:nvSpPr>
+        <p:spPr>
+          <a:xfrm>
+            <a:off x="1234440" y="365760"/>
+            <a:ext cx="7772400" cy="384048"/>
+          </a:xfrm>
+          <a:prstGeom prst="rect">
+            <a:avLst/>
+          </a:prstGeom>
+          <a:noFill/>
+          <a:ln/>
+        </p:spPr>
+        <p:txBody>
+          <a:bodyPr wrap="square" rtlCol="0" anchor="ctr"/>
+          <a:lstStyle/>
+          <a:p>
+            <a:pPr indent="0" marL="0">
+              <a:buNone/>
+            </a:pPr>
+            <a:r>
+              <a:rPr lang="en-US" sz="1200" b="1" dirty="0">
+                <a:solidFill>
+                  <a:srgbClr val="0F172A"/>
+                </a:solidFill>
+                <a:latin typeface="Segoe UI" pitchFamily="34" charset="0"/>
+                <a:ea typeface="Segoe UI" pitchFamily="34" charset="-122"/>
+                <a:cs typeface="Segoe UI" pitchFamily="34" charset="-120"/>
+              </a:rPr>
+              <a:t>SHINE STUDIO  </a:t>
+            </a:r>
+            <a:pPr indent="0" marL="0">
+              <a:buNone/>
+            </a:pPr>
+            <a:r>
+              <a:rPr lang="en-US" sz="1200" dirty="0">
+                <a:solidFill>
+                  <a:srgbClr val="64748B"/>
+                </a:solidFill>
+                <a:latin typeface="Segoe UI" pitchFamily="34" charset="0"/>
+                <a:ea typeface="Segoe UI" pitchFamily="34" charset="-122"/>
+                <a:cs typeface="Segoe UI" pitchFamily="34" charset="-120"/>
+              </a:rPr>
+              <a:t>|  System Architecture &amp; Product Blueprint</a:t>
+            </a:r>
+            <a:endParaRPr lang="en-US" sz="1200" dirty="0"/>
+          </a:p>
+        </p:txBody>
+      </p:sp>
+      <p:sp>
+        <p:nvSpPr>
+          <p:cNvPr id="5" name="Shape 3"/>
+          <p:cNvSpPr/>
+          <p:nvPr/>
+        </p:nvSpPr>
+        <p:spPr>
+          <a:xfrm>
+            <a:off x="10332720" y="365760"/>
+            <a:ext cx="1097280" cy="384048"/>
+          </a:xfrm>
+          <a:prstGeom prst="roundRect">
+            <a:avLst>
+              <a:gd name="adj" fmla="val 35714"/>
+            </a:avLst>
+          </a:prstGeom>
+          <a:solidFill>
+            <a:srgbClr val="F1F5F9"/>
+          </a:solidFill>
+          <a:ln w="12700">
+            <a:solidFill>
+              <a:srgbClr val="E2E8F0"/>
+            </a:solidFill>
+            <a:prstDash val="solid"/>
+          </a:ln>
+        </p:spPr>
+      </p:sp>
+      <p:sp>
+        <p:nvSpPr>
+          <p:cNvPr id="6" name="Text 4"/>
+          <p:cNvSpPr/>
+          <p:nvPr/>
+        </p:nvSpPr>
+        <p:spPr>
+          <a:xfrm>
+            <a:off x="10332720" y="365760"/>
+            <a:ext cx="1097280" cy="384048"/>
+          </a:xfrm>
+          <a:prstGeom prst="rect">
+            <a:avLst/>
+          </a:prstGeom>
+          <a:noFill/>
+          <a:ln/>
+        </p:spPr>
+        <p:txBody>
+          <a:bodyPr wrap="square" rtlCol="0" anchor="ctr"/>
+          <a:lstStyle/>
+          <a:p>
+            <a:pPr algn="ctr" indent="0" marL="0">
+              <a:buNone/>
+            </a:pPr>
+            <a:r>
+              <a:rPr lang="en-US" sz="1100" b="1" dirty="0">
+                <a:solidFill>
+                  <a:srgbClr val="64748B"/>
+                </a:solidFill>
+                <a:latin typeface="Courier New" pitchFamily="34" charset="0"/>
+                <a:ea typeface="Courier New" pitchFamily="34" charset="-122"/>
+                <a:cs typeface="Courier New" pitchFamily="34" charset="-120"/>
+              </a:rPr>
+              <a:t>22 / 24</a:t>
+            </a:r>
+            <a:endParaRPr lang="en-US" sz="1100" dirty="0"/>
+          </a:p>
+        </p:txBody>
+      </p:sp>
+      <p:sp>
+        <p:nvSpPr>
+          <p:cNvPr id="7" name="Shape 5"/>
+          <p:cNvSpPr/>
+          <p:nvPr/>
+        </p:nvSpPr>
+        <p:spPr>
+          <a:xfrm>
+            <a:off x="731520" y="868680"/>
+            <a:ext cx="10698480" cy="13716"/>
+          </a:xfrm>
+          <a:prstGeom prst="rect">
+            <a:avLst/>
+          </a:prstGeom>
+          <a:solidFill>
+            <a:srgbClr val="E2E8F0"/>
+          </a:solidFill>
+          <a:ln w="12700">
+            <a:solidFill>
+              <a:srgbClr val="E2E8F0"/>
+            </a:solidFill>
+            <a:prstDash val="solid"/>
+          </a:ln>
+        </p:spPr>
+      </p:sp>
+      <p:sp>
+        <p:nvSpPr>
+          <p:cNvPr id="8" name="Text 6"/>
+          <p:cNvSpPr/>
+          <p:nvPr/>
+        </p:nvSpPr>
+        <p:spPr>
+          <a:xfrm>
+            <a:off x="731520" y="1097280"/>
+            <a:ext cx="9144000" cy="320040"/>
+          </a:xfrm>
+          <a:prstGeom prst="rect">
+            <a:avLst/>
+          </a:prstGeom>
+          <a:noFill/>
+          <a:ln/>
+        </p:spPr>
+        <p:txBody>
+          <a:bodyPr wrap="square" rtlCol="0" anchor="ctr"/>
+          <a:lstStyle/>
+          <a:p>
+            <a:pPr indent="0" marL="0">
+              <a:buNone/>
+            </a:pPr>
+            <a:r>
+              <a:rPr lang="en-US" sz="1100" b="1" dirty="0">
+                <a:solidFill>
+                  <a:srgbClr val="64748B"/>
+                </a:solidFill>
+                <a:latin typeface="Courier New" pitchFamily="34" charset="0"/>
+                <a:ea typeface="Courier New" pitchFamily="34" charset="-122"/>
+                <a:cs typeface="Courier New" pitchFamily="34" charset="-120"/>
+              </a:rPr>
+              <a:t>COST ARCHITECTURE</a:t>
+            </a:r>
+            <a:endParaRPr lang="en-US" sz="1100" dirty="0"/>
+          </a:p>
+        </p:txBody>
+      </p:sp>
+      <p:sp>
+        <p:nvSpPr>
+          <p:cNvPr id="9" name="Text 7"/>
+          <p:cNvSpPr/>
+          <p:nvPr/>
+        </p:nvSpPr>
+        <p:spPr>
+          <a:xfrm>
+            <a:off x="731520" y="1417320"/>
+            <a:ext cx="10698480" cy="548640"/>
+          </a:xfrm>
+          <a:prstGeom prst="rect">
+            <a:avLst/>
+          </a:prstGeom>
+          <a:noFill/>
+          <a:ln/>
+        </p:spPr>
+        <p:txBody>
+          <a:bodyPr wrap="square" rtlCol="0" anchor="ctr"/>
+          <a:lstStyle/>
+          <a:p>
+            <a:pPr indent="0" marL="0">
+              <a:buNone/>
+            </a:pPr>
+            <a:r>
+              <a:rPr lang="en-US" sz="2600" b="1" dirty="0">
+                <a:solidFill>
+                  <a:srgbClr val="0F172A"/>
+                </a:solidFill>
+                <a:latin typeface="Segoe UI" pitchFamily="34" charset="0"/>
+                <a:ea typeface="Segoe UI" pitchFamily="34" charset="-122"/>
+                <a:cs typeface="Segoe UI" pitchFamily="34" charset="-120"/>
+              </a:rPr>
               <a:t>Cloud Run Sizing &amp; $0 Idle Cost Model</a:t>
             </a:r>
             <a:endParaRPr lang="en-US" sz="2600" dirty="0"/>
@@ -14611,7 +15313,7 @@
       </p:sp>
       <p:graphicFrame>
         <p:nvGraphicFramePr>
-          <p:cNvPr id="22" name="Table 0"/>
+          <p:cNvPr id="23" name="Table 0"/>
           <p:cNvGraphicFramePr>
             <a:graphicFrameLocks noGrp="1"/>
           </p:cNvGraphicFramePr>
@@ -16084,703 +16786,6 @@
 </p:sld>
 </file>
 
-<file path=ppt/slides/slide22.xml><?xml version="1.0" encoding="utf-8"?>
-<p:sld xmlns:a="http://schemas.openxmlformats.org/drawingml/2006/main" xmlns:r="http://schemas.openxmlformats.org/officeDocument/2006/relationships" xmlns:p="http://schemas.openxmlformats.org/presentationml/2006/main">
-  <p:cSld name="Slide 22">
-    <p:bg>
-      <p:bgPr>
-        <a:solidFill>
-          <a:srgbClr val="FCFDFF"/>
-        </a:solidFill>
-      </p:bgPr>
-    </p:bg>
-    <p:spTree>
-      <p:nvGrpSpPr>
-        <p:cNvPr id="1" name=""/>
-        <p:cNvGrpSpPr/>
-        <p:nvPr/>
-      </p:nvGrpSpPr>
-      <p:grpSpPr>
-        <a:xfrm>
-          <a:off x="0" y="0"/>
-          <a:ext cx="0" cy="0"/>
-          <a:chOff x="0" y="0"/>
-          <a:chExt cx="0" cy="0"/>
-        </a:xfrm>
-      </p:grpSpPr>
-      <p:sp>
-        <p:nvSpPr>
-          <p:cNvPr id="2" name="Shape 0"/>
-          <p:cNvSpPr/>
-          <p:nvPr/>
-        </p:nvSpPr>
-        <p:spPr>
-          <a:xfrm>
-            <a:off x="731520" y="365760"/>
-            <a:ext cx="384048" cy="384048"/>
-          </a:xfrm>
-          <a:prstGeom prst="roundRect">
-            <a:avLst>
-              <a:gd name="adj" fmla="val 19048"/>
-            </a:avLst>
-          </a:prstGeom>
-          <a:solidFill>
-            <a:srgbClr val="0F172A"/>
-          </a:solidFill>
-          <a:ln w="12700">
-            <a:solidFill>
-              <a:srgbClr val="0F172A"/>
-            </a:solidFill>
-            <a:prstDash val="solid"/>
-          </a:ln>
-        </p:spPr>
-      </p:sp>
-      <p:sp>
-        <p:nvSpPr>
-          <p:cNvPr id="3" name="Text 1"/>
-          <p:cNvSpPr/>
-          <p:nvPr/>
-        </p:nvSpPr>
-        <p:spPr>
-          <a:xfrm>
-            <a:off x="731520" y="365760"/>
-            <a:ext cx="384048" cy="384048"/>
-          </a:xfrm>
-          <a:prstGeom prst="rect">
-            <a:avLst/>
-          </a:prstGeom>
-          <a:noFill/>
-          <a:ln/>
-        </p:spPr>
-        <p:txBody>
-          <a:bodyPr wrap="square" rtlCol="0" anchor="ctr"/>
-          <a:lstStyle/>
-          <a:p>
-            <a:pPr algn="ctr" indent="0" marL="0">
-              <a:buNone/>
-            </a:pPr>
-            <a:r>
-              <a:rPr lang="en-US" sz="1400" b="1" dirty="0">
-                <a:solidFill>
-                  <a:srgbClr val="FFFFFF"/>
-                </a:solidFill>
-                <a:latin typeface="Segoe UI" pitchFamily="34" charset="0"/>
-                <a:ea typeface="Segoe UI" pitchFamily="34" charset="-122"/>
-                <a:cs typeface="Segoe UI" pitchFamily="34" charset="-120"/>
-              </a:rPr>
-              <a:t>S</a:t>
-            </a:r>
-            <a:endParaRPr lang="en-US" sz="1400" dirty="0"/>
-          </a:p>
-        </p:txBody>
-      </p:sp>
-      <p:sp>
-        <p:nvSpPr>
-          <p:cNvPr id="4" name="Text 2"/>
-          <p:cNvSpPr/>
-          <p:nvPr/>
-        </p:nvSpPr>
-        <p:spPr>
-          <a:xfrm>
-            <a:off x="1234440" y="365760"/>
-            <a:ext cx="7772400" cy="384048"/>
-          </a:xfrm>
-          <a:prstGeom prst="rect">
-            <a:avLst/>
-          </a:prstGeom>
-          <a:noFill/>
-          <a:ln/>
-        </p:spPr>
-        <p:txBody>
-          <a:bodyPr wrap="square" rtlCol="0" anchor="ctr"/>
-          <a:lstStyle/>
-          <a:p>
-            <a:pPr indent="0" marL="0">
-              <a:buNone/>
-            </a:pPr>
-            <a:r>
-              <a:rPr lang="en-US" sz="1200" b="1" dirty="0">
-                <a:solidFill>
-                  <a:srgbClr val="0F172A"/>
-                </a:solidFill>
-                <a:latin typeface="Segoe UI" pitchFamily="34" charset="0"/>
-                <a:ea typeface="Segoe UI" pitchFamily="34" charset="-122"/>
-                <a:cs typeface="Segoe UI" pitchFamily="34" charset="-120"/>
-              </a:rPr>
-              <a:t>SHINE STUDIO  </a:t>
-            </a:r>
-            <a:pPr indent="0" marL="0">
-              <a:buNone/>
-            </a:pPr>
-            <a:r>
-              <a:rPr lang="en-US" sz="1200" dirty="0">
-                <a:solidFill>
-                  <a:srgbClr val="64748B"/>
-                </a:solidFill>
-                <a:latin typeface="Segoe UI" pitchFamily="34" charset="0"/>
-                <a:ea typeface="Segoe UI" pitchFamily="34" charset="-122"/>
-                <a:cs typeface="Segoe UI" pitchFamily="34" charset="-120"/>
-              </a:rPr>
-              <a:t>|  System Architecture &amp; Product Blueprint</a:t>
-            </a:r>
-            <a:endParaRPr lang="en-US" sz="1200" dirty="0"/>
-          </a:p>
-        </p:txBody>
-      </p:sp>
-      <p:sp>
-        <p:nvSpPr>
-          <p:cNvPr id="5" name="Shape 3"/>
-          <p:cNvSpPr/>
-          <p:nvPr/>
-        </p:nvSpPr>
-        <p:spPr>
-          <a:xfrm>
-            <a:off x="10332720" y="365760"/>
-            <a:ext cx="1097280" cy="384048"/>
-          </a:xfrm>
-          <a:prstGeom prst="roundRect">
-            <a:avLst>
-              <a:gd name="adj" fmla="val 35714"/>
-            </a:avLst>
-          </a:prstGeom>
-          <a:solidFill>
-            <a:srgbClr val="F1F5F9"/>
-          </a:solidFill>
-          <a:ln w="12700">
-            <a:solidFill>
-              <a:srgbClr val="E2E8F0"/>
-            </a:solidFill>
-            <a:prstDash val="solid"/>
-          </a:ln>
-        </p:spPr>
-      </p:sp>
-      <p:sp>
-        <p:nvSpPr>
-          <p:cNvPr id="6" name="Text 4"/>
-          <p:cNvSpPr/>
-          <p:nvPr/>
-        </p:nvSpPr>
-        <p:spPr>
-          <a:xfrm>
-            <a:off x="10332720" y="365760"/>
-            <a:ext cx="1097280" cy="384048"/>
-          </a:xfrm>
-          <a:prstGeom prst="rect">
-            <a:avLst/>
-          </a:prstGeom>
-          <a:noFill/>
-          <a:ln/>
-        </p:spPr>
-        <p:txBody>
-          <a:bodyPr wrap="square" rtlCol="0" anchor="ctr"/>
-          <a:lstStyle/>
-          <a:p>
-            <a:pPr algn="ctr" indent="0" marL="0">
-              <a:buNone/>
-            </a:pPr>
-            <a:r>
-              <a:rPr lang="en-US" sz="1100" b="1" dirty="0">
-                <a:solidFill>
-                  <a:srgbClr val="64748B"/>
-                </a:solidFill>
-                <a:latin typeface="Courier New" pitchFamily="34" charset="0"/>
-                <a:ea typeface="Courier New" pitchFamily="34" charset="-122"/>
-                <a:cs typeface="Courier New" pitchFamily="34" charset="-120"/>
-              </a:rPr>
-              <a:t>22 / 23</a:t>
-            </a:r>
-            <a:endParaRPr lang="en-US" sz="1100" dirty="0"/>
-          </a:p>
-        </p:txBody>
-      </p:sp>
-      <p:sp>
-        <p:nvSpPr>
-          <p:cNvPr id="7" name="Shape 5"/>
-          <p:cNvSpPr/>
-          <p:nvPr/>
-        </p:nvSpPr>
-        <p:spPr>
-          <a:xfrm>
-            <a:off x="731520" y="868680"/>
-            <a:ext cx="10698480" cy="13716"/>
-          </a:xfrm>
-          <a:prstGeom prst="rect">
-            <a:avLst/>
-          </a:prstGeom>
-          <a:solidFill>
-            <a:srgbClr val="E2E8F0"/>
-          </a:solidFill>
-          <a:ln w="12700">
-            <a:solidFill>
-              <a:srgbClr val="E2E8F0"/>
-            </a:solidFill>
-            <a:prstDash val="solid"/>
-          </a:ln>
-        </p:spPr>
-      </p:sp>
-      <p:sp>
-        <p:nvSpPr>
-          <p:cNvPr id="8" name="Text 6"/>
-          <p:cNvSpPr/>
-          <p:nvPr/>
-        </p:nvSpPr>
-        <p:spPr>
-          <a:xfrm>
-            <a:off x="731520" y="1097280"/>
-            <a:ext cx="9144000" cy="320040"/>
-          </a:xfrm>
-          <a:prstGeom prst="rect">
-            <a:avLst/>
-          </a:prstGeom>
-          <a:noFill/>
-          <a:ln/>
-        </p:spPr>
-        <p:txBody>
-          <a:bodyPr wrap="square" rtlCol="0" anchor="ctr"/>
-          <a:lstStyle/>
-          <a:p>
-            <a:pPr indent="0" marL="0">
-              <a:buNone/>
-            </a:pPr>
-            <a:r>
-              <a:rPr lang="en-US" sz="1100" b="1" dirty="0">
-                <a:solidFill>
-                  <a:srgbClr val="64748B"/>
-                </a:solidFill>
-                <a:latin typeface="Courier New" pitchFamily="34" charset="0"/>
-                <a:ea typeface="Courier New" pitchFamily="34" charset="-122"/>
-                <a:cs typeface="Courier New" pitchFamily="34" charset="-120"/>
-              </a:rPr>
-              <a:t>DEVOPS &amp; AUTOMATION</a:t>
-            </a:r>
-            <a:endParaRPr lang="en-US" sz="1100" dirty="0"/>
-          </a:p>
-        </p:txBody>
-      </p:sp>
-      <p:sp>
-        <p:nvSpPr>
-          <p:cNvPr id="9" name="Text 7"/>
-          <p:cNvSpPr/>
-          <p:nvPr/>
-        </p:nvSpPr>
-        <p:spPr>
-          <a:xfrm>
-            <a:off x="731520" y="1417320"/>
-            <a:ext cx="10698480" cy="548640"/>
-          </a:xfrm>
-          <a:prstGeom prst="rect">
-            <a:avLst/>
-          </a:prstGeom>
-          <a:noFill/>
-          <a:ln/>
-        </p:spPr>
-        <p:txBody>
-          <a:bodyPr wrap="square" rtlCol="0" anchor="ctr"/>
-          <a:lstStyle/>
-          <a:p>
-            <a:pPr indent="0" marL="0">
-              <a:buNone/>
-            </a:pPr>
-            <a:r>
-              <a:rPr lang="en-US" sz="2600" b="1" dirty="0">
-                <a:solidFill>
-                  <a:srgbClr val="0F172A"/>
-                </a:solidFill>
-                <a:latin typeface="Segoe UI" pitchFamily="34" charset="0"/>
-                <a:ea typeface="Segoe UI" pitchFamily="34" charset="-122"/>
-                <a:cs typeface="Segoe UI" pitchFamily="34" charset="-120"/>
-              </a:rPr>
-              <a:t>1-Click Full Ecosystem Cloud Run Deployment</a:t>
-            </a:r>
-            <a:endParaRPr lang="en-US" sz="2600" dirty="0"/>
-          </a:p>
-        </p:txBody>
-      </p:sp>
-      <p:sp>
-        <p:nvSpPr>
-          <p:cNvPr id="10" name="Shape 8"/>
-          <p:cNvSpPr/>
-          <p:nvPr/>
-        </p:nvSpPr>
-        <p:spPr>
-          <a:xfrm>
-            <a:off x="731520" y="2148840"/>
-            <a:ext cx="5212080" cy="3566160"/>
-          </a:xfrm>
-          <a:prstGeom prst="roundRect">
-            <a:avLst>
-              <a:gd name="adj" fmla="val 2564"/>
-            </a:avLst>
-          </a:prstGeom>
-          <a:solidFill>
-            <a:srgbClr val="FFFFFF"/>
-          </a:solidFill>
-          <a:ln w="12700">
-            <a:solidFill>
-              <a:srgbClr val="E2E8F0"/>
-            </a:solidFill>
-            <a:prstDash val="solid"/>
-          </a:ln>
-        </p:spPr>
-      </p:sp>
-      <p:sp>
-        <p:nvSpPr>
-          <p:cNvPr id="11" name="Text 9"/>
-          <p:cNvSpPr/>
-          <p:nvPr/>
-        </p:nvSpPr>
-        <p:spPr>
-          <a:xfrm>
-            <a:off x="1005840" y="2331720"/>
-            <a:ext cx="4663440" cy="3200400"/>
-          </a:xfrm>
-          <a:prstGeom prst="rect">
-            <a:avLst/>
-          </a:prstGeom>
-          <a:noFill/>
-          <a:ln/>
-        </p:spPr>
-        <p:txBody>
-          <a:bodyPr wrap="square" rtlCol="0" anchor="t"/>
-          <a:lstStyle/>
-          <a:p>
-            <a:pPr indent="0" marL="0">
-              <a:buNone/>
-            </a:pPr>
-            <a:r>
-              <a:rPr lang="en-US" sz="1500" b="1" dirty="0">
-                <a:solidFill>
-                  <a:srgbClr val="0F172A"/>
-                </a:solidFill>
-                <a:latin typeface="Segoe UI" pitchFamily="34" charset="0"/>
-                <a:ea typeface="Segoe UI" pitchFamily="34" charset="-122"/>
-                <a:cs typeface="Segoe UI" pitchFamily="34" charset="-120"/>
-              </a:rPr>
-              <a:t>Automated Cloud Provisioning Lifecycle
-</a:t>
-            </a:r>
-            <a:pPr indent="0" marL="0">
-              <a:lnSpc>
-                <a:spcPct val="120000"/>
-              </a:lnSpc>
-              <a:buNone/>
-            </a:pPr>
-            <a:r>
-              <a:rPr lang="en-US" sz="1250" dirty="0">
-                <a:solidFill>
-                  <a:srgbClr val="64748B"/>
-                </a:solidFill>
-                <a:latin typeface="Segoe UI" pitchFamily="34" charset="0"/>
-                <a:ea typeface="Segoe UI" pitchFamily="34" charset="-122"/>
-                <a:cs typeface="Segoe UI" pitchFamily="34" charset="-120"/>
-              </a:rPr>
-              <a:t>Full automated deployment in 5 sequential steps:
-</a:t>
-            </a:r>
-            <a:pPr indent="0" marL="0">
-              <a:lnSpc>
-                <a:spcPct val="120000"/>
-              </a:lnSpc>
-              <a:buNone/>
-            </a:pPr>
-            <a:r>
-              <a:rPr lang="en-US" sz="1200" dirty="0">
-                <a:solidFill>
-                  <a:srgbClr val="334155"/>
-                </a:solidFill>
-                <a:latin typeface="Segoe UI" pitchFamily="34" charset="0"/>
-                <a:ea typeface="Segoe UI" pitchFamily="34" charset="-122"/>
-                <a:cs typeface="Segoe UI" pitchFamily="34" charset="-120"/>
-              </a:rPr>
-              <a:t>• 1. Auto-enables 10 GCP APIs (run, pubsub, firestore, aiplatform, etc.).
-</a:t>
-            </a:r>
-            <a:pPr indent="0" marL="0">
-              <a:lnSpc>
-                <a:spcPct val="120000"/>
-              </a:lnSpc>
-              <a:buNone/>
-            </a:pPr>
-            <a:r>
-              <a:rPr lang="en-US" sz="1200" dirty="0">
-                <a:solidFill>
-                  <a:srgbClr val="334155"/>
-                </a:solidFill>
-                <a:latin typeface="Segoe UI" pitchFamily="34" charset="0"/>
-                <a:ea typeface="Segoe UI" pitchFamily="34" charset="-122"/>
-                <a:cs typeface="Segoe UI" pitchFamily="34" charset="-120"/>
-              </a:rPr>
-              <a:t>• 2. Grants least-privilege IAM roles to Default Compute Service Account.
-</a:t>
-            </a:r>
-            <a:pPr indent="0" marL="0">
-              <a:lnSpc>
-                <a:spcPct val="120000"/>
-              </a:lnSpc>
-              <a:buNone/>
-            </a:pPr>
-            <a:r>
-              <a:rPr lang="en-US" sz="1200" dirty="0">
-                <a:solidFill>
-                  <a:srgbClr val="334155"/>
-                </a:solidFill>
-                <a:latin typeface="Segoe UI" pitchFamily="34" charset="0"/>
-                <a:ea typeface="Segoe UI" pitchFamily="34" charset="-122"/>
-                <a:cs typeface="Segoe UI" pitchFamily="34" charset="-120"/>
-              </a:rPr>
-              <a:t>• 3. Auto-provisions Firestore Native database shine-db and GCS bucket.
-</a:t>
-            </a:r>
-            <a:pPr indent="0" marL="0">
-              <a:lnSpc>
-                <a:spcPct val="120000"/>
-              </a:lnSpc>
-              <a:buNone/>
-            </a:pPr>
-            <a:r>
-              <a:rPr lang="en-US" sz="1200" dirty="0">
-                <a:solidFill>
-                  <a:srgbClr val="334155"/>
-                </a:solidFill>
-                <a:latin typeface="Segoe UI" pitchFamily="34" charset="0"/>
-                <a:ea typeface="Segoe UI" pitchFamily="34" charset="-122"/>
-                <a:cs typeface="Segoe UI" pitchFamily="34" charset="-120"/>
-              </a:rPr>
-              <a:t>• 4. Creates Pub/Sub topics (shine-render-jobs, shine-render-status).
-</a:t>
-            </a:r>
-            <a:pPr indent="0" marL="0">
-              <a:lnSpc>
-                <a:spcPct val="120000"/>
-              </a:lnSpc>
-              <a:buNone/>
-            </a:pPr>
-            <a:r>
-              <a:rPr lang="en-US" sz="1200" dirty="0">
-                <a:solidFill>
-                  <a:srgbClr val="334155"/>
-                </a:solidFill>
-                <a:latin typeface="Segoe UI" pitchFamily="34" charset="0"/>
-                <a:ea typeface="Segoe UI" pitchFamily="34" charset="-122"/>
-                <a:cs typeface="Segoe UI" pitchFamily="34" charset="-120"/>
-              </a:rPr>
-              <a:t>• 5. Builds and deploys all 3 containers with dynamic YAML configuration.
-</a:t>
-            </a:r>
-            <a:endParaRPr lang="en-US" sz="1500" dirty="0"/>
-          </a:p>
-        </p:txBody>
-      </p:sp>
-      <p:sp>
-        <p:nvSpPr>
-          <p:cNvPr id="12" name="Shape 10"/>
-          <p:cNvSpPr/>
-          <p:nvPr/>
-        </p:nvSpPr>
-        <p:spPr>
-          <a:xfrm>
-            <a:off x="6217920" y="2148840"/>
-            <a:ext cx="5212080" cy="3566160"/>
-          </a:xfrm>
-          <a:prstGeom prst="roundRect">
-            <a:avLst>
-              <a:gd name="adj" fmla="val 2564"/>
-            </a:avLst>
-          </a:prstGeom>
-          <a:solidFill>
-            <a:srgbClr val="FFFFFF"/>
-          </a:solidFill>
-          <a:ln w="12700">
-            <a:solidFill>
-              <a:srgbClr val="E2E8F0"/>
-            </a:solidFill>
-            <a:prstDash val="solid"/>
-          </a:ln>
-        </p:spPr>
-      </p:sp>
-      <p:sp>
-        <p:nvSpPr>
-          <p:cNvPr id="13" name="Text 11"/>
-          <p:cNvSpPr/>
-          <p:nvPr/>
-        </p:nvSpPr>
-        <p:spPr>
-          <a:xfrm>
-            <a:off x="6492240" y="2331720"/>
-            <a:ext cx="4663440" cy="3200400"/>
-          </a:xfrm>
-          <a:prstGeom prst="rect">
-            <a:avLst/>
-          </a:prstGeom>
-          <a:noFill/>
-          <a:ln/>
-        </p:spPr>
-        <p:txBody>
-          <a:bodyPr wrap="square" rtlCol="0" anchor="t"/>
-          <a:lstStyle/>
-          <a:p>
-            <a:pPr indent="0" marL="0">
-              <a:buNone/>
-            </a:pPr>
-            <a:r>
-              <a:rPr lang="en-US" sz="1500" b="1" dirty="0">
-                <a:solidFill>
-                  <a:srgbClr val="0F172A"/>
-                </a:solidFill>
-                <a:latin typeface="Segoe UI" pitchFamily="34" charset="0"/>
-                <a:ea typeface="Segoe UI" pitchFamily="34" charset="-122"/>
-                <a:cs typeface="Segoe UI" pitchFamily="34" charset="-120"/>
-              </a:rPr>
-              <a:t>Single Execution Command
-</a:t>
-            </a:r>
-            <a:pPr indent="0" marL="0">
-              <a:lnSpc>
-                <a:spcPct val="120000"/>
-              </a:lnSpc>
-              <a:buNone/>
-            </a:pPr>
-            <a:r>
-              <a:rPr lang="en-US" sz="1250" dirty="0">
-                <a:solidFill>
-                  <a:srgbClr val="64748B"/>
-                </a:solidFill>
-                <a:latin typeface="Segoe UI" pitchFamily="34" charset="0"/>
-                <a:ea typeface="Segoe UI" pitchFamily="34" charset="-122"/>
-                <a:cs typeface="Segoe UI" pitchFamily="34" charset="-120"/>
-              </a:rPr>
-              <a:t>Deploy entire ecosystem with a single command:
-</a:t>
-            </a:r>
-            <a:pPr indent="0" marL="0">
-              <a:buNone/>
-            </a:pPr>
-            <a:endParaRPr lang="en-US" sz="1500" dirty="0"/>
-          </a:p>
-          <a:p>
-            <a:pPr indent="0" marL="0">
-              <a:buNone/>
-            </a:pPr>
-            <a:r>
-              <a:rPr lang="en-US" sz="1100" dirty="0">
-                <a:solidFill>
-                  <a:srgbClr val="0F172A"/>
-                </a:solidFill>
-                <a:latin typeface="Courier New" pitchFamily="34" charset="0"/>
-                <a:ea typeface="Courier New" pitchFamily="34" charset="-122"/>
-                <a:cs typeface="Courier New" pitchFamily="34" charset="-120"/>
-              </a:rPr>
-              <a:t># Windows PowerShell</a:t>
-            </a:r>
-            <a:endParaRPr lang="en-US" sz="1500" dirty="0"/>
-          </a:p>
-          <a:p>
-            <a:pPr indent="0" marL="0">
-              <a:buNone/>
-            </a:pPr>
-            <a:r>
-              <a:rPr lang="en-US" sz="1100" dirty="0">
-                <a:solidFill>
-                  <a:srgbClr val="0F172A"/>
-                </a:solidFill>
-                <a:latin typeface="Courier New" pitchFamily="34" charset="0"/>
-                <a:ea typeface="Courier New" pitchFamily="34" charset="-122"/>
-                <a:cs typeface="Courier New" pitchFamily="34" charset="-120"/>
-              </a:rPr>
-              <a:t>.\scripts\deploy-cloudrun.ps1</a:t>
-            </a:r>
-            <a:endParaRPr lang="en-US" sz="1500" dirty="0"/>
-          </a:p>
-          <a:p>
-            <a:pPr indent="0" marL="0">
-              <a:buNone/>
-            </a:pPr>
-            <a:endParaRPr lang="en-US" sz="1500" dirty="0"/>
-          </a:p>
-          <a:p>
-            <a:pPr indent="0" marL="0">
-              <a:buNone/>
-            </a:pPr>
-            <a:r>
-              <a:rPr lang="en-US" sz="1100" dirty="0">
-                <a:solidFill>
-                  <a:srgbClr val="0F172A"/>
-                </a:solidFill>
-                <a:latin typeface="Courier New" pitchFamily="34" charset="0"/>
-                <a:ea typeface="Courier New" pitchFamily="34" charset="-122"/>
-                <a:cs typeface="Courier New" pitchFamily="34" charset="-120"/>
-              </a:rPr>
-              <a:t># Linux / macOS / Cloud Shell</a:t>
-            </a:r>
-            <a:endParaRPr lang="en-US" sz="1500" dirty="0"/>
-          </a:p>
-          <a:p>
-            <a:pPr indent="0" marL="0">
-              <a:buNone/>
-            </a:pPr>
-            <a:r>
-              <a:rPr lang="en-US" sz="1100" dirty="0">
-                <a:solidFill>
-                  <a:srgbClr val="0F172A"/>
-                </a:solidFill>
-                <a:latin typeface="Courier New" pitchFamily="34" charset="0"/>
-                <a:ea typeface="Courier New" pitchFamily="34" charset="-122"/>
-                <a:cs typeface="Courier New" pitchFamily="34" charset="-120"/>
-              </a:rPr>
-              <a:t>./scripts/deploy-cloudrun.sh</a:t>
-            </a:r>
-            <a:endParaRPr lang="en-US" sz="1500" dirty="0"/>
-          </a:p>
-          <a:p>
-            <a:pPr indent="0" marL="0">
-              <a:buNone/>
-            </a:pPr>
-            <a:endParaRPr lang="en-US" sz="1500" dirty="0"/>
-          </a:p>
-          <a:p>
-            <a:pPr indent="0" marL="0">
-              <a:buNone/>
-            </a:pPr>
-            <a:r>
-              <a:rPr lang="en-US" sz="1100" dirty="0">
-                <a:solidFill>
-                  <a:srgbClr val="0F172A"/>
-                </a:solidFill>
-                <a:latin typeface="Courier New" pitchFamily="34" charset="0"/>
-                <a:ea typeface="Courier New" pitchFamily="34" charset="-122"/>
-                <a:cs typeface="Courier New" pitchFamily="34" charset="-120"/>
-              </a:rPr>
-              <a:t># Health Check</a:t>
-            </a:r>
-            <a:endParaRPr lang="en-US" sz="1500" dirty="0"/>
-          </a:p>
-          <a:p>
-            <a:pPr indent="0" marL="0">
-              <a:buNone/>
-            </a:pPr>
-            <a:r>
-              <a:rPr lang="en-US" sz="1100" dirty="0">
-                <a:solidFill>
-                  <a:srgbClr val="0F172A"/>
-                </a:solidFill>
-                <a:latin typeface="Courier New" pitchFamily="34" charset="0"/>
-                <a:ea typeface="Courier New" pitchFamily="34" charset="-122"/>
-                <a:cs typeface="Courier New" pitchFamily="34" charset="-120"/>
-              </a:rPr>
-              <a:t>curl https://&lt;APP_URL&gt;/api/health</a:t>
-            </a:r>
-            <a:endParaRPr lang="en-US" sz="1500" dirty="0"/>
-          </a:p>
-        </p:txBody>
-      </p:sp>
-    </p:spTree>
-  </p:cSld>
-  <p:clrMapOvr>
-    <a:masterClrMapping/>
-  </p:clrMapOvr>
-</p:sld>
-</file>
-
 <file path=ppt/slides/slide23.xml><?xml version="1.0" encoding="utf-8"?>
 <p:sld xmlns:a="http://schemas.openxmlformats.org/drawingml/2006/main" xmlns:r="http://schemas.openxmlformats.org/officeDocument/2006/relationships" xmlns:p="http://schemas.openxmlformats.org/presentationml/2006/main">
   <p:cSld name="Slide 23">
@@ -16984,7 +16989,704 @@
                 <a:ea typeface="Courier New" pitchFamily="34" charset="-122"/>
                 <a:cs typeface="Courier New" pitchFamily="34" charset="-120"/>
               </a:rPr>
-              <a:t>23 / 23</a:t>
+              <a:t>23 / 24</a:t>
+            </a:r>
+            <a:endParaRPr lang="en-US" sz="1100" dirty="0"/>
+          </a:p>
+        </p:txBody>
+      </p:sp>
+      <p:sp>
+        <p:nvSpPr>
+          <p:cNvPr id="7" name="Shape 5"/>
+          <p:cNvSpPr/>
+          <p:nvPr/>
+        </p:nvSpPr>
+        <p:spPr>
+          <a:xfrm>
+            <a:off x="731520" y="868680"/>
+            <a:ext cx="10698480" cy="13716"/>
+          </a:xfrm>
+          <a:prstGeom prst="rect">
+            <a:avLst/>
+          </a:prstGeom>
+          <a:solidFill>
+            <a:srgbClr val="E2E8F0"/>
+          </a:solidFill>
+          <a:ln w="12700">
+            <a:solidFill>
+              <a:srgbClr val="E2E8F0"/>
+            </a:solidFill>
+            <a:prstDash val="solid"/>
+          </a:ln>
+        </p:spPr>
+      </p:sp>
+      <p:sp>
+        <p:nvSpPr>
+          <p:cNvPr id="8" name="Text 6"/>
+          <p:cNvSpPr/>
+          <p:nvPr/>
+        </p:nvSpPr>
+        <p:spPr>
+          <a:xfrm>
+            <a:off x="731520" y="1097280"/>
+            <a:ext cx="9144000" cy="320040"/>
+          </a:xfrm>
+          <a:prstGeom prst="rect">
+            <a:avLst/>
+          </a:prstGeom>
+          <a:noFill/>
+          <a:ln/>
+        </p:spPr>
+        <p:txBody>
+          <a:bodyPr wrap="square" rtlCol="0" anchor="ctr"/>
+          <a:lstStyle/>
+          <a:p>
+            <a:pPr indent="0" marL="0">
+              <a:buNone/>
+            </a:pPr>
+            <a:r>
+              <a:rPr lang="en-US" sz="1100" b="1" dirty="0">
+                <a:solidFill>
+                  <a:srgbClr val="64748B"/>
+                </a:solidFill>
+                <a:latin typeface="Courier New" pitchFamily="34" charset="0"/>
+                <a:ea typeface="Courier New" pitchFamily="34" charset="-122"/>
+                <a:cs typeface="Courier New" pitchFamily="34" charset="-120"/>
+              </a:rPr>
+              <a:t>DEVOPS &amp; AUTOMATION</a:t>
+            </a:r>
+            <a:endParaRPr lang="en-US" sz="1100" dirty="0"/>
+          </a:p>
+        </p:txBody>
+      </p:sp>
+      <p:sp>
+        <p:nvSpPr>
+          <p:cNvPr id="9" name="Text 7"/>
+          <p:cNvSpPr/>
+          <p:nvPr/>
+        </p:nvSpPr>
+        <p:spPr>
+          <a:xfrm>
+            <a:off x="731520" y="1417320"/>
+            <a:ext cx="10698480" cy="548640"/>
+          </a:xfrm>
+          <a:prstGeom prst="rect">
+            <a:avLst/>
+          </a:prstGeom>
+          <a:noFill/>
+          <a:ln/>
+        </p:spPr>
+        <p:txBody>
+          <a:bodyPr wrap="square" rtlCol="0" anchor="ctr"/>
+          <a:lstStyle/>
+          <a:p>
+            <a:pPr indent="0" marL="0">
+              <a:buNone/>
+            </a:pPr>
+            <a:r>
+              <a:rPr lang="en-US" sz="2600" b="1" dirty="0">
+                <a:solidFill>
+                  <a:srgbClr val="0F172A"/>
+                </a:solidFill>
+                <a:latin typeface="Segoe UI" pitchFamily="34" charset="0"/>
+                <a:ea typeface="Segoe UI" pitchFamily="34" charset="-122"/>
+                <a:cs typeface="Segoe UI" pitchFamily="34" charset="-120"/>
+              </a:rPr>
+              <a:t>1-Click Full Ecosystem Cloud Run Deployment</a:t>
+            </a:r>
+            <a:endParaRPr lang="en-US" sz="2600" dirty="0"/>
+          </a:p>
+        </p:txBody>
+      </p:sp>
+      <p:sp>
+        <p:nvSpPr>
+          <p:cNvPr id="10" name="Shape 8"/>
+          <p:cNvSpPr/>
+          <p:nvPr/>
+        </p:nvSpPr>
+        <p:spPr>
+          <a:xfrm>
+            <a:off x="731520" y="2148840"/>
+            <a:ext cx="5212080" cy="3566160"/>
+          </a:xfrm>
+          <a:prstGeom prst="roundRect">
+            <a:avLst>
+              <a:gd name="adj" fmla="val 2564"/>
+            </a:avLst>
+          </a:prstGeom>
+          <a:solidFill>
+            <a:srgbClr val="FFFFFF"/>
+          </a:solidFill>
+          <a:ln w="12700">
+            <a:solidFill>
+              <a:srgbClr val="E2E8F0"/>
+            </a:solidFill>
+            <a:prstDash val="solid"/>
+          </a:ln>
+        </p:spPr>
+      </p:sp>
+      <p:sp>
+        <p:nvSpPr>
+          <p:cNvPr id="11" name="Text 9"/>
+          <p:cNvSpPr/>
+          <p:nvPr/>
+        </p:nvSpPr>
+        <p:spPr>
+          <a:xfrm>
+            <a:off x="1005840" y="2331720"/>
+            <a:ext cx="4663440" cy="3200400"/>
+          </a:xfrm>
+          <a:prstGeom prst="rect">
+            <a:avLst/>
+          </a:prstGeom>
+          <a:noFill/>
+          <a:ln/>
+        </p:spPr>
+        <p:txBody>
+          <a:bodyPr wrap="square" rtlCol="0" anchor="t"/>
+          <a:lstStyle/>
+          <a:p>
+            <a:pPr indent="0" marL="0">
+              <a:buNone/>
+            </a:pPr>
+            <a:r>
+              <a:rPr lang="en-US" sz="1500" b="1" dirty="0">
+                <a:solidFill>
+                  <a:srgbClr val="0F172A"/>
+                </a:solidFill>
+                <a:latin typeface="Segoe UI" pitchFamily="34" charset="0"/>
+                <a:ea typeface="Segoe UI" pitchFamily="34" charset="-122"/>
+                <a:cs typeface="Segoe UI" pitchFamily="34" charset="-120"/>
+              </a:rPr>
+              <a:t>Automated Cloud Provisioning Lifecycle
+</a:t>
+            </a:r>
+            <a:pPr indent="0" marL="0">
+              <a:lnSpc>
+                <a:spcPct val="120000"/>
+              </a:lnSpc>
+              <a:buNone/>
+            </a:pPr>
+            <a:r>
+              <a:rPr lang="en-US" sz="1250" dirty="0">
+                <a:solidFill>
+                  <a:srgbClr val="64748B"/>
+                </a:solidFill>
+                <a:latin typeface="Segoe UI" pitchFamily="34" charset="0"/>
+                <a:ea typeface="Segoe UI" pitchFamily="34" charset="-122"/>
+                <a:cs typeface="Segoe UI" pitchFamily="34" charset="-120"/>
+              </a:rPr>
+              <a:t>Full automated deployment in 5 sequential steps:
+</a:t>
+            </a:r>
+            <a:pPr indent="0" marL="0">
+              <a:lnSpc>
+                <a:spcPct val="120000"/>
+              </a:lnSpc>
+              <a:buNone/>
+            </a:pPr>
+            <a:r>
+              <a:rPr lang="en-US" sz="1200" dirty="0">
+                <a:solidFill>
+                  <a:srgbClr val="334155"/>
+                </a:solidFill>
+                <a:latin typeface="Segoe UI" pitchFamily="34" charset="0"/>
+                <a:ea typeface="Segoe UI" pitchFamily="34" charset="-122"/>
+                <a:cs typeface="Segoe UI" pitchFamily="34" charset="-120"/>
+              </a:rPr>
+              <a:t>• 1. Auto-enables 10 GCP APIs (run, pubsub, firestore, aiplatform, etc.).
+</a:t>
+            </a:r>
+            <a:pPr indent="0" marL="0">
+              <a:lnSpc>
+                <a:spcPct val="120000"/>
+              </a:lnSpc>
+              <a:buNone/>
+            </a:pPr>
+            <a:r>
+              <a:rPr lang="en-US" sz="1200" dirty="0">
+                <a:solidFill>
+                  <a:srgbClr val="334155"/>
+                </a:solidFill>
+                <a:latin typeface="Segoe UI" pitchFamily="34" charset="0"/>
+                <a:ea typeface="Segoe UI" pitchFamily="34" charset="-122"/>
+                <a:cs typeface="Segoe UI" pitchFamily="34" charset="-120"/>
+              </a:rPr>
+              <a:t>• 2. Grants least-privilege IAM roles to Default Compute Service Account.
+</a:t>
+            </a:r>
+            <a:pPr indent="0" marL="0">
+              <a:lnSpc>
+                <a:spcPct val="120000"/>
+              </a:lnSpc>
+              <a:buNone/>
+            </a:pPr>
+            <a:r>
+              <a:rPr lang="en-US" sz="1200" dirty="0">
+                <a:solidFill>
+                  <a:srgbClr val="334155"/>
+                </a:solidFill>
+                <a:latin typeface="Segoe UI" pitchFamily="34" charset="0"/>
+                <a:ea typeface="Segoe UI" pitchFamily="34" charset="-122"/>
+                <a:cs typeface="Segoe UI" pitchFamily="34" charset="-120"/>
+              </a:rPr>
+              <a:t>• 3. Auto-provisions Firestore Native database shine-db and GCS bucket.
+</a:t>
+            </a:r>
+            <a:pPr indent="0" marL="0">
+              <a:lnSpc>
+                <a:spcPct val="120000"/>
+              </a:lnSpc>
+              <a:buNone/>
+            </a:pPr>
+            <a:r>
+              <a:rPr lang="en-US" sz="1200" dirty="0">
+                <a:solidFill>
+                  <a:srgbClr val="334155"/>
+                </a:solidFill>
+                <a:latin typeface="Segoe UI" pitchFamily="34" charset="0"/>
+                <a:ea typeface="Segoe UI" pitchFamily="34" charset="-122"/>
+                <a:cs typeface="Segoe UI" pitchFamily="34" charset="-120"/>
+              </a:rPr>
+              <a:t>• 4. Creates Pub/Sub topics (shine-render-jobs, shine-render-status).
+</a:t>
+            </a:r>
+            <a:pPr indent="0" marL="0">
+              <a:lnSpc>
+                <a:spcPct val="120000"/>
+              </a:lnSpc>
+              <a:buNone/>
+            </a:pPr>
+            <a:r>
+              <a:rPr lang="en-US" sz="1200" dirty="0">
+                <a:solidFill>
+                  <a:srgbClr val="334155"/>
+                </a:solidFill>
+                <a:latin typeface="Segoe UI" pitchFamily="34" charset="0"/>
+                <a:ea typeface="Segoe UI" pitchFamily="34" charset="-122"/>
+                <a:cs typeface="Segoe UI" pitchFamily="34" charset="-120"/>
+              </a:rPr>
+              <a:t>• 5. Builds and deploys all 3 containers with dynamic YAML configuration.
+</a:t>
+            </a:r>
+            <a:endParaRPr lang="en-US" sz="1500" dirty="0"/>
+          </a:p>
+        </p:txBody>
+      </p:sp>
+      <p:sp>
+        <p:nvSpPr>
+          <p:cNvPr id="12" name="Shape 10"/>
+          <p:cNvSpPr/>
+          <p:nvPr/>
+        </p:nvSpPr>
+        <p:spPr>
+          <a:xfrm>
+            <a:off x="6217920" y="2148840"/>
+            <a:ext cx="5212080" cy="3566160"/>
+          </a:xfrm>
+          <a:prstGeom prst="roundRect">
+            <a:avLst>
+              <a:gd name="adj" fmla="val 2564"/>
+            </a:avLst>
+          </a:prstGeom>
+          <a:solidFill>
+            <a:srgbClr val="FFFFFF"/>
+          </a:solidFill>
+          <a:ln w="12700">
+            <a:solidFill>
+              <a:srgbClr val="E2E8F0"/>
+            </a:solidFill>
+            <a:prstDash val="solid"/>
+          </a:ln>
+        </p:spPr>
+      </p:sp>
+      <p:sp>
+        <p:nvSpPr>
+          <p:cNvPr id="13" name="Text 11"/>
+          <p:cNvSpPr/>
+          <p:nvPr/>
+        </p:nvSpPr>
+        <p:spPr>
+          <a:xfrm>
+            <a:off x="6492240" y="2331720"/>
+            <a:ext cx="4663440" cy="3200400"/>
+          </a:xfrm>
+          <a:prstGeom prst="rect">
+            <a:avLst/>
+          </a:prstGeom>
+          <a:noFill/>
+          <a:ln/>
+        </p:spPr>
+        <p:txBody>
+          <a:bodyPr wrap="square" rtlCol="0" anchor="t"/>
+          <a:lstStyle/>
+          <a:p>
+            <a:pPr indent="0" marL="0">
+              <a:buNone/>
+            </a:pPr>
+            <a:r>
+              <a:rPr lang="en-US" sz="1500" b="1" dirty="0">
+                <a:solidFill>
+                  <a:srgbClr val="0F172A"/>
+                </a:solidFill>
+                <a:latin typeface="Segoe UI" pitchFamily="34" charset="0"/>
+                <a:ea typeface="Segoe UI" pitchFamily="34" charset="-122"/>
+                <a:cs typeface="Segoe UI" pitchFamily="34" charset="-120"/>
+              </a:rPr>
+              <a:t>Single Execution Command
+</a:t>
+            </a:r>
+            <a:pPr indent="0" marL="0">
+              <a:lnSpc>
+                <a:spcPct val="120000"/>
+              </a:lnSpc>
+              <a:buNone/>
+            </a:pPr>
+            <a:r>
+              <a:rPr lang="en-US" sz="1250" dirty="0">
+                <a:solidFill>
+                  <a:srgbClr val="64748B"/>
+                </a:solidFill>
+                <a:latin typeface="Segoe UI" pitchFamily="34" charset="0"/>
+                <a:ea typeface="Segoe UI" pitchFamily="34" charset="-122"/>
+                <a:cs typeface="Segoe UI" pitchFamily="34" charset="-120"/>
+              </a:rPr>
+              <a:t>Deploy entire ecosystem with a single command:
+</a:t>
+            </a:r>
+            <a:pPr indent="0" marL="0">
+              <a:buNone/>
+            </a:pPr>
+            <a:endParaRPr lang="en-US" sz="1500" dirty="0"/>
+          </a:p>
+          <a:p>
+            <a:pPr indent="0" marL="0">
+              <a:buNone/>
+            </a:pPr>
+            <a:r>
+              <a:rPr lang="en-US" sz="1100" dirty="0">
+                <a:solidFill>
+                  <a:srgbClr val="0F172A"/>
+                </a:solidFill>
+                <a:latin typeface="Courier New" pitchFamily="34" charset="0"/>
+                <a:ea typeface="Courier New" pitchFamily="34" charset="-122"/>
+                <a:cs typeface="Courier New" pitchFamily="34" charset="-120"/>
+              </a:rPr>
+              <a:t># Windows PowerShell</a:t>
+            </a:r>
+            <a:endParaRPr lang="en-US" sz="1500" dirty="0"/>
+          </a:p>
+          <a:p>
+            <a:pPr indent="0" marL="0">
+              <a:buNone/>
+            </a:pPr>
+            <a:r>
+              <a:rPr lang="en-US" sz="1100" dirty="0">
+                <a:solidFill>
+                  <a:srgbClr val="0F172A"/>
+                </a:solidFill>
+                <a:latin typeface="Courier New" pitchFamily="34" charset="0"/>
+                <a:ea typeface="Courier New" pitchFamily="34" charset="-122"/>
+                <a:cs typeface="Courier New" pitchFamily="34" charset="-120"/>
+              </a:rPr>
+              <a:t>.\scripts\deploy-cloudrun.ps1</a:t>
+            </a:r>
+            <a:endParaRPr lang="en-US" sz="1500" dirty="0"/>
+          </a:p>
+          <a:p>
+            <a:pPr indent="0" marL="0">
+              <a:buNone/>
+            </a:pPr>
+            <a:endParaRPr lang="en-US" sz="1500" dirty="0"/>
+          </a:p>
+          <a:p>
+            <a:pPr indent="0" marL="0">
+              <a:buNone/>
+            </a:pPr>
+            <a:r>
+              <a:rPr lang="en-US" sz="1100" dirty="0">
+                <a:solidFill>
+                  <a:srgbClr val="0F172A"/>
+                </a:solidFill>
+                <a:latin typeface="Courier New" pitchFamily="34" charset="0"/>
+                <a:ea typeface="Courier New" pitchFamily="34" charset="-122"/>
+                <a:cs typeface="Courier New" pitchFamily="34" charset="-120"/>
+              </a:rPr>
+              <a:t># Linux / macOS / Cloud Shell</a:t>
+            </a:r>
+            <a:endParaRPr lang="en-US" sz="1500" dirty="0"/>
+          </a:p>
+          <a:p>
+            <a:pPr indent="0" marL="0">
+              <a:buNone/>
+            </a:pPr>
+            <a:r>
+              <a:rPr lang="en-US" sz="1100" dirty="0">
+                <a:solidFill>
+                  <a:srgbClr val="0F172A"/>
+                </a:solidFill>
+                <a:latin typeface="Courier New" pitchFamily="34" charset="0"/>
+                <a:ea typeface="Courier New" pitchFamily="34" charset="-122"/>
+                <a:cs typeface="Courier New" pitchFamily="34" charset="-120"/>
+              </a:rPr>
+              <a:t>./scripts/deploy-cloudrun.sh</a:t>
+            </a:r>
+            <a:endParaRPr lang="en-US" sz="1500" dirty="0"/>
+          </a:p>
+          <a:p>
+            <a:pPr indent="0" marL="0">
+              <a:buNone/>
+            </a:pPr>
+            <a:endParaRPr lang="en-US" sz="1500" dirty="0"/>
+          </a:p>
+          <a:p>
+            <a:pPr indent="0" marL="0">
+              <a:buNone/>
+            </a:pPr>
+            <a:r>
+              <a:rPr lang="en-US" sz="1100" dirty="0">
+                <a:solidFill>
+                  <a:srgbClr val="0F172A"/>
+                </a:solidFill>
+                <a:latin typeface="Courier New" pitchFamily="34" charset="0"/>
+                <a:ea typeface="Courier New" pitchFamily="34" charset="-122"/>
+                <a:cs typeface="Courier New" pitchFamily="34" charset="-120"/>
+              </a:rPr>
+              <a:t># Health Check</a:t>
+            </a:r>
+            <a:endParaRPr lang="en-US" sz="1500" dirty="0"/>
+          </a:p>
+          <a:p>
+            <a:pPr indent="0" marL="0">
+              <a:buNone/>
+            </a:pPr>
+            <a:r>
+              <a:rPr lang="en-US" sz="1100" dirty="0">
+                <a:solidFill>
+                  <a:srgbClr val="0F172A"/>
+                </a:solidFill>
+                <a:latin typeface="Courier New" pitchFamily="34" charset="0"/>
+                <a:ea typeface="Courier New" pitchFamily="34" charset="-122"/>
+                <a:cs typeface="Courier New" pitchFamily="34" charset="-120"/>
+              </a:rPr>
+              <a:t>curl https://&lt;APP_URL&gt;/api/health</a:t>
+            </a:r>
+            <a:endParaRPr lang="en-US" sz="1500" dirty="0"/>
+          </a:p>
+        </p:txBody>
+      </p:sp>
+    </p:spTree>
+  </p:cSld>
+  <p:clrMapOvr>
+    <a:masterClrMapping/>
+  </p:clrMapOvr>
+</p:sld>
+</file>
+
+<file path=ppt/slides/slide24.xml><?xml version="1.0" encoding="utf-8"?>
+<p:sld xmlns:a="http://schemas.openxmlformats.org/drawingml/2006/main" xmlns:r="http://schemas.openxmlformats.org/officeDocument/2006/relationships" xmlns:p="http://schemas.openxmlformats.org/presentationml/2006/main">
+  <p:cSld name="Slide 24">
+    <p:bg>
+      <p:bgPr>
+        <a:solidFill>
+          <a:srgbClr val="FCFDFF"/>
+        </a:solidFill>
+      </p:bgPr>
+    </p:bg>
+    <p:spTree>
+      <p:nvGrpSpPr>
+        <p:cNvPr id="1" name=""/>
+        <p:cNvGrpSpPr/>
+        <p:nvPr/>
+      </p:nvGrpSpPr>
+      <p:grpSpPr>
+        <a:xfrm>
+          <a:off x="0" y="0"/>
+          <a:ext cx="0" cy="0"/>
+          <a:chOff x="0" y="0"/>
+          <a:chExt cx="0" cy="0"/>
+        </a:xfrm>
+      </p:grpSpPr>
+      <p:sp>
+        <p:nvSpPr>
+          <p:cNvPr id="2" name="Shape 0"/>
+          <p:cNvSpPr/>
+          <p:nvPr/>
+        </p:nvSpPr>
+        <p:spPr>
+          <a:xfrm>
+            <a:off x="731520" y="365760"/>
+            <a:ext cx="384048" cy="384048"/>
+          </a:xfrm>
+          <a:prstGeom prst="roundRect">
+            <a:avLst>
+              <a:gd name="adj" fmla="val 19048"/>
+            </a:avLst>
+          </a:prstGeom>
+          <a:solidFill>
+            <a:srgbClr val="0F172A"/>
+          </a:solidFill>
+          <a:ln w="12700">
+            <a:solidFill>
+              <a:srgbClr val="0F172A"/>
+            </a:solidFill>
+            <a:prstDash val="solid"/>
+          </a:ln>
+        </p:spPr>
+      </p:sp>
+      <p:sp>
+        <p:nvSpPr>
+          <p:cNvPr id="3" name="Text 1"/>
+          <p:cNvSpPr/>
+          <p:nvPr/>
+        </p:nvSpPr>
+        <p:spPr>
+          <a:xfrm>
+            <a:off x="731520" y="365760"/>
+            <a:ext cx="384048" cy="384048"/>
+          </a:xfrm>
+          <a:prstGeom prst="rect">
+            <a:avLst/>
+          </a:prstGeom>
+          <a:noFill/>
+          <a:ln/>
+        </p:spPr>
+        <p:txBody>
+          <a:bodyPr wrap="square" rtlCol="0" anchor="ctr"/>
+          <a:lstStyle/>
+          <a:p>
+            <a:pPr algn="ctr" indent="0" marL="0">
+              <a:buNone/>
+            </a:pPr>
+            <a:r>
+              <a:rPr lang="en-US" sz="1400" b="1" dirty="0">
+                <a:solidFill>
+                  <a:srgbClr val="FFFFFF"/>
+                </a:solidFill>
+                <a:latin typeface="Segoe UI" pitchFamily="34" charset="0"/>
+                <a:ea typeface="Segoe UI" pitchFamily="34" charset="-122"/>
+                <a:cs typeface="Segoe UI" pitchFamily="34" charset="-120"/>
+              </a:rPr>
+              <a:t>S</a:t>
+            </a:r>
+            <a:endParaRPr lang="en-US" sz="1400" dirty="0"/>
+          </a:p>
+        </p:txBody>
+      </p:sp>
+      <p:sp>
+        <p:nvSpPr>
+          <p:cNvPr id="4" name="Text 2"/>
+          <p:cNvSpPr/>
+          <p:nvPr/>
+        </p:nvSpPr>
+        <p:spPr>
+          <a:xfrm>
+            <a:off x="1234440" y="365760"/>
+            <a:ext cx="7772400" cy="384048"/>
+          </a:xfrm>
+          <a:prstGeom prst="rect">
+            <a:avLst/>
+          </a:prstGeom>
+          <a:noFill/>
+          <a:ln/>
+        </p:spPr>
+        <p:txBody>
+          <a:bodyPr wrap="square" rtlCol="0" anchor="ctr"/>
+          <a:lstStyle/>
+          <a:p>
+            <a:pPr indent="0" marL="0">
+              <a:buNone/>
+            </a:pPr>
+            <a:r>
+              <a:rPr lang="en-US" sz="1200" b="1" dirty="0">
+                <a:solidFill>
+                  <a:srgbClr val="0F172A"/>
+                </a:solidFill>
+                <a:latin typeface="Segoe UI" pitchFamily="34" charset="0"/>
+                <a:ea typeface="Segoe UI" pitchFamily="34" charset="-122"/>
+                <a:cs typeface="Segoe UI" pitchFamily="34" charset="-120"/>
+              </a:rPr>
+              <a:t>SHINE STUDIO  </a:t>
+            </a:r>
+            <a:pPr indent="0" marL="0">
+              <a:buNone/>
+            </a:pPr>
+            <a:r>
+              <a:rPr lang="en-US" sz="1200" dirty="0">
+                <a:solidFill>
+                  <a:srgbClr val="64748B"/>
+                </a:solidFill>
+                <a:latin typeface="Segoe UI" pitchFamily="34" charset="0"/>
+                <a:ea typeface="Segoe UI" pitchFamily="34" charset="-122"/>
+                <a:cs typeface="Segoe UI" pitchFamily="34" charset="-120"/>
+              </a:rPr>
+              <a:t>|  System Architecture &amp; Product Blueprint</a:t>
+            </a:r>
+            <a:endParaRPr lang="en-US" sz="1200" dirty="0"/>
+          </a:p>
+        </p:txBody>
+      </p:sp>
+      <p:sp>
+        <p:nvSpPr>
+          <p:cNvPr id="5" name="Shape 3"/>
+          <p:cNvSpPr/>
+          <p:nvPr/>
+        </p:nvSpPr>
+        <p:spPr>
+          <a:xfrm>
+            <a:off x="10332720" y="365760"/>
+            <a:ext cx="1097280" cy="384048"/>
+          </a:xfrm>
+          <a:prstGeom prst="roundRect">
+            <a:avLst>
+              <a:gd name="adj" fmla="val 35714"/>
+            </a:avLst>
+          </a:prstGeom>
+          <a:solidFill>
+            <a:srgbClr val="F1F5F9"/>
+          </a:solidFill>
+          <a:ln w="12700">
+            <a:solidFill>
+              <a:srgbClr val="E2E8F0"/>
+            </a:solidFill>
+            <a:prstDash val="solid"/>
+          </a:ln>
+        </p:spPr>
+      </p:sp>
+      <p:sp>
+        <p:nvSpPr>
+          <p:cNvPr id="6" name="Text 4"/>
+          <p:cNvSpPr/>
+          <p:nvPr/>
+        </p:nvSpPr>
+        <p:spPr>
+          <a:xfrm>
+            <a:off x="10332720" y="365760"/>
+            <a:ext cx="1097280" cy="384048"/>
+          </a:xfrm>
+          <a:prstGeom prst="rect">
+            <a:avLst/>
+          </a:prstGeom>
+          <a:noFill/>
+          <a:ln/>
+        </p:spPr>
+        <p:txBody>
+          <a:bodyPr wrap="square" rtlCol="0" anchor="ctr"/>
+          <a:lstStyle/>
+          <a:p>
+            <a:pPr algn="ctr" indent="0" marL="0">
+              <a:buNone/>
+            </a:pPr>
+            <a:r>
+              <a:rPr lang="en-US" sz="1100" b="1" dirty="0">
+                <a:solidFill>
+                  <a:srgbClr val="64748B"/>
+                </a:solidFill>
+                <a:latin typeface="Courier New" pitchFamily="34" charset="0"/>
+                <a:ea typeface="Courier New" pitchFamily="34" charset="-122"/>
+                <a:cs typeface="Courier New" pitchFamily="34" charset="-120"/>
+              </a:rPr>
+              <a:t>24 / 24</a:t>
             </a:r>
             <a:endParaRPr lang="en-US" sz="1100" dirty="0"/>
           </a:p>
@@ -17616,7 +18318,7 @@
                 <a:ea typeface="Courier New" pitchFamily="34" charset="-122"/>
                 <a:cs typeface="Courier New" pitchFamily="34" charset="-120"/>
               </a:rPr>
-              <a:t>03 / 23</a:t>
+              <a:t>03 / 24</a:t>
             </a:r>
             <a:endParaRPr lang="en-US" sz="1100" dirty="0"/>
           </a:p>
@@ -18170,7 +18872,7 @@
                 <a:ea typeface="Courier New" pitchFamily="34" charset="-122"/>
                 <a:cs typeface="Courier New" pitchFamily="34" charset="-120"/>
               </a:rPr>
-              <a:t>04 / 23</a:t>
+              <a:t>04 / 24</a:t>
             </a:r>
             <a:endParaRPr lang="en-US" sz="1100" dirty="0"/>
           </a:p>
@@ -18853,7 +19555,7 @@
                 <a:ea typeface="Courier New" pitchFamily="34" charset="-122"/>
                 <a:cs typeface="Courier New" pitchFamily="34" charset="-120"/>
               </a:rPr>
-              <a:t>05 / 23</a:t>
+              <a:t>05 / 24</a:t>
             </a:r>
             <a:endParaRPr lang="en-US" sz="1100" dirty="0"/>
           </a:p>
@@ -19265,7 +19967,7 @@
                 <a:ea typeface="Segoe UI" pitchFamily="34" charset="-122"/>
                 <a:cs typeface="Segoe UI" pitchFamily="34" charset="-120"/>
               </a:rPr>
-              <a:t>4. Serverless Workers
+              <a:t>4. Serverless Workers Link
 </a:t>
             </a:r>
             <a:pPr indent="0" marL="0">
@@ -19280,7 +19982,7 @@
                 <a:ea typeface="Segoe UI" pitchFamily="34" charset="-122"/>
                 <a:cs typeface="Segoe UI" pitchFamily="34" charset="-120"/>
               </a:rPr>
-              <a:t>Cloud Run Playwright Compositor + Meta Demucs v4 AI.</a:t>
+              <a:t>Cloud Pub/Sub (shine-render-jobs) dispatches to Playwright &amp; Demucs v4.</a:t>
             </a:r>
             <a:endParaRPr lang="en-US" sz="1200" dirty="0"/>
           </a:p>
@@ -19478,7 +20180,7 @@
                 <a:ea typeface="Courier New" pitchFamily="34" charset="-122"/>
                 <a:cs typeface="Courier New" pitchFamily="34" charset="-120"/>
               </a:rPr>
-              <a:t>PROTOCOL: REST (HTTPS) • SSE Progress Streams • MCP Protocols • 100% Google Cloud Native</a:t>
+              <a:t>WORKER BUS: Cloud Pub/Sub (shine-render-jobs) • REST/SSE • 100% Google Cloud Native</a:t>
             </a:r>
             <a:endParaRPr lang="en-US" sz="1050" dirty="0"/>
           </a:p>
@@ -19695,7 +20397,7 @@
                 <a:ea typeface="Courier New" pitchFamily="34" charset="-122"/>
                 <a:cs typeface="Courier New" pitchFamily="34" charset="-120"/>
               </a:rPr>
-              <a:t>06 / 23</a:t>
+              <a:t>06 / 24</a:t>
             </a:r>
             <a:endParaRPr lang="en-US" sz="1100" dirty="0"/>
           </a:p>
@@ -19734,7 +20436,7 @@
         </p:nvSpPr>
         <p:spPr>
           <a:xfrm>
-            <a:off x="731520" y="1097280"/>
+            <a:off x="731520" y="1051560"/>
             <a:ext cx="9144000" cy="320040"/>
           </a:xfrm>
           <a:prstGeom prst="rect">
@@ -19753,13 +20455,13 @@
             <a:r>
               <a:rPr lang="en-US" sz="1100" b="1" dirty="0">
                 <a:solidFill>
-                  <a:srgbClr val="64748B"/>
+                  <a:srgbClr val="059669"/>
                 </a:solidFill>
                 <a:latin typeface="Courier New" pitchFamily="34" charset="0"/>
                 <a:ea typeface="Courier New" pitchFamily="34" charset="-122"/>
                 <a:cs typeface="Courier New" pitchFamily="34" charset="-120"/>
               </a:rPr>
-              <a:t>LAYER 1: PRESENTATION (ACTIVE CORE)</a:t>
+              <a:t>END-TO-END EXECUTION FLOW</a:t>
             </a:r>
             <a:endParaRPr lang="en-US" sz="1100" dirty="0"/>
           </a:p>
@@ -19773,7 +20475,7 @@
         </p:nvSpPr>
         <p:spPr>
           <a:xfrm>
-            <a:off x="731520" y="1417320"/>
+            <a:off x="731520" y="1325880"/>
             <a:ext cx="10698480" cy="548640"/>
           </a:xfrm>
           <a:prstGeom prst="rect">
@@ -19798,7 +20500,7 @@
                 <a:ea typeface="Segoe UI" pitchFamily="34" charset="-122"/>
                 <a:cs typeface="Segoe UI" pitchFamily="34" charset="-120"/>
               </a:rPr>
-              <a:t>OpenVideo Pixi.js WebGL &amp; WebCodecs Engine</a:t>
+              <a:t>Agentic Micro-Drama Generation Pipeline Workflow</a:t>
             </a:r>
             <a:endParaRPr lang="en-US" sz="2600" dirty="0"/>
           </a:p>
@@ -19812,12 +20514,12 @@
         </p:nvSpPr>
         <p:spPr>
           <a:xfrm>
-            <a:off x="731520" y="2148840"/>
-            <a:ext cx="5212080" cy="3566160"/>
+            <a:off x="731520" y="1965960"/>
+            <a:ext cx="10698480" cy="3429000"/>
           </a:xfrm>
           <a:prstGeom prst="roundRect">
             <a:avLst>
-              <a:gd name="adj" fmla="val 2564"/>
+              <a:gd name="adj" fmla="val 2667"/>
             </a:avLst>
           </a:prstGeom>
           <a:solidFill>
@@ -19831,132 +20533,44 @@
           </a:ln>
         </p:spPr>
       </p:sp>
-      <p:sp>
-        <p:nvSpPr>
-          <p:cNvPr id="11" name="Text 9"/>
-          <p:cNvSpPr/>
-          <p:nvPr/>
-        </p:nvSpPr>
-        <p:spPr>
-          <a:xfrm>
-            <a:off x="1005840" y="2331720"/>
-            <a:ext cx="4663440" cy="3200400"/>
+      <p:pic>
+        <p:nvPicPr>
+          <p:cNvPr id="11" name="Image 0" descr="D:\Workspace\Gits\CamHub\openvideo\apps\shine\docs\assets\shine-agentic-pipeline-workflow.jpg">    </p:cNvPr>
+          <p:cNvPicPr>
+            <a:picLocks noChangeAspect="1"/>
+          </p:cNvPicPr>
+          <p:nvPr/>
+        </p:nvPicPr>
+        <p:blipFill>
+          <a:blip r:embed="rId1"/>
+          <a:stretch>
+            <a:fillRect/>
+          </a:stretch>
+        </p:blipFill>
+        <p:spPr>
+          <a:xfrm>
+            <a:off x="822960" y="2029968"/>
+            <a:ext cx="10515600" cy="3291840"/>
           </a:xfrm>
           <a:prstGeom prst="rect">
             <a:avLst/>
           </a:prstGeom>
-          <a:noFill/>
-          <a:ln/>
-        </p:spPr>
-        <p:txBody>
-          <a:bodyPr wrap="square" rtlCol="0" anchor="t"/>
-          <a:lstStyle/>
-          <a:p>
-            <a:pPr indent="0" marL="0">
-              <a:buNone/>
-            </a:pPr>
-            <a:r>
-              <a:rPr lang="en-US" sz="1500" b="1" dirty="0">
-                <a:solidFill>
-                  <a:srgbClr val="0F172A"/>
-                </a:solidFill>
-                <a:latin typeface="Segoe UI" pitchFamily="34" charset="0"/>
-                <a:ea typeface="Segoe UI" pitchFamily="34" charset="-122"/>
-                <a:cs typeface="Segoe UI" pitchFamily="34" charset="-120"/>
-              </a:rPr>
-              <a:t>1. Real-Time WebGL Compositor (Pixi.js v8)
-</a:t>
-            </a:r>
-            <a:pPr indent="0" marL="0">
-              <a:lnSpc>
-                <a:spcPct val="120000"/>
-              </a:lnSpc>
-              <a:buNone/>
-            </a:pPr>
-            <a:r>
-              <a:rPr lang="en-US" sz="1250" dirty="0">
-                <a:solidFill>
-                  <a:srgbClr val="64748B"/>
-                </a:solidFill>
-                <a:latin typeface="Segoe UI" pitchFamily="34" charset="0"/>
-                <a:ea typeface="Segoe UI" pitchFamily="34" charset="-122"/>
-                <a:cs typeface="Segoe UI" pitchFamily="34" charset="-120"/>
-              </a:rPr>
-              <a:t>The browser viewport renders 9:16 vertical frames at &gt;= 30 FPS using client GPU hardware.
-</a:t>
-            </a:r>
-            <a:pPr indent="0" marL="0">
-              <a:lnSpc>
-                <a:spcPct val="120000"/>
-              </a:lnSpc>
-              <a:buNone/>
-            </a:pPr>
-            <a:r>
-              <a:rPr lang="en-US" sz="1200" dirty="0">
-                <a:solidFill>
-                  <a:srgbClr val="334155"/>
-                </a:solidFill>
-                <a:latin typeface="Segoe UI" pitchFamily="34" charset="0"/>
-                <a:ea typeface="Segoe UI" pitchFamily="34" charset="-122"/>
-                <a:cs typeface="Segoe UI" pitchFamily="34" charset="-120"/>
-              </a:rPr>
-              <a:t>• Zero-Render Preview: Scrub playhead across buffers with 0ms cloud latency.
-</a:t>
-            </a:r>
-            <a:pPr indent="0" marL="0">
-              <a:lnSpc>
-                <a:spcPct val="120000"/>
-              </a:lnSpc>
-              <a:buNone/>
-            </a:pPr>
-            <a:r>
-              <a:rPr lang="en-US" sz="1200" dirty="0">
-                <a:solidFill>
-                  <a:srgbClr val="334155"/>
-                </a:solidFill>
-                <a:latin typeface="Segoe UI" pitchFamily="34" charset="0"/>
-                <a:ea typeface="Segoe UI" pitchFamily="34" charset="-122"/>
-                <a:cs typeface="Segoe UI" pitchFamily="34" charset="-120"/>
-              </a:rPr>
-              <a:t>• GLSL Fragment Shaders: Real-time chroma keying &amp; color grading.
-</a:t>
-            </a:r>
-            <a:pPr indent="0" marL="0">
-              <a:lnSpc>
-                <a:spcPct val="120000"/>
-              </a:lnSpc>
-              <a:buNone/>
-            </a:pPr>
-            <a:r>
-              <a:rPr lang="en-US" sz="1200" dirty="0">
-                <a:solidFill>
-                  <a:srgbClr val="334155"/>
-                </a:solidFill>
-                <a:latin typeface="Segoe UI" pitchFamily="34" charset="0"/>
-                <a:ea typeface="Segoe UI" pitchFamily="34" charset="-122"/>
-                <a:cs typeface="Segoe UI" pitchFamily="34" charset="-120"/>
-              </a:rPr>
-              <a:t>• Microsecond Timeline Model: Sub-millisecond timing precision (1s = 1,000,000µs).
-</a:t>
-            </a:r>
-            <a:endParaRPr lang="en-US" sz="1500" dirty="0"/>
-          </a:p>
-        </p:txBody>
-      </p:sp>
-      <p:sp>
-        <p:nvSpPr>
-          <p:cNvPr id="12" name="Shape 10"/>
-          <p:cNvSpPr/>
-          <p:nvPr/>
-        </p:nvSpPr>
-        <p:spPr>
-          <a:xfrm>
-            <a:off x="6217920" y="2148840"/>
-            <a:ext cx="5212080" cy="3566160"/>
+        </p:spPr>
+      </p:pic>
+      <p:sp>
+        <p:nvSpPr>
+          <p:cNvPr id="12" name="Shape 9"/>
+          <p:cNvSpPr/>
+          <p:nvPr/>
+        </p:nvSpPr>
+        <p:spPr>
+          <a:xfrm>
+            <a:off x="731520" y="5532120"/>
+            <a:ext cx="1463040" cy="868680"/>
           </a:xfrm>
           <a:prstGeom prst="roundRect">
             <a:avLst>
-              <a:gd name="adj" fmla="val 2564"/>
+              <a:gd name="adj" fmla="val 8421"/>
             </a:avLst>
           </a:prstGeom>
           <a:solidFill>
@@ -19972,14 +20586,14 @@
       </p:sp>
       <p:sp>
         <p:nvSpPr>
-          <p:cNvPr id="13" name="Text 11"/>
-          <p:cNvSpPr/>
-          <p:nvPr/>
-        </p:nvSpPr>
-        <p:spPr>
-          <a:xfrm>
-            <a:off x="6492240" y="2331720"/>
-            <a:ext cx="4663440" cy="3200400"/>
+          <p:cNvPr id="13" name="Text 10"/>
+          <p:cNvSpPr/>
+          <p:nvPr/>
+        </p:nvSpPr>
+        <p:spPr>
+          <a:xfrm>
+            <a:off x="804672" y="5596128"/>
+            <a:ext cx="1316736" cy="731520"/>
           </a:xfrm>
           <a:prstGeom prst="rect">
             <a:avLst/>
@@ -19988,14 +20602,14 @@
           <a:ln/>
         </p:spPr>
         <p:txBody>
-          <a:bodyPr wrap="square" rtlCol="0" anchor="t"/>
-          <a:lstStyle/>
-          <a:p>
-            <a:pPr indent="0" marL="0">
-              <a:buNone/>
-            </a:pPr>
-            <a:r>
-              <a:rPr lang="en-US" sz="1500" b="1" dirty="0">
+          <a:bodyPr wrap="square" rtlCol="0" anchor="ctr"/>
+          <a:lstStyle/>
+          <a:p>
+            <a:pPr algn="ctr" indent="0" marL="0">
+              <a:buNone/>
+            </a:pPr>
+            <a:r>
+              <a:rPr lang="en-US" sz="1000" b="1" dirty="0">
                 <a:solidFill>
                   <a:srgbClr val="0F172A"/>
                 </a:solidFill>
@@ -20003,17 +20617,14 @@
                 <a:ea typeface="Segoe UI" pitchFamily="34" charset="-122"/>
                 <a:cs typeface="Segoe UI" pitchFamily="34" charset="-120"/>
               </a:rPr>
-              <a:t>2. In-Browser Export (WebCodecs API)
+              <a:t>1. Viral Trend
 </a:t>
             </a:r>
-            <a:pPr indent="0" marL="0">
-              <a:lnSpc>
-                <a:spcPct val="120000"/>
-              </a:lnSpc>
-              <a:buNone/>
-            </a:pPr>
-            <a:r>
-              <a:rPr lang="en-US" sz="1250" dirty="0">
+            <a:pPr algn="ctr" indent="0" marL="0">
+              <a:buNone/>
+            </a:pPr>
+            <a:r>
+              <a:rPr lang="en-US" sz="900" dirty="0">
                 <a:solidFill>
                   <a:srgbClr val="64748B"/>
                 </a:solidFill>
@@ -20021,64 +20632,495 @@
                 <a:ea typeface="Segoe UI" pitchFamily="34" charset="-122"/>
                 <a:cs typeface="Segoe UI" pitchFamily="34" charset="-120"/>
               </a:rPr>
-              <a:t>Renders MP4 video directly on the user computer via hardware-accelerated WebCodecs (mediabunny).
+              <a:t>Parallel MCP</a:t>
+            </a:r>
+            <a:endParaRPr lang="en-US" sz="1000" dirty="0"/>
+          </a:p>
+        </p:txBody>
+      </p:sp>
+      <p:sp>
+        <p:nvSpPr>
+          <p:cNvPr id="14" name="Shape 11"/>
+          <p:cNvSpPr/>
+          <p:nvPr/>
+        </p:nvSpPr>
+        <p:spPr>
+          <a:xfrm>
+            <a:off x="2276856" y="5532120"/>
+            <a:ext cx="1463040" cy="868680"/>
+          </a:xfrm>
+          <a:prstGeom prst="roundRect">
+            <a:avLst>
+              <a:gd name="adj" fmla="val 8421"/>
+            </a:avLst>
+          </a:prstGeom>
+          <a:solidFill>
+            <a:srgbClr val="FFFFFF"/>
+          </a:solidFill>
+          <a:ln w="12700">
+            <a:solidFill>
+              <a:srgbClr val="E2E8F0"/>
+            </a:solidFill>
+            <a:prstDash val="solid"/>
+          </a:ln>
+        </p:spPr>
+      </p:sp>
+      <p:sp>
+        <p:nvSpPr>
+          <p:cNvPr id="15" name="Text 12"/>
+          <p:cNvSpPr/>
+          <p:nvPr/>
+        </p:nvSpPr>
+        <p:spPr>
+          <a:xfrm>
+            <a:off x="2350008" y="5596128"/>
+            <a:ext cx="1316736" cy="731520"/>
+          </a:xfrm>
+          <a:prstGeom prst="rect">
+            <a:avLst/>
+          </a:prstGeom>
+          <a:noFill/>
+          <a:ln/>
+        </p:spPr>
+        <p:txBody>
+          <a:bodyPr wrap="square" rtlCol="0" anchor="ctr"/>
+          <a:lstStyle/>
+          <a:p>
+            <a:pPr algn="ctr" indent="0" marL="0">
+              <a:buNone/>
+            </a:pPr>
+            <a:r>
+              <a:rPr lang="en-US" sz="1000" b="1" dirty="0">
+                <a:solidFill>
+                  <a:srgbClr val="0F172A"/>
+                </a:solidFill>
+                <a:latin typeface="Segoe UI" pitchFamily="34" charset="0"/>
+                <a:ea typeface="Segoe UI" pitchFamily="34" charset="-122"/>
+                <a:cs typeface="Segoe UI" pitchFamily="34" charset="-120"/>
+              </a:rPr>
+              <a:t>2. Master Plan
 </a:t>
             </a:r>
-            <a:pPr indent="0" marL="0">
-              <a:lnSpc>
-                <a:spcPct val="120000"/>
-              </a:lnSpc>
-              <a:buNone/>
-            </a:pPr>
-            <a:r>
-              <a:rPr lang="en-US" sz="1200" dirty="0">
-                <a:solidFill>
-                  <a:srgbClr val="334155"/>
-                </a:solidFill>
-                <a:latin typeface="Segoe UI" pitchFamily="34" charset="0"/>
-                <a:ea typeface="Segoe UI" pitchFamily="34" charset="-122"/>
-                <a:cs typeface="Segoe UI" pitchFamily="34" charset="-120"/>
-              </a:rPr>
-              <a:t>• Zero Server Cost ($0): 100% computed on client device.
+            <a:pPr algn="ctr" indent="0" marL="0">
+              <a:buNone/>
+            </a:pPr>
+            <a:r>
+              <a:rPr lang="en-US" sz="900" dirty="0">
+                <a:solidFill>
+                  <a:srgbClr val="64748B"/>
+                </a:solidFill>
+                <a:latin typeface="Segoe UI" pitchFamily="34" charset="0"/>
+                <a:ea typeface="Segoe UI" pitchFamily="34" charset="-122"/>
+                <a:cs typeface="Segoe UI" pitchFamily="34" charset="-120"/>
+              </a:rPr>
+              <a:t>StorySkeleton</a:t>
+            </a:r>
+            <a:endParaRPr lang="en-US" sz="1000" dirty="0"/>
+          </a:p>
+        </p:txBody>
+      </p:sp>
+      <p:sp>
+        <p:nvSpPr>
+          <p:cNvPr id="16" name="Shape 13"/>
+          <p:cNvSpPr/>
+          <p:nvPr/>
+        </p:nvSpPr>
+        <p:spPr>
+          <a:xfrm>
+            <a:off x="3822192" y="5532120"/>
+            <a:ext cx="1463040" cy="868680"/>
+          </a:xfrm>
+          <a:prstGeom prst="roundRect">
+            <a:avLst>
+              <a:gd name="adj" fmla="val 8421"/>
+            </a:avLst>
+          </a:prstGeom>
+          <a:solidFill>
+            <a:srgbClr val="FFFFFF"/>
+          </a:solidFill>
+          <a:ln w="12700">
+            <a:solidFill>
+              <a:srgbClr val="E2E8F0"/>
+            </a:solidFill>
+            <a:prstDash val="solid"/>
+          </a:ln>
+        </p:spPr>
+      </p:sp>
+      <p:sp>
+        <p:nvSpPr>
+          <p:cNvPr id="17" name="Text 14"/>
+          <p:cNvSpPr/>
+          <p:nvPr/>
+        </p:nvSpPr>
+        <p:spPr>
+          <a:xfrm>
+            <a:off x="3895344" y="5596128"/>
+            <a:ext cx="1316736" cy="731520"/>
+          </a:xfrm>
+          <a:prstGeom prst="rect">
+            <a:avLst/>
+          </a:prstGeom>
+          <a:noFill/>
+          <a:ln/>
+        </p:spPr>
+        <p:txBody>
+          <a:bodyPr wrap="square" rtlCol="0" anchor="ctr"/>
+          <a:lstStyle/>
+          <a:p>
+            <a:pPr algn="ctr" indent="0" marL="0">
+              <a:buNone/>
+            </a:pPr>
+            <a:r>
+              <a:rPr lang="en-US" sz="1000" b="1" dirty="0">
+                <a:solidFill>
+                  <a:srgbClr val="0F172A"/>
+                </a:solidFill>
+                <a:latin typeface="Segoe UI" pitchFamily="34" charset="0"/>
+                <a:ea typeface="Segoe UI" pitchFamily="34" charset="-122"/>
+                <a:cs typeface="Segoe UI" pitchFamily="34" charset="-120"/>
+              </a:rPr>
+              <a:t>3. Compliance
 </a:t>
             </a:r>
-            <a:pPr indent="0" marL="0">
-              <a:lnSpc>
-                <a:spcPct val="120000"/>
-              </a:lnSpc>
-              <a:buNone/>
-            </a:pPr>
-            <a:r>
-              <a:rPr lang="en-US" sz="1200" dirty="0">
-                <a:solidFill>
-                  <a:srgbClr val="334155"/>
-                </a:solidFill>
-                <a:latin typeface="Segoe UI" pitchFamily="34" charset="0"/>
-                <a:ea typeface="Segoe UI" pitchFamily="34" charset="-122"/>
-                <a:cs typeface="Segoe UI" pitchFamily="34" charset="-120"/>
-              </a:rPr>
-              <a:t>• Lightning Speed: Encodes a 90s 1080p episode in ~12 seconds.
+            <a:pPr algn="ctr" indent="0" marL="0">
+              <a:buNone/>
+            </a:pPr>
+            <a:r>
+              <a:rPr lang="en-US" sz="900" dirty="0">
+                <a:solidFill>
+                  <a:srgbClr val="64748B"/>
+                </a:solidFill>
+                <a:latin typeface="Segoe UI" pitchFamily="34" charset="0"/>
+                <a:ea typeface="Segoe UI" pitchFamily="34" charset="-122"/>
+                <a:cs typeface="Segoe UI" pitchFamily="34" charset="-120"/>
+              </a:rPr>
+              <a:t>Supervision</a:t>
+            </a:r>
+            <a:endParaRPr lang="en-US" sz="1000" dirty="0"/>
+          </a:p>
+        </p:txBody>
+      </p:sp>
+      <p:sp>
+        <p:nvSpPr>
+          <p:cNvPr id="18" name="Shape 15"/>
+          <p:cNvSpPr/>
+          <p:nvPr/>
+        </p:nvSpPr>
+        <p:spPr>
+          <a:xfrm>
+            <a:off x="5367528" y="5532120"/>
+            <a:ext cx="1463040" cy="868680"/>
+          </a:xfrm>
+          <a:prstGeom prst="roundRect">
+            <a:avLst>
+              <a:gd name="adj" fmla="val 8421"/>
+            </a:avLst>
+          </a:prstGeom>
+          <a:solidFill>
+            <a:srgbClr val="FFFFFF"/>
+          </a:solidFill>
+          <a:ln w="12700">
+            <a:solidFill>
+              <a:srgbClr val="E2E8F0"/>
+            </a:solidFill>
+            <a:prstDash val="solid"/>
+          </a:ln>
+        </p:spPr>
+      </p:sp>
+      <p:sp>
+        <p:nvSpPr>
+          <p:cNvPr id="19" name="Text 16"/>
+          <p:cNvSpPr/>
+          <p:nvPr/>
+        </p:nvSpPr>
+        <p:spPr>
+          <a:xfrm>
+            <a:off x="5440680" y="5596128"/>
+            <a:ext cx="1316736" cy="731520"/>
+          </a:xfrm>
+          <a:prstGeom prst="rect">
+            <a:avLst/>
+          </a:prstGeom>
+          <a:noFill/>
+          <a:ln/>
+        </p:spPr>
+        <p:txBody>
+          <a:bodyPr wrap="square" rtlCol="0" anchor="ctr"/>
+          <a:lstStyle/>
+          <a:p>
+            <a:pPr algn="ctr" indent="0" marL="0">
+              <a:buNone/>
+            </a:pPr>
+            <a:r>
+              <a:rPr lang="en-US" sz="1000" b="1" dirty="0">
+                <a:solidFill>
+                  <a:srgbClr val="0F172A"/>
+                </a:solidFill>
+                <a:latin typeface="Segoe UI" pitchFamily="34" charset="0"/>
+                <a:ea typeface="Segoe UI" pitchFamily="34" charset="-122"/>
+                <a:cs typeface="Segoe UI" pitchFamily="34" charset="-120"/>
+              </a:rPr>
+              <a:t>4. Breakdown
 </a:t>
             </a:r>
-            <a:pPr indent="0" marL="0">
-              <a:lnSpc>
-                <a:spcPct val="120000"/>
-              </a:lnSpc>
-              <a:buNone/>
-            </a:pPr>
-            <a:r>
-              <a:rPr lang="en-US" sz="1200" dirty="0">
-                <a:solidFill>
-                  <a:srgbClr val="334155"/>
-                </a:solidFill>
-                <a:latin typeface="Segoe UI" pitchFamily="34" charset="0"/>
-                <a:ea typeface="Segoe UI" pitchFamily="34" charset="-122"/>
-                <a:cs typeface="Segoe UI" pitchFamily="34" charset="-120"/>
-              </a:rPr>
-              <a:t>• In-Memory ISOBMFF Muxing: Assembles MP4 container in memory.
+            <a:pPr algn="ctr" indent="0" marL="0">
+              <a:buNone/>
+            </a:pPr>
+            <a:r>
+              <a:rPr lang="en-US" sz="900" dirty="0">
+                <a:solidFill>
+                  <a:srgbClr val="64748B"/>
+                </a:solidFill>
+                <a:latin typeface="Segoe UI" pitchFamily="34" charset="0"/>
+                <a:ea typeface="Segoe UI" pitchFamily="34" charset="-122"/>
+                <a:cs typeface="Segoe UI" pitchFamily="34" charset="-120"/>
+              </a:rPr>
+              <a:t>ScriptAgent</a:t>
+            </a:r>
+            <a:endParaRPr lang="en-US" sz="1000" dirty="0"/>
+          </a:p>
+        </p:txBody>
+      </p:sp>
+      <p:sp>
+        <p:nvSpPr>
+          <p:cNvPr id="20" name="Shape 17"/>
+          <p:cNvSpPr/>
+          <p:nvPr/>
+        </p:nvSpPr>
+        <p:spPr>
+          <a:xfrm>
+            <a:off x="6912864" y="5532120"/>
+            <a:ext cx="1463040" cy="868680"/>
+          </a:xfrm>
+          <a:prstGeom prst="roundRect">
+            <a:avLst>
+              <a:gd name="adj" fmla="val 8421"/>
+            </a:avLst>
+          </a:prstGeom>
+          <a:solidFill>
+            <a:srgbClr val="ECFDF5"/>
+          </a:solidFill>
+          <a:ln w="12700">
+            <a:solidFill>
+              <a:srgbClr val="A7F3D0"/>
+            </a:solidFill>
+            <a:prstDash val="solid"/>
+          </a:ln>
+        </p:spPr>
+      </p:sp>
+      <p:sp>
+        <p:nvSpPr>
+          <p:cNvPr id="21" name="Text 18"/>
+          <p:cNvSpPr/>
+          <p:nvPr/>
+        </p:nvSpPr>
+        <p:spPr>
+          <a:xfrm>
+            <a:off x="6986016" y="5596128"/>
+            <a:ext cx="1316736" cy="731520"/>
+          </a:xfrm>
+          <a:prstGeom prst="rect">
+            <a:avLst/>
+          </a:prstGeom>
+          <a:noFill/>
+          <a:ln/>
+        </p:spPr>
+        <p:txBody>
+          <a:bodyPr wrap="square" rtlCol="0" anchor="ctr"/>
+          <a:lstStyle/>
+          <a:p>
+            <a:pPr algn="ctr" indent="0" marL="0">
+              <a:buNone/>
+            </a:pPr>
+            <a:r>
+              <a:rPr lang="en-US" sz="1000" b="1" dirty="0">
+                <a:solidFill>
+                  <a:srgbClr val="065F46"/>
+                </a:solidFill>
+                <a:latin typeface="Segoe UI" pitchFamily="34" charset="0"/>
+                <a:ea typeface="Segoe UI" pitchFamily="34" charset="-122"/>
+                <a:cs typeface="Segoe UI" pitchFamily="34" charset="-120"/>
+              </a:rPr>
+              <a:t>5. Gen B1–B6
 </a:t>
             </a:r>
-            <a:endParaRPr lang="en-US" sz="1500" dirty="0"/>
+            <a:pPr algn="ctr" indent="0" marL="0">
+              <a:buNone/>
+            </a:pPr>
+            <a:r>
+              <a:rPr lang="en-US" sz="900" dirty="0">
+                <a:solidFill>
+                  <a:srgbClr val="047857"/>
+                </a:solidFill>
+                <a:latin typeface="Segoe UI" pitchFamily="34" charset="0"/>
+                <a:ea typeface="Segoe UI" pitchFamily="34" charset="-122"/>
+                <a:cs typeface="Segoe UI" pitchFamily="34" charset="-120"/>
+              </a:rPr>
+              <a:t>Persona/Veo/TTS</a:t>
+            </a:r>
+            <a:endParaRPr lang="en-US" sz="1000" dirty="0"/>
+          </a:p>
+        </p:txBody>
+      </p:sp>
+      <p:sp>
+        <p:nvSpPr>
+          <p:cNvPr id="22" name="Shape 19"/>
+          <p:cNvSpPr/>
+          <p:nvPr/>
+        </p:nvSpPr>
+        <p:spPr>
+          <a:xfrm>
+            <a:off x="8458200" y="5532120"/>
+            <a:ext cx="1463040" cy="868680"/>
+          </a:xfrm>
+          <a:prstGeom prst="roundRect">
+            <a:avLst>
+              <a:gd name="adj" fmla="val 8421"/>
+            </a:avLst>
+          </a:prstGeom>
+          <a:solidFill>
+            <a:srgbClr val="FFFFFF"/>
+          </a:solidFill>
+          <a:ln w="12700">
+            <a:solidFill>
+              <a:srgbClr val="E2E8F0"/>
+            </a:solidFill>
+            <a:prstDash val="solid"/>
+          </a:ln>
+        </p:spPr>
+      </p:sp>
+      <p:sp>
+        <p:nvSpPr>
+          <p:cNvPr id="23" name="Text 20"/>
+          <p:cNvSpPr/>
+          <p:nvPr/>
+        </p:nvSpPr>
+        <p:spPr>
+          <a:xfrm>
+            <a:off x="8531352" y="5596128"/>
+            <a:ext cx="1316736" cy="731520"/>
+          </a:xfrm>
+          <a:prstGeom prst="rect">
+            <a:avLst/>
+          </a:prstGeom>
+          <a:noFill/>
+          <a:ln/>
+        </p:spPr>
+        <p:txBody>
+          <a:bodyPr wrap="square" rtlCol="0" anchor="ctr"/>
+          <a:lstStyle/>
+          <a:p>
+            <a:pPr algn="ctr" indent="0" marL="0">
+              <a:buNone/>
+            </a:pPr>
+            <a:r>
+              <a:rPr lang="en-US" sz="1000" b="1" dirty="0">
+                <a:solidFill>
+                  <a:srgbClr val="0F172A"/>
+                </a:solidFill>
+                <a:latin typeface="Segoe UI" pitchFamily="34" charset="0"/>
+                <a:ea typeface="Segoe UI" pitchFamily="34" charset="-122"/>
+                <a:cs typeface="Segoe UI" pitchFamily="34" charset="-120"/>
+              </a:rPr>
+              <a:t>6. Rendering
+</a:t>
+            </a:r>
+            <a:pPr algn="ctr" indent="0" marL="0">
+              <a:buNone/>
+            </a:pPr>
+            <a:r>
+              <a:rPr lang="en-US" sz="900" dirty="0">
+                <a:solidFill>
+                  <a:srgbClr val="64748B"/>
+                </a:solidFill>
+                <a:latin typeface="Segoe UI" pitchFamily="34" charset="0"/>
+                <a:ea typeface="Segoe UI" pitchFamily="34" charset="-122"/>
+                <a:cs typeface="Segoe UI" pitchFamily="34" charset="-120"/>
+              </a:rPr>
+              <a:t>WebCodecs/Run</a:t>
+            </a:r>
+            <a:endParaRPr lang="en-US" sz="1000" dirty="0"/>
+          </a:p>
+        </p:txBody>
+      </p:sp>
+      <p:sp>
+        <p:nvSpPr>
+          <p:cNvPr id="24" name="Shape 21"/>
+          <p:cNvSpPr/>
+          <p:nvPr/>
+        </p:nvSpPr>
+        <p:spPr>
+          <a:xfrm>
+            <a:off x="10003536" y="5532120"/>
+            <a:ext cx="1463040" cy="868680"/>
+          </a:xfrm>
+          <a:prstGeom prst="roundRect">
+            <a:avLst>
+              <a:gd name="adj" fmla="val 8421"/>
+            </a:avLst>
+          </a:prstGeom>
+          <a:solidFill>
+            <a:srgbClr val="FFFFFF"/>
+          </a:solidFill>
+          <a:ln w="12700">
+            <a:solidFill>
+              <a:srgbClr val="E2E8F0"/>
+            </a:solidFill>
+            <a:prstDash val="solid"/>
+          </a:ln>
+        </p:spPr>
+      </p:sp>
+      <p:sp>
+        <p:nvSpPr>
+          <p:cNvPr id="25" name="Text 22"/>
+          <p:cNvSpPr/>
+          <p:nvPr/>
+        </p:nvSpPr>
+        <p:spPr>
+          <a:xfrm>
+            <a:off x="10076688" y="5596128"/>
+            <a:ext cx="1316736" cy="731520"/>
+          </a:xfrm>
+          <a:prstGeom prst="rect">
+            <a:avLst/>
+          </a:prstGeom>
+          <a:noFill/>
+          <a:ln/>
+        </p:spPr>
+        <p:txBody>
+          <a:bodyPr wrap="square" rtlCol="0" anchor="ctr"/>
+          <a:lstStyle/>
+          <a:p>
+            <a:pPr algn="ctr" indent="0" marL="0">
+              <a:buNone/>
+            </a:pPr>
+            <a:r>
+              <a:rPr lang="en-US" sz="1000" b="1" dirty="0">
+                <a:solidFill>
+                  <a:srgbClr val="0F172A"/>
+                </a:solidFill>
+                <a:latin typeface="Segoe UI" pitchFamily="34" charset="0"/>
+                <a:ea typeface="Segoe UI" pitchFamily="34" charset="-122"/>
+                <a:cs typeface="Segoe UI" pitchFamily="34" charset="-120"/>
+              </a:rPr>
+              <a:t>7. Publish
+</a:t>
+            </a:r>
+            <a:pPr algn="ctr" indent="0" marL="0">
+              <a:buNone/>
+            </a:pPr>
+            <a:r>
+              <a:rPr lang="en-US" sz="900" dirty="0">
+                <a:solidFill>
+                  <a:srgbClr val="64748B"/>
+                </a:solidFill>
+                <a:latin typeface="Segoe UI" pitchFamily="34" charset="0"/>
+                <a:ea typeface="Segoe UI" pitchFamily="34" charset="-122"/>
+                <a:cs typeface="Segoe UI" pitchFamily="34" charset="-120"/>
+              </a:rPr>
+              <a:t>TikTok/Shorts</a:t>
+            </a:r>
+            <a:endParaRPr lang="en-US" sz="1000" dirty="0"/>
           </a:p>
         </p:txBody>
       </p:sp>
@@ -20293,7 +21335,7 @@
                 <a:ea typeface="Courier New" pitchFamily="34" charset="-122"/>
                 <a:cs typeface="Courier New" pitchFamily="34" charset="-120"/>
               </a:rPr>
-              <a:t>07 / 23</a:t>
+              <a:t>07 / 24</a:t>
             </a:r>
             <a:endParaRPr lang="en-US" sz="1100" dirty="0"/>
           </a:p>
@@ -20357,7 +21399,7 @@
                 <a:ea typeface="Courier New" pitchFamily="34" charset="-122"/>
                 <a:cs typeface="Courier New" pitchFamily="34" charset="-120"/>
               </a:rPr>
-              <a:t>PLANNED ROADMAP SPECIFICATION (PHASE 2)</a:t>
+              <a:t>LAYER 1: PRESENTATION (ACTIVE CORE)</a:t>
             </a:r>
             <a:endParaRPr lang="en-US" sz="1100" dirty="0"/>
           </a:p>
@@ -20396,7 +21438,7 @@
                 <a:ea typeface="Segoe UI" pitchFamily="34" charset="-122"/>
                 <a:cs typeface="Segoe UI" pitchFamily="34" charset="-120"/>
               </a:rPr>
-              <a:t>Real-Time Team Collaboration Architecture</a:t>
+              <a:t>OpenVideo Pixi.js WebGL &amp; WebCodecs Engine</a:t>
             </a:r>
             <a:endParaRPr lang="en-US" sz="2600" dirty="0"/>
           </a:p>
@@ -20462,7 +21504,7 @@
                 <a:ea typeface="Segoe UI" pitchFamily="34" charset="-122"/>
                 <a:cs typeface="Segoe UI" pitchFamily="34" charset="-120"/>
               </a:rPr>
-              <a:t>Delta Patch Protocol (PatchSyncService)
+              <a:t>1. Real-Time WebGL Compositor (Pixi.js v8)
 </a:t>
             </a:r>
             <a:pPr indent="0" marL="0">
@@ -20480,113 +21522,62 @@
                 <a:ea typeface="Segoe UI" pitchFamily="34" charset="-122"/>
                 <a:cs typeface="Segoe UI" pitchFamily="34" charset="-120"/>
               </a:rPr>
-              <a:t>Designed to broadcast atomic RFC 6902 delta patches (&lt;1KB) over Socket.io instead of heavy 500KB blobs:
+              <a:t>The browser viewport renders 9:16 vertical frames at &gt;= 30 FPS using client GPU hardware.
 </a:t>
             </a:r>
             <a:pPr indent="0" marL="0">
-              <a:buNone/>
-            </a:pPr>
-            <a:endParaRPr lang="en-US" sz="1500" dirty="0"/>
-          </a:p>
-          <a:p>
-            <a:pPr indent="0" marL="0">
-              <a:buNone/>
-            </a:pPr>
-            <a:r>
-              <a:rPr lang="en-US" sz="1100" dirty="0">
-                <a:solidFill>
-                  <a:srgbClr val="0F172A"/>
-                </a:solidFill>
-                <a:latin typeface="Courier New" pitchFamily="34" charset="0"/>
-                <a:ea typeface="Courier New" pitchFamily="34" charset="-122"/>
-                <a:cs typeface="Courier New" pitchFamily="34" charset="-120"/>
-              </a:rPr>
-              <a:t>{</a:t>
-            </a:r>
-            <a:endParaRPr lang="en-US" sz="1500" dirty="0"/>
-          </a:p>
-          <a:p>
-            <a:pPr indent="0" marL="0">
-              <a:buNone/>
-            </a:pPr>
-            <a:r>
-              <a:rPr lang="en-US" sz="1100" dirty="0">
-                <a:solidFill>
-                  <a:srgbClr val="0F172A"/>
-                </a:solidFill>
-                <a:latin typeface="Courier New" pitchFamily="34" charset="0"/>
-                <a:ea typeface="Courier New" pitchFamily="34" charset="-122"/>
-                <a:cs typeface="Courier New" pitchFamily="34" charset="-120"/>
-              </a:rPr>
-              <a:t>  "op": "update",</a:t>
-            </a:r>
-            <a:endParaRPr lang="en-US" sz="1500" dirty="0"/>
-          </a:p>
-          <a:p>
-            <a:pPr indent="0" marL="0">
-              <a:buNone/>
-            </a:pPr>
-            <a:r>
-              <a:rPr lang="en-US" sz="1100" dirty="0">
-                <a:solidFill>
-                  <a:srgbClr val="0F172A"/>
-                </a:solidFill>
-                <a:latin typeface="Courier New" pitchFamily="34" charset="0"/>
-                <a:ea typeface="Courier New" pitchFamily="34" charset="-122"/>
-                <a:cs typeface="Courier New" pitchFamily="34" charset="-120"/>
-              </a:rPr>
-              <a:t>  "path": "/clips/clip_01/timing/display/to",</a:t>
-            </a:r>
-            <a:endParaRPr lang="en-US" sz="1500" dirty="0"/>
-          </a:p>
-          <a:p>
-            <a:pPr indent="0" marL="0">
-              <a:buNone/>
-            </a:pPr>
-            <a:r>
-              <a:rPr lang="en-US" sz="1100" dirty="0">
-                <a:solidFill>
-                  <a:srgbClr val="0F172A"/>
-                </a:solidFill>
-                <a:latin typeface="Courier New" pitchFamily="34" charset="0"/>
-                <a:ea typeface="Courier New" pitchFamily="34" charset="-122"/>
-                <a:cs typeface="Courier New" pitchFamily="34" charset="-120"/>
-              </a:rPr>
-              <a:t>  "value": 4500000,</a:t>
-            </a:r>
-            <a:endParaRPr lang="en-US" sz="1500" dirty="0"/>
-          </a:p>
-          <a:p>
-            <a:pPr indent="0" marL="0">
-              <a:buNone/>
-            </a:pPr>
-            <a:r>
-              <a:rPr lang="en-US" sz="1100" dirty="0">
-                <a:solidFill>
-                  <a:srgbClr val="0F172A"/>
-                </a:solidFill>
-                <a:latin typeface="Courier New" pitchFamily="34" charset="0"/>
-                <a:ea typeface="Courier New" pitchFamily="34" charset="-122"/>
-                <a:cs typeface="Courier New" pitchFamily="34" charset="-120"/>
-              </a:rPr>
-              <a:t>  "author": "usr_sarah"</a:t>
-            </a:r>
-            <a:endParaRPr lang="en-US" sz="1500" dirty="0"/>
-          </a:p>
-          <a:p>
-            <a:pPr indent="0" marL="0">
-              <a:buNone/>
-            </a:pPr>
-            <a:r>
-              <a:rPr lang="en-US" sz="1100" dirty="0">
-                <a:solidFill>
-                  <a:srgbClr val="0F172A"/>
-                </a:solidFill>
-                <a:latin typeface="Courier New" pitchFamily="34" charset="0"/>
-                <a:ea typeface="Courier New" pitchFamily="34" charset="-122"/>
-                <a:cs typeface="Courier New" pitchFamily="34" charset="-120"/>
-              </a:rPr>
-              <a:t>}</a:t>
+              <a:lnSpc>
+                <a:spcPct val="120000"/>
+              </a:lnSpc>
+              <a:buNone/>
+            </a:pPr>
+            <a:r>
+              <a:rPr lang="en-US" sz="1200" dirty="0">
+                <a:solidFill>
+                  <a:srgbClr val="334155"/>
+                </a:solidFill>
+                <a:latin typeface="Segoe UI" pitchFamily="34" charset="0"/>
+                <a:ea typeface="Segoe UI" pitchFamily="34" charset="-122"/>
+                <a:cs typeface="Segoe UI" pitchFamily="34" charset="-120"/>
+              </a:rPr>
+              <a:t>• Zero-Render Preview: Scrub playhead across buffers with 0ms cloud latency.
+</a:t>
+            </a:r>
+            <a:pPr indent="0" marL="0">
+              <a:lnSpc>
+                <a:spcPct val="120000"/>
+              </a:lnSpc>
+              <a:buNone/>
+            </a:pPr>
+            <a:r>
+              <a:rPr lang="en-US" sz="1200" dirty="0">
+                <a:solidFill>
+                  <a:srgbClr val="334155"/>
+                </a:solidFill>
+                <a:latin typeface="Segoe UI" pitchFamily="34" charset="0"/>
+                <a:ea typeface="Segoe UI" pitchFamily="34" charset="-122"/>
+                <a:cs typeface="Segoe UI" pitchFamily="34" charset="-120"/>
+              </a:rPr>
+              <a:t>• GLSL Fragment Shaders: Real-time chroma keying &amp; color grading.
+</a:t>
+            </a:r>
+            <a:pPr indent="0" marL="0">
+              <a:lnSpc>
+                <a:spcPct val="120000"/>
+              </a:lnSpc>
+              <a:buNone/>
+            </a:pPr>
+            <a:r>
+              <a:rPr lang="en-US" sz="1200" dirty="0">
+                <a:solidFill>
+                  <a:srgbClr val="334155"/>
+                </a:solidFill>
+                <a:latin typeface="Segoe UI" pitchFamily="34" charset="0"/>
+                <a:ea typeface="Segoe UI" pitchFamily="34" charset="-122"/>
+                <a:cs typeface="Segoe UI" pitchFamily="34" charset="-120"/>
+              </a:rPr>
+              <a:t>• Microsecond Timeline Model: Sub-millisecond timing precision (1s = 1,000,000µs).
+</a:t>
             </a:r>
             <a:endParaRPr lang="en-US" sz="1500" dirty="0"/>
           </a:p>
@@ -20652,7 +21643,7 @@
                 <a:ea typeface="Segoe UI" pitchFamily="34" charset="-122"/>
                 <a:cs typeface="Segoe UI" pitchFamily="34" charset="-120"/>
               </a:rPr>
-              <a:t>Planned Concurrency Controls
+              <a:t>2. In-Browser Export (WebCodecs API)
 </a:t>
             </a:r>
             <a:pPr indent="0" marL="0">
@@ -20670,7 +21661,7 @@
                 <a:ea typeface="Segoe UI" pitchFamily="34" charset="-122"/>
                 <a:cs typeface="Segoe UI" pitchFamily="34" charset="-120"/>
               </a:rPr>
-              <a:t>State synchronization engine ensuring smooth concurrent timeline workflows:
+              <a:t>Renders MP4 video directly on the user computer via hardware-accelerated WebCodecs (mediabunny).
 </a:t>
             </a:r>
             <a:pPr indent="0" marL="0">
@@ -20688,7 +21679,7 @@
                 <a:ea typeface="Segoe UI" pitchFamily="34" charset="-122"/>
                 <a:cs typeface="Segoe UI" pitchFamily="34" charset="-120"/>
               </a:rPr>
-              <a:t>• Clip-Level Mutex Locking: Optimistic locking to prevent race conditions.
+              <a:t>• Zero Server Cost ($0): 100% computed on client device.
 </a:t>
             </a:r>
             <a:pPr indent="0" marL="0">
@@ -20706,7 +21697,7 @@
                 <a:ea typeface="Segoe UI" pitchFamily="34" charset="-122"/>
                 <a:cs typeface="Segoe UI" pitchFamily="34" charset="-120"/>
               </a:rPr>
-              <a:t>• Live Teammate Cursors: Playhead markers broadcasting peer listening at 30Hz.
+              <a:t>• Lightning Speed: Encodes a 90s 1080p episode in ~12 seconds.
 </a:t>
             </a:r>
             <a:pPr indent="0" marL="0">
@@ -20724,76 +21715,10 @@
                 <a:ea typeface="Segoe UI" pitchFamily="34" charset="-122"/>
                 <a:cs typeface="Segoe UI" pitchFamily="34" charset="-120"/>
               </a:rPr>
-              <a:t>• Immutable Version Checkpoints: Continuous timeline revision snapshots saved to Firestore.
+              <a:t>• In-Memory ISOBMFF Muxing: Assembles MP4 container in memory.
 </a:t>
             </a:r>
             <a:endParaRPr lang="en-US" sz="1500" dirty="0"/>
-          </a:p>
-        </p:txBody>
-      </p:sp>
-      <p:sp>
-        <p:nvSpPr>
-          <p:cNvPr id="14" name="Shape 12"/>
-          <p:cNvSpPr/>
-          <p:nvPr/>
-        </p:nvSpPr>
-        <p:spPr>
-          <a:xfrm>
-            <a:off x="731520" y="5852160"/>
-            <a:ext cx="10698480" cy="502920"/>
-          </a:xfrm>
-          <a:prstGeom prst="roundRect">
-            <a:avLst>
-              <a:gd name="adj" fmla="val 14545"/>
-            </a:avLst>
-          </a:prstGeom>
-          <a:solidFill>
-            <a:srgbClr val="F8FAFC"/>
-          </a:solidFill>
-          <a:ln w="12700">
-            <a:solidFill>
-              <a:srgbClr val="E2E8F0"/>
-            </a:solidFill>
-            <a:prstDash val="solid"/>
-          </a:ln>
-        </p:spPr>
-      </p:sp>
-      <p:sp>
-        <p:nvSpPr>
-          <p:cNvPr id="15" name="Text 13"/>
-          <p:cNvSpPr/>
-          <p:nvPr/>
-        </p:nvSpPr>
-        <p:spPr>
-          <a:xfrm>
-            <a:off x="914400" y="5852160"/>
-            <a:ext cx="10332720" cy="502920"/>
-          </a:xfrm>
-          <a:prstGeom prst="rect">
-            <a:avLst/>
-          </a:prstGeom>
-          <a:noFill/>
-          <a:ln/>
-        </p:spPr>
-        <p:txBody>
-          <a:bodyPr wrap="square" rtlCol="0" anchor="ctr"/>
-          <a:lstStyle/>
-          <a:p>
-            <a:pPr indent="0" marL="0">
-              <a:buNone/>
-            </a:pPr>
-            <a:r>
-              <a:rPr lang="en-US" sz="1100" b="1" dirty="0">
-                <a:solidFill>
-                  <a:srgbClr val="475569"/>
-                </a:solidFill>
-                <a:latin typeface="Segoe UI" pitchFamily="34" charset="0"/>
-                <a:ea typeface="Segoe UI" pitchFamily="34" charset="-122"/>
-                <a:cs typeface="Segoe UI" pitchFamily="34" charset="-120"/>
-              </a:rPr>
-              <a:t>Status: Architecture &amp; Backend Service Designed ➔ Full Client Integration in Phase 2.</a:t>
-            </a:r>
-            <a:endParaRPr lang="en-US" sz="1100" dirty="0"/>
           </a:p>
         </p:txBody>
       </p:sp>
@@ -21008,7 +21933,7 @@
                 <a:ea typeface="Courier New" pitchFamily="34" charset="-122"/>
                 <a:cs typeface="Courier New" pitchFamily="34" charset="-120"/>
               </a:rPr>
-              <a:t>08 / 23</a:t>
+              <a:t>08 / 24</a:t>
             </a:r>
             <a:endParaRPr lang="en-US" sz="1100" dirty="0"/>
           </a:p>
@@ -21072,7 +21997,7 @@
                 <a:ea typeface="Courier New" pitchFamily="34" charset="-122"/>
                 <a:cs typeface="Courier New" pitchFamily="34" charset="-120"/>
               </a:rPr>
-              <a:t>LAYER 3: AI BRAIN (ACTIVE CORE)</a:t>
+              <a:t>PLANNED ROADMAP SPECIFICATION (PHASE 2)</a:t>
             </a:r>
             <a:endParaRPr lang="en-US" sz="1100" dirty="0"/>
           </a:p>
@@ -21111,7 +22036,7 @@
                 <a:ea typeface="Segoe UI" pitchFamily="34" charset="-122"/>
                 <a:cs typeface="Segoe UI" pitchFamily="34" charset="-120"/>
               </a:rPr>
-              <a:t>Hierarchical Multi-Agent AI Director</a:t>
+              <a:t>Real-Time Team Collaboration Architecture</a:t>
             </a:r>
             <a:endParaRPr lang="en-US" sz="2600" dirty="0"/>
           </a:p>
@@ -21126,11 +22051,11 @@
         <p:spPr>
           <a:xfrm>
             <a:off x="731520" y="2148840"/>
-            <a:ext cx="3383280" cy="3200400"/>
+            <a:ext cx="5212080" cy="3566160"/>
           </a:xfrm>
           <a:prstGeom prst="roundRect">
             <a:avLst>
-              <a:gd name="adj" fmla="val 2857"/>
+              <a:gd name="adj" fmla="val 2564"/>
             </a:avLst>
           </a:prstGeom>
           <a:solidFill>
@@ -21152,8 +22077,8 @@
         </p:nvSpPr>
         <p:spPr>
           <a:xfrm>
-            <a:off x="960120" y="2286000"/>
-            <a:ext cx="2926080" cy="2926080"/>
+            <a:off x="1005840" y="2331720"/>
+            <a:ext cx="4663440" cy="3200400"/>
           </a:xfrm>
           <a:prstGeom prst="rect">
             <a:avLst/>
@@ -21169,7 +22094,7 @@
               <a:buNone/>
             </a:pPr>
             <a:r>
-              <a:rPr lang="en-US" sz="1450" b="1" dirty="0">
+              <a:rPr lang="en-US" sz="1500" b="1" dirty="0">
                 <a:solidFill>
                   <a:srgbClr val="0F172A"/>
                 </a:solidFill>
@@ -21177,7 +22102,7 @@
                 <a:ea typeface="Segoe UI" pitchFamily="34" charset="-122"/>
                 <a:cs typeface="Segoe UI" pitchFamily="34" charset="-120"/>
               </a:rPr>
-              <a:t>1. Discovery &amp; Skeleton
+              <a:t>Delta Patch Protocol (PatchSyncService)
 </a:t>
             </a:r>
             <a:pPr indent="0" marL="0">
@@ -21187,7 +22112,7 @@
               <a:buNone/>
             </a:pPr>
             <a:r>
-              <a:rPr lang="en-US" sz="1200" dirty="0">
+              <a:rPr lang="en-US" sz="1250" dirty="0">
                 <a:solidFill>
                   <a:srgbClr val="64748B"/>
                 </a:solidFill>
@@ -21195,15 +22120,20 @@
                 <a:ea typeface="Segoe UI" pitchFamily="34" charset="-122"/>
                 <a:cs typeface="Segoe UI" pitchFamily="34" charset="-120"/>
               </a:rPr>
-              <a:t>TrendRadar: Scans viral drama trends via Parallel MCP.
-StorySkeleton: Designs 20–50 episode narrative master plans with cliffhangers.
+              <a:t>Designed to broadcast atomic RFC 6902 delta patches (&lt;1KB) over Socket.io instead of heavy 500KB blobs:
 </a:t>
             </a:r>
             <a:pPr indent="0" marL="0">
               <a:buNone/>
             </a:pPr>
-            <a:r>
-              <a:rPr lang="en-US" sz="1100" b="1" dirty="0">
+            <a:endParaRPr lang="en-US" sz="1500" dirty="0"/>
+          </a:p>
+          <a:p>
+            <a:pPr indent="0" marL="0">
+              <a:buNone/>
+            </a:pPr>
+            <a:r>
+              <a:rPr lang="en-US" sz="1100" dirty="0">
                 <a:solidFill>
                   <a:srgbClr val="0F172A"/>
                 </a:solidFill>
@@ -21211,9 +22141,94 @@
                 <a:ea typeface="Courier New" pitchFamily="34" charset="-122"/>
                 <a:cs typeface="Courier New" pitchFamily="34" charset="-120"/>
               </a:rPr>
-              <a:t>[Model: gemini-3.5-flash-lite]</a:t>
-            </a:r>
-            <a:endParaRPr lang="en-US" sz="1450" dirty="0"/>
+              <a:t>{</a:t>
+            </a:r>
+            <a:endParaRPr lang="en-US" sz="1500" dirty="0"/>
+          </a:p>
+          <a:p>
+            <a:pPr indent="0" marL="0">
+              <a:buNone/>
+            </a:pPr>
+            <a:r>
+              <a:rPr lang="en-US" sz="1100" dirty="0">
+                <a:solidFill>
+                  <a:srgbClr val="0F172A"/>
+                </a:solidFill>
+                <a:latin typeface="Courier New" pitchFamily="34" charset="0"/>
+                <a:ea typeface="Courier New" pitchFamily="34" charset="-122"/>
+                <a:cs typeface="Courier New" pitchFamily="34" charset="-120"/>
+              </a:rPr>
+              <a:t>  "op": "update",</a:t>
+            </a:r>
+            <a:endParaRPr lang="en-US" sz="1500" dirty="0"/>
+          </a:p>
+          <a:p>
+            <a:pPr indent="0" marL="0">
+              <a:buNone/>
+            </a:pPr>
+            <a:r>
+              <a:rPr lang="en-US" sz="1100" dirty="0">
+                <a:solidFill>
+                  <a:srgbClr val="0F172A"/>
+                </a:solidFill>
+                <a:latin typeface="Courier New" pitchFamily="34" charset="0"/>
+                <a:ea typeface="Courier New" pitchFamily="34" charset="-122"/>
+                <a:cs typeface="Courier New" pitchFamily="34" charset="-120"/>
+              </a:rPr>
+              <a:t>  "path": "/clips/clip_01/timing/display/to",</a:t>
+            </a:r>
+            <a:endParaRPr lang="en-US" sz="1500" dirty="0"/>
+          </a:p>
+          <a:p>
+            <a:pPr indent="0" marL="0">
+              <a:buNone/>
+            </a:pPr>
+            <a:r>
+              <a:rPr lang="en-US" sz="1100" dirty="0">
+                <a:solidFill>
+                  <a:srgbClr val="0F172A"/>
+                </a:solidFill>
+                <a:latin typeface="Courier New" pitchFamily="34" charset="0"/>
+                <a:ea typeface="Courier New" pitchFamily="34" charset="-122"/>
+                <a:cs typeface="Courier New" pitchFamily="34" charset="-120"/>
+              </a:rPr>
+              <a:t>  "value": 4500000,</a:t>
+            </a:r>
+            <a:endParaRPr lang="en-US" sz="1500" dirty="0"/>
+          </a:p>
+          <a:p>
+            <a:pPr indent="0" marL="0">
+              <a:buNone/>
+            </a:pPr>
+            <a:r>
+              <a:rPr lang="en-US" sz="1100" dirty="0">
+                <a:solidFill>
+                  <a:srgbClr val="0F172A"/>
+                </a:solidFill>
+                <a:latin typeface="Courier New" pitchFamily="34" charset="0"/>
+                <a:ea typeface="Courier New" pitchFamily="34" charset="-122"/>
+                <a:cs typeface="Courier New" pitchFamily="34" charset="-120"/>
+              </a:rPr>
+              <a:t>  "author": "usr_sarah"</a:t>
+            </a:r>
+            <a:endParaRPr lang="en-US" sz="1500" dirty="0"/>
+          </a:p>
+          <a:p>
+            <a:pPr indent="0" marL="0">
+              <a:buNone/>
+            </a:pPr>
+            <a:r>
+              <a:rPr lang="en-US" sz="1100" dirty="0">
+                <a:solidFill>
+                  <a:srgbClr val="0F172A"/>
+                </a:solidFill>
+                <a:latin typeface="Courier New" pitchFamily="34" charset="0"/>
+                <a:ea typeface="Courier New" pitchFamily="34" charset="-122"/>
+                <a:cs typeface="Courier New" pitchFamily="34" charset="-120"/>
+              </a:rPr>
+              <a:t>}</a:t>
+            </a:r>
+            <a:endParaRPr lang="en-US" sz="1500" dirty="0"/>
           </a:p>
         </p:txBody>
       </p:sp>
@@ -21225,12 +22240,12 @@
         </p:nvSpPr>
         <p:spPr>
           <a:xfrm>
-            <a:off x="4389120" y="2148840"/>
-            <a:ext cx="3383280" cy="3200400"/>
+            <a:off x="6217920" y="2148840"/>
+            <a:ext cx="5212080" cy="3566160"/>
           </a:xfrm>
           <a:prstGeom prst="roundRect">
             <a:avLst>
-              <a:gd name="adj" fmla="val 2857"/>
+              <a:gd name="adj" fmla="val 2564"/>
             </a:avLst>
           </a:prstGeom>
           <a:solidFill>
@@ -21252,8 +22267,8 @@
         </p:nvSpPr>
         <p:spPr>
           <a:xfrm>
-            <a:off x="4617720" y="2286000"/>
-            <a:ext cx="2926080" cy="2926080"/>
+            <a:off x="6492240" y="2331720"/>
+            <a:ext cx="4663440" cy="3200400"/>
           </a:xfrm>
           <a:prstGeom prst="rect">
             <a:avLst/>
@@ -21269,7 +22284,7 @@
               <a:buNone/>
             </a:pPr>
             <a:r>
-              <a:rPr lang="en-US" sz="1450" b="1" dirty="0">
+              <a:rPr lang="en-US" sz="1500" b="1" dirty="0">
                 <a:solidFill>
                   <a:srgbClr val="0F172A"/>
                 </a:solidFill>
@@ -21277,7 +22292,7 @@
                 <a:ea typeface="Segoe UI" pitchFamily="34" charset="-122"/>
                 <a:cs typeface="Segoe UI" pitchFamily="34" charset="-120"/>
               </a:rPr>
-              <a:t>2. Screenplay Breakdown
+              <a:t>Planned Concurrency Controls
 </a:t>
             </a:r>
             <a:pPr indent="0" marL="0">
@@ -21287,7 +22302,7 @@
               <a:buNone/>
             </a:pPr>
             <a:r>
-              <a:rPr lang="en-US" sz="1200" dirty="0">
+              <a:rPr lang="en-US" sz="1250" dirty="0">
                 <a:solidFill>
                   <a:srgbClr val="64748B"/>
                 </a:solidFill>
@@ -21295,88 +22310,7 @@
                 <a:ea typeface="Segoe UI" pitchFamily="34" charset="-122"/>
                 <a:cs typeface="Segoe UI" pitchFamily="34" charset="-120"/>
               </a:rPr>
-              <a:t>ScriptAgent: Breaks each episode into 15–45 short scene blocks (4–8s) with visual prompts, actions, and dialogues in JSON.
-</a:t>
-            </a:r>
-            <a:pPr indent="0" marL="0">
-              <a:buNone/>
-            </a:pPr>
-            <a:r>
-              <a:rPr lang="en-US" sz="1100" b="1" dirty="0">
-                <a:solidFill>
-                  <a:srgbClr val="0F172A"/>
-                </a:solidFill>
-                <a:latin typeface="Courier New" pitchFamily="34" charset="0"/>
-                <a:ea typeface="Courier New" pitchFamily="34" charset="-122"/>
-                <a:cs typeface="Courier New" pitchFamily="34" charset="-120"/>
-              </a:rPr>
-              <a:t>[Model: gemini-3.5-flash-lite]</a:t>
-            </a:r>
-            <a:endParaRPr lang="en-US" sz="1450" dirty="0"/>
-          </a:p>
-        </p:txBody>
-      </p:sp>
-      <p:sp>
-        <p:nvSpPr>
-          <p:cNvPr id="14" name="Shape 12"/>
-          <p:cNvSpPr/>
-          <p:nvPr/>
-        </p:nvSpPr>
-        <p:spPr>
-          <a:xfrm>
-            <a:off x="8046720" y="2148840"/>
-            <a:ext cx="3383280" cy="3200400"/>
-          </a:xfrm>
-          <a:prstGeom prst="roundRect">
-            <a:avLst>
-              <a:gd name="adj" fmla="val 2857"/>
-            </a:avLst>
-          </a:prstGeom>
-          <a:solidFill>
-            <a:srgbClr val="FFFFFF"/>
-          </a:solidFill>
-          <a:ln w="12700">
-            <a:solidFill>
-              <a:srgbClr val="E2E8F0"/>
-            </a:solidFill>
-            <a:prstDash val="solid"/>
-          </a:ln>
-        </p:spPr>
-      </p:sp>
-      <p:sp>
-        <p:nvSpPr>
-          <p:cNvPr id="15" name="Text 13"/>
-          <p:cNvSpPr/>
-          <p:nvPr/>
-        </p:nvSpPr>
-        <p:spPr>
-          <a:xfrm>
-            <a:off x="8275320" y="2286000"/>
-            <a:ext cx="2926080" cy="2926080"/>
-          </a:xfrm>
-          <a:prstGeom prst="rect">
-            <a:avLst/>
-          </a:prstGeom>
-          <a:noFill/>
-          <a:ln/>
-        </p:spPr>
-        <p:txBody>
-          <a:bodyPr wrap="square" rtlCol="0" anchor="t"/>
-          <a:lstStyle/>
-          <a:p>
-            <a:pPr indent="0" marL="0">
-              <a:buNone/>
-            </a:pPr>
-            <a:r>
-              <a:rPr lang="en-US" sz="1450" b="1" dirty="0">
-                <a:solidFill>
-                  <a:srgbClr val="0F172A"/>
-                </a:solidFill>
-                <a:latin typeface="Segoe UI" pitchFamily="34" charset="0"/>
-                <a:ea typeface="Segoe UI" pitchFamily="34" charset="-122"/>
-                <a:cs typeface="Segoe UI" pitchFamily="34" charset="-120"/>
-              </a:rPr>
-              <a:t>3. QA &amp; In-Editor Copilot
+              <a:t>State synchronization engine ensuring smooth concurrent timeline workflows:
 </a:t>
             </a:r>
             <a:pPr indent="0" marL="0">
@@ -21388,48 +22322,69 @@
             <a:r>
               <a:rPr lang="en-US" sz="1200" dirty="0">
                 <a:solidFill>
-                  <a:srgbClr val="64748B"/>
-                </a:solidFill>
-                <a:latin typeface="Segoe UI" pitchFamily="34" charset="0"/>
-                <a:ea typeface="Segoe UI" pitchFamily="34" charset="-122"/>
-                <a:cs typeface="Segoe UI" pitchFamily="34" charset="-120"/>
-              </a:rPr>
-              <a:t>SupervisionAgent: Audits pacing &amp; safety.
-ChatbotAgent: Modifies timeline state via natural language commands.
+                  <a:srgbClr val="334155"/>
+                </a:solidFill>
+                <a:latin typeface="Segoe UI" pitchFamily="34" charset="0"/>
+                <a:ea typeface="Segoe UI" pitchFamily="34" charset="-122"/>
+                <a:cs typeface="Segoe UI" pitchFamily="34" charset="-120"/>
+              </a:rPr>
+              <a:t>• Clip-Level Mutex Locking: Optimistic locking to prevent race conditions.
 </a:t>
             </a:r>
             <a:pPr indent="0" marL="0">
-              <a:buNone/>
-            </a:pPr>
-            <a:r>
-              <a:rPr lang="en-US" sz="1100" b="1" dirty="0">
-                <a:solidFill>
-                  <a:srgbClr val="0F172A"/>
-                </a:solidFill>
-                <a:latin typeface="Courier New" pitchFamily="34" charset="0"/>
-                <a:ea typeface="Courier New" pitchFamily="34" charset="-122"/>
-                <a:cs typeface="Courier New" pitchFamily="34" charset="-120"/>
-              </a:rPr>
-              <a:t>[Model: gemini-3.5-flash-lite / 2.5-pro]</a:t>
-            </a:r>
-            <a:endParaRPr lang="en-US" sz="1450" dirty="0"/>
-          </a:p>
-        </p:txBody>
-      </p:sp>
-      <p:sp>
-        <p:nvSpPr>
-          <p:cNvPr id="16" name="Shape 14"/>
-          <p:cNvSpPr/>
-          <p:nvPr/>
-        </p:nvSpPr>
-        <p:spPr>
-          <a:xfrm>
-            <a:off x="731520" y="5486400"/>
-            <a:ext cx="10698480" cy="594360"/>
+              <a:lnSpc>
+                <a:spcPct val="120000"/>
+              </a:lnSpc>
+              <a:buNone/>
+            </a:pPr>
+            <a:r>
+              <a:rPr lang="en-US" sz="1200" dirty="0">
+                <a:solidFill>
+                  <a:srgbClr val="334155"/>
+                </a:solidFill>
+                <a:latin typeface="Segoe UI" pitchFamily="34" charset="0"/>
+                <a:ea typeface="Segoe UI" pitchFamily="34" charset="-122"/>
+                <a:cs typeface="Segoe UI" pitchFamily="34" charset="-120"/>
+              </a:rPr>
+              <a:t>• Live Teammate Cursors: Playhead markers broadcasting peer listening at 30Hz.
+</a:t>
+            </a:r>
+            <a:pPr indent="0" marL="0">
+              <a:lnSpc>
+                <a:spcPct val="120000"/>
+              </a:lnSpc>
+              <a:buNone/>
+            </a:pPr>
+            <a:r>
+              <a:rPr lang="en-US" sz="1200" dirty="0">
+                <a:solidFill>
+                  <a:srgbClr val="334155"/>
+                </a:solidFill>
+                <a:latin typeface="Segoe UI" pitchFamily="34" charset="0"/>
+                <a:ea typeface="Segoe UI" pitchFamily="34" charset="-122"/>
+                <a:cs typeface="Segoe UI" pitchFamily="34" charset="-120"/>
+              </a:rPr>
+              <a:t>• Immutable Version Checkpoints: Continuous timeline revision snapshots saved to Firestore.
+</a:t>
+            </a:r>
+            <a:endParaRPr lang="en-US" sz="1500" dirty="0"/>
+          </a:p>
+        </p:txBody>
+      </p:sp>
+      <p:sp>
+        <p:nvSpPr>
+          <p:cNvPr id="14" name="Shape 12"/>
+          <p:cNvSpPr/>
+          <p:nvPr/>
+        </p:nvSpPr>
+        <p:spPr>
+          <a:xfrm>
+            <a:off x="731520" y="5852160"/>
+            <a:ext cx="10698480" cy="502920"/>
           </a:xfrm>
           <a:prstGeom prst="roundRect">
             <a:avLst>
-              <a:gd name="adj" fmla="val 12308"/>
+              <a:gd name="adj" fmla="val 14545"/>
             </a:avLst>
           </a:prstGeom>
           <a:solidFill>
@@ -21445,14 +22400,14 @@
       </p:sp>
       <p:sp>
         <p:nvSpPr>
-          <p:cNvPr id="17" name="Text 15"/>
-          <p:cNvSpPr/>
-          <p:nvPr/>
-        </p:nvSpPr>
-        <p:spPr>
-          <a:xfrm>
-            <a:off x="914400" y="5486400"/>
-            <a:ext cx="10332720" cy="594360"/>
+          <p:cNvPr id="15" name="Text 13"/>
+          <p:cNvSpPr/>
+          <p:nvPr/>
+        </p:nvSpPr>
+        <p:spPr>
+          <a:xfrm>
+            <a:off x="914400" y="5852160"/>
+            <a:ext cx="10332720" cy="502920"/>
           </a:xfrm>
           <a:prstGeom prst="rect">
             <a:avLst/>
@@ -21468,7 +22423,7 @@
               <a:buNone/>
             </a:pPr>
             <a:r>
-              <a:rPr lang="en-US" sz="1150" b="1" dirty="0">
+              <a:rPr lang="en-US" sz="1100" b="1" dirty="0">
                 <a:solidFill>
                   <a:srgbClr val="475569"/>
                 </a:solidFill>
@@ -21476,9 +22431,9 @@
                 <a:ea typeface="Segoe UI" pitchFamily="34" charset="-122"/>
                 <a:cs typeface="Segoe UI" pitchFamily="34" charset="-120"/>
               </a:rPr>
-              <a:t>🧠 4-Tier Memory Mesh: Active Session State ➔ Vertex Vector Search RAG (text-embedding-004) ➔ Series Knowledge Graph Lineage ➔ Token Compressor.</a:t>
-            </a:r>
-            <a:endParaRPr lang="en-US" sz="1150" dirty="0"/>
+              <a:t>Status: Architecture &amp; Backend Service Designed ➔ Full Client Integration in Phase 2.</a:t>
+            </a:r>
+            <a:endParaRPr lang="en-US" sz="1100" dirty="0"/>
           </a:p>
         </p:txBody>
       </p:sp>
@@ -21693,7 +22648,7 @@
                 <a:ea typeface="Courier New" pitchFamily="34" charset="-122"/>
                 <a:cs typeface="Courier New" pitchFamily="34" charset="-120"/>
               </a:rPr>
-              <a:t>09 / 23</a:t>
+              <a:t>09 / 24</a:t>
             </a:r>
             <a:endParaRPr lang="en-US" sz="1100" dirty="0"/>
           </a:p>
@@ -21757,7 +22712,7 @@
                 <a:ea typeface="Courier New" pitchFamily="34" charset="-122"/>
                 <a:cs typeface="Courier New" pitchFamily="34" charset="-120"/>
               </a:rPr>
-              <a:t>LAYER 3: LOCALIZATION (ACTIVE CORE)</a:t>
+              <a:t>LAYER 3: AI BRAIN (ACTIVE CORE)</a:t>
             </a:r>
             <a:endParaRPr lang="en-US" sz="1100" dirty="0"/>
           </a:p>
@@ -21796,7 +22751,7 @@
                 <a:ea typeface="Segoe UI" pitchFamily="34" charset="-122"/>
                 <a:cs typeface="Segoe UI" pitchFamily="34" charset="-120"/>
               </a:rPr>
-              <a:t>Decoupled Audio-Visual Dubbing Engine</a:t>
+              <a:t>Hierarchical Multi-Agent AI Director</a:t>
             </a:r>
             <a:endParaRPr lang="en-US" sz="2600" dirty="0"/>
           </a:p>
@@ -21811,11 +22766,11 @@
         <p:spPr>
           <a:xfrm>
             <a:off x="731520" y="2148840"/>
-            <a:ext cx="5212080" cy="3566160"/>
+            <a:ext cx="3383280" cy="3200400"/>
           </a:xfrm>
           <a:prstGeom prst="roundRect">
             <a:avLst>
-              <a:gd name="adj" fmla="val 2564"/>
+              <a:gd name="adj" fmla="val 2857"/>
             </a:avLst>
           </a:prstGeom>
           <a:solidFill>
@@ -21837,8 +22792,8 @@
         </p:nvSpPr>
         <p:spPr>
           <a:xfrm>
-            <a:off x="1005840" y="2331720"/>
-            <a:ext cx="4663440" cy="3200400"/>
+            <a:off x="960120" y="2286000"/>
+            <a:ext cx="2926080" cy="2926080"/>
           </a:xfrm>
           <a:prstGeom prst="rect">
             <a:avLst/>
@@ -21854,7 +22809,7 @@
               <a:buNone/>
             </a:pPr>
             <a:r>
-              <a:rPr lang="en-US" sz="1500" b="1" dirty="0">
+              <a:rPr lang="en-US" sz="1450" b="1" dirty="0">
                 <a:solidFill>
                   <a:srgbClr val="0F172A"/>
                 </a:solidFill>
@@ -21862,7 +22817,7 @@
                 <a:ea typeface="Segoe UI" pitchFamily="34" charset="-122"/>
                 <a:cs typeface="Segoe UI" pitchFamily="34" charset="-120"/>
               </a:rPr>
-              <a:t>Track 1: Pure Visual Motion (VIDEO 1)
+              <a:t>1. Discovery &amp; Skeleton
 </a:t>
             </a:r>
             <a:pPr indent="0" marL="0">
@@ -21872,7 +22827,7 @@
               <a:buNone/>
             </a:pPr>
             <a:r>
-              <a:rPr lang="en-US" sz="1250" dirty="0">
+              <a:rPr lang="en-US" sz="1200" dirty="0">
                 <a:solidFill>
                   <a:srgbClr val="64748B"/>
                 </a:solidFill>
@@ -21880,20 +22835,15 @@
                 <a:ea typeface="Segoe UI" pitchFamily="34" charset="-122"/>
                 <a:cs typeface="Segoe UI" pitchFamily="34" charset="-120"/>
               </a:rPr>
-              <a:t>Generated as silent video clips via Google Veo 3.1 (veo-3.1-generate-001). Immutable during multi-language dubbing operations.
+              <a:t>TrendRadar: Scans viral drama trends via Parallel MCP.
+StorySkeleton: Designs 20–50 episode narrative master plans with cliffhangers.
 </a:t>
             </a:r>
             <a:pPr indent="0" marL="0">
               <a:buNone/>
             </a:pPr>
-            <a:endParaRPr lang="en-US" sz="1500" dirty="0"/>
-          </a:p>
-          <a:p>
-            <a:pPr indent="0" marL="0">
-              <a:buNone/>
-            </a:pPr>
-            <a:r>
-              <a:rPr lang="en-US" sz="1100" dirty="0">
+            <a:r>
+              <a:rPr lang="en-US" sz="1100" b="1" dirty="0">
                 <a:solidFill>
                   <a:srgbClr val="0F172A"/>
                 </a:solidFill>
@@ -21901,9 +22851,9 @@
                 <a:ea typeface="Courier New" pitchFamily="34" charset="-122"/>
                 <a:cs typeface="Courier New" pitchFamily="34" charset="-120"/>
               </a:rPr>
-              <a:t>[Scene 01: 6.00s] ── [Scene 02: 5.50s] (Fixed Visuals)</a:t>
-            </a:r>
-            <a:endParaRPr lang="en-US" sz="1500" dirty="0"/>
+              <a:t>[Model: gemini-3.5-flash-lite]</a:t>
+            </a:r>
+            <a:endParaRPr lang="en-US" sz="1450" dirty="0"/>
           </a:p>
         </p:txBody>
       </p:sp>
@@ -21915,12 +22865,12 @@
         </p:nvSpPr>
         <p:spPr>
           <a:xfrm>
-            <a:off x="6217920" y="2148840"/>
-            <a:ext cx="5212080" cy="3566160"/>
+            <a:off x="4389120" y="2148840"/>
+            <a:ext cx="3383280" cy="3200400"/>
           </a:xfrm>
           <a:prstGeom prst="roundRect">
             <a:avLst>
-              <a:gd name="adj" fmla="val 2564"/>
+              <a:gd name="adj" fmla="val 2857"/>
             </a:avLst>
           </a:prstGeom>
           <a:solidFill>
@@ -21942,8 +22892,8 @@
         </p:nvSpPr>
         <p:spPr>
           <a:xfrm>
-            <a:off x="6492240" y="2331720"/>
-            <a:ext cx="4663440" cy="3200400"/>
+            <a:off x="4617720" y="2286000"/>
+            <a:ext cx="2926080" cy="2926080"/>
           </a:xfrm>
           <a:prstGeom prst="rect">
             <a:avLst/>
@@ -21959,7 +22909,7 @@
               <a:buNone/>
             </a:pPr>
             <a:r>
-              <a:rPr lang="en-US" sz="1500" b="1" dirty="0">
+              <a:rPr lang="en-US" sz="1450" b="1" dirty="0">
                 <a:solidFill>
                   <a:srgbClr val="0F172A"/>
                 </a:solidFill>
@@ -21967,7 +22917,7 @@
                 <a:ea typeface="Segoe UI" pitchFamily="34" charset="-122"/>
                 <a:cs typeface="Segoe UI" pitchFamily="34" charset="-120"/>
               </a:rPr>
-              <a:t>Track 2: Neural TTS Dialogue (AUDIO 1)
+              <a:t>2. Screenplay Breakdown
 </a:t>
             </a:r>
             <a:pPr indent="0" marL="0">
@@ -21977,7 +22927,7 @@
               <a:buNone/>
             </a:pPr>
             <a:r>
-              <a:rPr lang="en-US" sz="1250" dirty="0">
+              <a:rPr lang="en-US" sz="1200" dirty="0">
                 <a:solidFill>
                   <a:srgbClr val="64748B"/>
                 </a:solidFill>
@@ -21985,20 +22935,14 @@
                 <a:ea typeface="Segoe UI" pitchFamily="34" charset="-122"/>
                 <a:cs typeface="Segoe UI" pitchFamily="34" charset="-120"/>
               </a:rPr>
-              <a:t>Synthesized per language track via gemini-3.1-flash-tts-preview (30 distinct voices) with word-level phonetic timestamps.
+              <a:t>ScriptAgent: Breaks each episode into 15–45 short scene blocks (4–8s) with visual prompts, actions, and dialogues in JSON.
 </a:t>
             </a:r>
             <a:pPr indent="0" marL="0">
               <a:buNone/>
             </a:pPr>
-            <a:endParaRPr lang="en-US" sz="1500" dirty="0"/>
-          </a:p>
-          <a:p>
-            <a:pPr indent="0" marL="0">
-              <a:buNone/>
-            </a:pPr>
-            <a:r>
-              <a:rPr lang="en-US" sz="1100" dirty="0">
+            <a:r>
+              <a:rPr lang="en-US" sz="1100" b="1" dirty="0">
                 <a:solidFill>
                   <a:srgbClr val="0F172A"/>
                 </a:solidFill>
@@ -22006,16 +22950,99 @@
                 <a:ea typeface="Courier New" pitchFamily="34" charset="-122"/>
                 <a:cs typeface="Courier New" pitchFamily="34" charset="-120"/>
               </a:rPr>
-              <a:t>EN: "Where are you?" (2.1s)</a:t>
-            </a:r>
-            <a:endParaRPr lang="en-US" sz="1500" dirty="0"/>
-          </a:p>
-          <a:p>
-            <a:pPr indent="0" marL="0">
-              <a:buNone/>
-            </a:pPr>
-            <a:r>
-              <a:rPr lang="en-US" sz="1100" dirty="0">
+              <a:t>[Model: gemini-3.5-flash-lite]</a:t>
+            </a:r>
+            <a:endParaRPr lang="en-US" sz="1450" dirty="0"/>
+          </a:p>
+        </p:txBody>
+      </p:sp>
+      <p:sp>
+        <p:nvSpPr>
+          <p:cNvPr id="14" name="Shape 12"/>
+          <p:cNvSpPr/>
+          <p:nvPr/>
+        </p:nvSpPr>
+        <p:spPr>
+          <a:xfrm>
+            <a:off x="8046720" y="2148840"/>
+            <a:ext cx="3383280" cy="3200400"/>
+          </a:xfrm>
+          <a:prstGeom prst="roundRect">
+            <a:avLst>
+              <a:gd name="adj" fmla="val 2857"/>
+            </a:avLst>
+          </a:prstGeom>
+          <a:solidFill>
+            <a:srgbClr val="FFFFFF"/>
+          </a:solidFill>
+          <a:ln w="12700">
+            <a:solidFill>
+              <a:srgbClr val="E2E8F0"/>
+            </a:solidFill>
+            <a:prstDash val="solid"/>
+          </a:ln>
+        </p:spPr>
+      </p:sp>
+      <p:sp>
+        <p:nvSpPr>
+          <p:cNvPr id="15" name="Text 13"/>
+          <p:cNvSpPr/>
+          <p:nvPr/>
+        </p:nvSpPr>
+        <p:spPr>
+          <a:xfrm>
+            <a:off x="8275320" y="2286000"/>
+            <a:ext cx="2926080" cy="2926080"/>
+          </a:xfrm>
+          <a:prstGeom prst="rect">
+            <a:avLst/>
+          </a:prstGeom>
+          <a:noFill/>
+          <a:ln/>
+        </p:spPr>
+        <p:txBody>
+          <a:bodyPr wrap="square" rtlCol="0" anchor="t"/>
+          <a:lstStyle/>
+          <a:p>
+            <a:pPr indent="0" marL="0">
+              <a:buNone/>
+            </a:pPr>
+            <a:r>
+              <a:rPr lang="en-US" sz="1450" b="1" dirty="0">
+                <a:solidFill>
+                  <a:srgbClr val="0F172A"/>
+                </a:solidFill>
+                <a:latin typeface="Segoe UI" pitchFamily="34" charset="0"/>
+                <a:ea typeface="Segoe UI" pitchFamily="34" charset="-122"/>
+                <a:cs typeface="Segoe UI" pitchFamily="34" charset="-120"/>
+              </a:rPr>
+              <a:t>3. QA &amp; In-Editor Copilot
+</a:t>
+            </a:r>
+            <a:pPr indent="0" marL="0">
+              <a:lnSpc>
+                <a:spcPct val="120000"/>
+              </a:lnSpc>
+              <a:buNone/>
+            </a:pPr>
+            <a:r>
+              <a:rPr lang="en-US" sz="1200" dirty="0">
+                <a:solidFill>
+                  <a:srgbClr val="64748B"/>
+                </a:solidFill>
+                <a:latin typeface="Segoe UI" pitchFamily="34" charset="0"/>
+                <a:ea typeface="Segoe UI" pitchFamily="34" charset="-122"/>
+                <a:cs typeface="Segoe UI" pitchFamily="34" charset="-120"/>
+              </a:rPr>
+              <a:t>SupervisionAgent: Audits pacing &amp; safety.
+ChatbotAgent: Modifies timeline state via natural language commands.
+</a:t>
+            </a:r>
+            <a:pPr indent="0" marL="0">
+              <a:buNone/>
+            </a:pPr>
+            <a:r>
+              <a:rPr lang="en-US" sz="1100" b="1" dirty="0">
                 <a:solidFill>
                   <a:srgbClr val="0F172A"/>
                 </a:solidFill>
@@ -22023,26 +23050,26 @@
                 <a:ea typeface="Courier New" pitchFamily="34" charset="-122"/>
                 <a:cs typeface="Courier New" pitchFamily="34" charset="-120"/>
               </a:rPr>
-              <a:t>VI: "Anh đang ở đâu?" (2.6s, Δt)</a:t>
-            </a:r>
-            <a:endParaRPr lang="en-US" sz="1500" dirty="0"/>
-          </a:p>
-        </p:txBody>
-      </p:sp>
-      <p:sp>
-        <p:nvSpPr>
-          <p:cNvPr id="14" name="Shape 12"/>
-          <p:cNvSpPr/>
-          <p:nvPr/>
-        </p:nvSpPr>
-        <p:spPr>
-          <a:xfrm>
-            <a:off x="731520" y="5852160"/>
-            <a:ext cx="10698480" cy="502920"/>
+              <a:t>[Model: gemini-3.5-flash-lite / 2.5-pro]</a:t>
+            </a:r>
+            <a:endParaRPr lang="en-US" sz="1450" dirty="0"/>
+          </a:p>
+        </p:txBody>
+      </p:sp>
+      <p:sp>
+        <p:nvSpPr>
+          <p:cNvPr id="16" name="Shape 14"/>
+          <p:cNvSpPr/>
+          <p:nvPr/>
+        </p:nvSpPr>
+        <p:spPr>
+          <a:xfrm>
+            <a:off x="731520" y="5486400"/>
+            <a:ext cx="10698480" cy="594360"/>
           </a:xfrm>
           <a:prstGeom prst="roundRect">
             <a:avLst>
-              <a:gd name="adj" fmla="val 14545"/>
+              <a:gd name="adj" fmla="val 12308"/>
             </a:avLst>
           </a:prstGeom>
           <a:solidFill>
@@ -22058,14 +23085,14 @@
       </p:sp>
       <p:sp>
         <p:nvSpPr>
-          <p:cNvPr id="15" name="Text 13"/>
-          <p:cNvSpPr/>
-          <p:nvPr/>
-        </p:nvSpPr>
-        <p:spPr>
-          <a:xfrm>
-            <a:off x="914400" y="5852160"/>
-            <a:ext cx="10332720" cy="502920"/>
+          <p:cNvPr id="17" name="Text 15"/>
+          <p:cNvSpPr/>
+          <p:nvPr/>
+        </p:nvSpPr>
+        <p:spPr>
+          <a:xfrm>
+            <a:off x="914400" y="5486400"/>
+            <a:ext cx="10332720" cy="594360"/>
           </a:xfrm>
           <a:prstGeom prst="rect">
             <a:avLst/>
@@ -22081,7 +23108,7 @@
               <a:buNone/>
             </a:pPr>
             <a:r>
-              <a:rPr lang="en-US" sz="1100" b="1" dirty="0">
+              <a:rPr lang="en-US" sz="1150" b="1" dirty="0">
                 <a:solidFill>
                   <a:srgbClr val="475569"/>
                 </a:solidFill>
@@ -22089,9 +23116,9 @@
                 <a:ea typeface="Segoe UI" pitchFamily="34" charset="-122"/>
                 <a:cs typeface="Segoe UI" pitchFamily="34" charset="-120"/>
               </a:rPr>
-              <a:t>💡 Unfair Cost Advantage: To distribute in 5 languages, Shine only swaps the voice track and recalculates timeline timings (Δt). You never re-render expensive video AI clips!</a:t>
-            </a:r>
-            <a:endParaRPr lang="en-US" sz="1100" dirty="0"/>
+              <a:t>🧠 4-Tier Memory Mesh: Active Session State ➔ Vertex Vector Search RAG (text-embedding-004) ➔ Series Knowledge Graph Lineage ➔ Token Compressor.</a:t>
+            </a:r>
+            <a:endParaRPr lang="en-US" sz="1150" dirty="0"/>
           </a:p>
         </p:txBody>
       </p:sp>
